--- a/policy/proposal_006.pptx
+++ b/policy/proposal_006.pptx
@@ -2281,7 +2281,7 @@
     <p:bg>
       <p:bgPr>
         <a:solidFill>
-          <a:srgbClr val="0A0A0A"/>
+          <a:srgbClr val="F5F6F8"/>
         </a:solidFill>
       </p:bgPr>
     </p:bg>
@@ -2314,11 +2314,11 @@
             <a:avLst/>
           </a:prstGeom>
           <a:solidFill>
-            <a:srgbClr val="D62828"/>
+            <a:srgbClr val="C8161D"/>
           </a:solidFill>
           <a:ln w="12700">
             <a:solidFill>
-              <a:srgbClr val="D62828"/>
+              <a:srgbClr val="C8161D"/>
             </a:solidFill>
             <a:prstDash val="solid"/>
           </a:ln>
@@ -2351,11 +2351,11 @@
             <a:r>
               <a:rPr lang="en-US" sz="1000" b="1" spc="300" kern="0" dirty="0">
                 <a:solidFill>
-                  <a:srgbClr val="D62828"/>
+                  <a:srgbClr val="C8161D"/>
                 </a:solidFill>
                 <a:latin typeface="Arial" pitchFamily="34" charset="0"/>
-                <a:ea typeface="Arial" pitchFamily="34" charset="-122"/>
-                <a:cs typeface="Arial" pitchFamily="34" charset="-120"/>
+                <a:ea typeface="BIZ UDPGothic" pitchFamily="34" charset="-122"/>
+                <a:cs typeface="BIZ UDPGothic" pitchFamily="34" charset="-120"/>
               </a:rPr>
               <a:t>政策提言プラットフォーム ── 提言006</a:t>
             </a:r>
@@ -2390,11 +2390,11 @@
             <a:r>
               <a:rPr lang="en-US" sz="3800" b="1" dirty="0">
                 <a:solidFill>
-                  <a:srgbClr val="F5F5F0"/>
-                </a:solidFill>
-                <a:latin typeface="Cambria" pitchFamily="34" charset="0"/>
-                <a:ea typeface="Cambria" pitchFamily="34" charset="-122"/>
-                <a:cs typeface="Cambria" pitchFamily="34" charset="-120"/>
+                  <a:srgbClr val="16181D"/>
+                </a:solidFill>
+                <a:latin typeface="BIZ UDPGothic" pitchFamily="34" charset="0"/>
+                <a:ea typeface="BIZ UDPGothic" pitchFamily="34" charset="-122"/>
+                <a:cs typeface="BIZ UDPGothic" pitchFamily="34" charset="-120"/>
               </a:rPr>
               <a:t>NHKの解体・分社化による</a:t>
             </a:r>
@@ -2407,11 +2407,11 @@
             <a:r>
               <a:rPr lang="en-US" sz="3800" b="1" dirty="0">
                 <a:solidFill>
-                  <a:srgbClr val="F5F5F0"/>
-                </a:solidFill>
-                <a:latin typeface="Cambria" pitchFamily="34" charset="0"/>
-                <a:ea typeface="Cambria" pitchFamily="34" charset="-122"/>
-                <a:cs typeface="Cambria" pitchFamily="34" charset="-120"/>
+                  <a:srgbClr val="16181D"/>
+                </a:solidFill>
+                <a:latin typeface="BIZ UDPGothic" pitchFamily="34" charset="0"/>
+                <a:ea typeface="BIZ UDPGothic" pitchFamily="34" charset="-122"/>
+                <a:cs typeface="BIZ UDPGothic" pitchFamily="34" charset="-120"/>
               </a:rPr>
               <a:t>受信料大幅引き下げと</a:t>
             </a:r>
@@ -2424,11 +2424,11 @@
             <a:r>
               <a:rPr lang="en-US" sz="3800" b="1" dirty="0">
                 <a:solidFill>
-                  <a:srgbClr val="F5F5F0"/>
-                </a:solidFill>
-                <a:latin typeface="Cambria" pitchFamily="34" charset="0"/>
-                <a:ea typeface="Cambria" pitchFamily="34" charset="-122"/>
-                <a:cs typeface="Cambria" pitchFamily="34" charset="-120"/>
+                  <a:srgbClr val="16181D"/>
+                </a:solidFill>
+                <a:latin typeface="BIZ UDPGothic" pitchFamily="34" charset="0"/>
+                <a:ea typeface="BIZ UDPGothic" pitchFamily="34" charset="-122"/>
+                <a:cs typeface="BIZ UDPGothic" pitchFamily="34" charset="-120"/>
               </a:rPr>
               <a:t>国家映像戦略への転換</a:t>
             </a:r>
@@ -2451,11 +2451,11 @@
             <a:avLst/>
           </a:prstGeom>
           <a:solidFill>
-            <a:srgbClr val="2E2E2E"/>
+            <a:srgbClr val="DDE0E6"/>
           </a:solidFill>
           <a:ln w="12700">
             <a:solidFill>
-              <a:srgbClr val="2E2E2E"/>
+              <a:srgbClr val="DDE0E6"/>
             </a:solidFill>
             <a:prstDash val="solid"/>
           </a:ln>
@@ -2488,11 +2488,11 @@
             <a:r>
               <a:rPr lang="en-US" sz="1100" dirty="0">
                 <a:solidFill>
-                  <a:srgbClr val="888888"/>
+                  <a:srgbClr val="626875"/>
                 </a:solidFill>
                 <a:latin typeface="Arial" pitchFamily="34" charset="0"/>
-                <a:ea typeface="Arial" pitchFamily="34" charset="-122"/>
-                <a:cs typeface="Arial" pitchFamily="34" charset="-120"/>
+                <a:ea typeface="BIZ UDPGothic" pitchFamily="34" charset="-122"/>
+                <a:cs typeface="BIZ UDPGothic" pitchFamily="34" charset="-120"/>
               </a:rPr>
               <a:t>REBOOT JAPAN ── 市民による政策提言プラットフォーム</a:t>
             </a:r>
@@ -2514,7 +2514,7 @@
     <p:bg>
       <p:bgPr>
         <a:solidFill>
-          <a:srgbClr val="0A0A0A"/>
+          <a:srgbClr val="F5F6F8"/>
         </a:solidFill>
       </p:bgPr>
     </p:bg>
@@ -2559,11 +2559,11 @@
             <a:r>
               <a:rPr lang="en-US" sz="900" b="1" spc="400" kern="0" dirty="0">
                 <a:solidFill>
-                  <a:srgbClr val="D62828"/>
+                  <a:srgbClr val="C8161D"/>
                 </a:solidFill>
                 <a:latin typeface="Arial" pitchFamily="34" charset="0"/>
-                <a:ea typeface="Arial" pitchFamily="34" charset="-122"/>
-                <a:cs typeface="Arial" pitchFamily="34" charset="-120"/>
+                <a:ea typeface="BIZ UDPGothic" pitchFamily="34" charset="-122"/>
+                <a:cs typeface="BIZ UDPGothic" pitchFamily="34" charset="-120"/>
               </a:rPr>
               <a:t>PILLAR 04</a:t>
             </a:r>
@@ -2598,11 +2598,11 @@
             <a:r>
               <a:rPr lang="en-US" sz="2800" b="1" dirty="0">
                 <a:solidFill>
-                  <a:srgbClr val="F5F5F0"/>
-                </a:solidFill>
-                <a:latin typeface="Cambria" pitchFamily="34" charset="0"/>
-                <a:ea typeface="Cambria" pitchFamily="34" charset="-122"/>
-                <a:cs typeface="Cambria" pitchFamily="34" charset="-120"/>
+                  <a:srgbClr val="16181D"/>
+                </a:solidFill>
+                <a:latin typeface="BIZ UDPGothic" pitchFamily="34" charset="0"/>
+                <a:ea typeface="BIZ UDPGothic" pitchFamily="34" charset="-122"/>
+                <a:cs typeface="BIZ UDPGothic" pitchFamily="34" charset="-120"/>
               </a:rPr>
               <a:t>営業費の完全撤廃とインフラ決済への移行</a:t>
             </a:r>
@@ -2625,11 +2625,11 @@
             <a:avLst/>
           </a:prstGeom>
           <a:solidFill>
-            <a:srgbClr val="2E2E2E"/>
+            <a:srgbClr val="DDE0E6"/>
           </a:solidFill>
           <a:ln w="12700">
             <a:solidFill>
-              <a:srgbClr val="2E2E2E"/>
+              <a:srgbClr val="DDE0E6"/>
             </a:solidFill>
             <a:prstDash val="solid"/>
           </a:ln>
@@ -2662,11 +2662,11 @@
             <a:r>
               <a:rPr lang="en-US" sz="1100" dirty="0">
                 <a:solidFill>
-                  <a:srgbClr val="CCCCCC"/>
+                  <a:srgbClr val="2B2F36"/>
                 </a:solidFill>
                 <a:latin typeface="Arial" pitchFamily="34" charset="0"/>
-                <a:ea typeface="Arial" pitchFamily="34" charset="-122"/>
-                <a:cs typeface="Arial" pitchFamily="34" charset="-120"/>
+                <a:ea typeface="BIZ UDPGothic" pitchFamily="34" charset="-122"/>
+                <a:cs typeface="BIZ UDPGothic" pitchFamily="34" charset="-120"/>
               </a:rPr>
               <a:t>「法的義務がある」のに、なぜ500〜600億円かけて督促・訪問・コールセンターを運営するのか。</a:t>
             </a:r>
@@ -2679,11 +2679,11 @@
             <a:r>
               <a:rPr lang="en-US" sz="1100" dirty="0">
                 <a:solidFill>
-                  <a:srgbClr val="CCCCCC"/>
+                  <a:srgbClr val="2B2F36"/>
                 </a:solidFill>
                 <a:latin typeface="Arial" pitchFamily="34" charset="0"/>
-                <a:ea typeface="Arial" pitchFamily="34" charset="-122"/>
-                <a:cs typeface="Arial" pitchFamily="34" charset="-120"/>
+                <a:ea typeface="BIZ UDPGothic" pitchFamily="34" charset="-122"/>
+                <a:cs typeface="BIZ UDPGothic" pitchFamily="34" charset="-120"/>
               </a:rPr>
               <a:t>気象庁・消防庁・国立国会図書館は徴収業務に1円もかけない。NHKだけが例外である理由はない。</a:t>
             </a:r>
@@ -2708,11 +2708,11 @@
             </a:avLst>
           </a:prstGeom>
           <a:solidFill>
-            <a:srgbClr val="1A1A1A"/>
+            <a:srgbClr val="FFFFFF"/>
           </a:solidFill>
           <a:ln w="12700">
             <a:solidFill>
-              <a:srgbClr val="2E2E2E"/>
+              <a:srgbClr val="DDE0E6"/>
             </a:solidFill>
             <a:prstDash val="solid"/>
           </a:ln>
@@ -2742,11 +2742,11 @@
             </a:avLst>
           </a:prstGeom>
           <a:solidFill>
-            <a:srgbClr val="D62828"/>
+            <a:srgbClr val="C8161D"/>
           </a:solidFill>
           <a:ln w="12700">
             <a:solidFill>
-              <a:srgbClr val="D62828"/>
+              <a:srgbClr val="C8161D"/>
             </a:solidFill>
             <a:prstDash val="solid"/>
           </a:ln>
@@ -2779,11 +2779,11 @@
             <a:r>
               <a:rPr lang="en-US" sz="1100" b="1" dirty="0">
                 <a:solidFill>
-                  <a:srgbClr val="F5F5F0"/>
+                  <a:srgbClr val="FFFFFF"/>
                 </a:solidFill>
                 <a:latin typeface="Arial" pitchFamily="34" charset="0"/>
-                <a:ea typeface="Arial" pitchFamily="34" charset="-122"/>
-                <a:cs typeface="Arial" pitchFamily="34" charset="-120"/>
+                <a:ea typeface="BIZ UDPGothic" pitchFamily="34" charset="-122"/>
+                <a:cs typeface="BIZ UDPGothic" pitchFamily="34" charset="-120"/>
               </a:rPr>
               <a:t>Option A</a:t>
             </a:r>
@@ -2818,11 +2818,11 @@
             <a:r>
               <a:rPr lang="en-US" sz="1400" b="1" dirty="0">
                 <a:solidFill>
-                  <a:srgbClr val="F5F5F0"/>
-                </a:solidFill>
-                <a:latin typeface="Cambria" pitchFamily="34" charset="0"/>
-                <a:ea typeface="Cambria" pitchFamily="34" charset="-122"/>
-                <a:cs typeface="Cambria" pitchFamily="34" charset="-120"/>
+                  <a:srgbClr val="16181D"/>
+                </a:solidFill>
+                <a:latin typeface="BIZ UDPGothic" pitchFamily="34" charset="0"/>
+                <a:ea typeface="BIZ UDPGothic" pitchFamily="34" charset="-122"/>
+                <a:cs typeface="BIZ UDPGothic" pitchFamily="34" charset="-120"/>
               </a:rPr>
               <a:t>電気料金への上乗せ</a:t>
             </a:r>
@@ -2857,11 +2857,11 @@
             <a:r>
               <a:rPr lang="en-US" sz="1000" dirty="0">
                 <a:solidFill>
-                  <a:srgbClr val="CCCCCC"/>
+                  <a:srgbClr val="2B2F36"/>
                 </a:solidFill>
                 <a:latin typeface="Arial" pitchFamily="34" charset="0"/>
-                <a:ea typeface="Arial" pitchFamily="34" charset="-122"/>
-                <a:cs typeface="Arial" pitchFamily="34" charset="-120"/>
+                <a:ea typeface="BIZ UDPGothic" pitchFamily="34" charset="-122"/>
+                <a:cs typeface="BIZ UDPGothic" pitchFamily="34" charset="-120"/>
               </a:rPr>
               <a:t>既存インフラ（電力会社の決済システム）を活用。新規システム開発コストを最小化し、月額600円を電気代と同時徴収。</a:t>
             </a:r>
@@ -2886,11 +2886,11 @@
             </a:avLst>
           </a:prstGeom>
           <a:solidFill>
-            <a:srgbClr val="1A1A1A"/>
+            <a:srgbClr val="FFFFFF"/>
           </a:solidFill>
           <a:ln w="12700">
             <a:solidFill>
-              <a:srgbClr val="2E2E2E"/>
+              <a:srgbClr val="DDE0E6"/>
             </a:solidFill>
             <a:prstDash val="solid"/>
           </a:ln>
@@ -2920,11 +2920,11 @@
             </a:avLst>
           </a:prstGeom>
           <a:solidFill>
-            <a:srgbClr val="D62828"/>
+            <a:srgbClr val="C8161D"/>
           </a:solidFill>
           <a:ln w="12700">
             <a:solidFill>
-              <a:srgbClr val="D62828"/>
+              <a:srgbClr val="C8161D"/>
             </a:solidFill>
             <a:prstDash val="solid"/>
           </a:ln>
@@ -2957,11 +2957,11 @@
             <a:r>
               <a:rPr lang="en-US" sz="1100" b="1" dirty="0">
                 <a:solidFill>
-                  <a:srgbClr val="F5F5F0"/>
+                  <a:srgbClr val="FFFFFF"/>
                 </a:solidFill>
                 <a:latin typeface="Arial" pitchFamily="34" charset="0"/>
-                <a:ea typeface="Arial" pitchFamily="34" charset="-122"/>
-                <a:cs typeface="Arial" pitchFamily="34" charset="-120"/>
+                <a:ea typeface="BIZ UDPGothic" pitchFamily="34" charset="-122"/>
+                <a:cs typeface="BIZ UDPGothic" pitchFamily="34" charset="-120"/>
               </a:rPr>
               <a:t>Option B</a:t>
             </a:r>
@@ -2996,11 +2996,11 @@
             <a:r>
               <a:rPr lang="en-US" sz="1400" b="1" dirty="0">
                 <a:solidFill>
-                  <a:srgbClr val="F5F5F0"/>
-                </a:solidFill>
-                <a:latin typeface="Cambria" pitchFamily="34" charset="0"/>
-                <a:ea typeface="Cambria" pitchFamily="34" charset="-122"/>
-                <a:cs typeface="Cambria" pitchFamily="34" charset="-120"/>
+                  <a:srgbClr val="16181D"/>
+                </a:solidFill>
+                <a:latin typeface="BIZ UDPGothic" pitchFamily="34" charset="0"/>
+                <a:ea typeface="BIZ UDPGothic" pitchFamily="34" charset="-122"/>
+                <a:cs typeface="BIZ UDPGothic" pitchFamily="34" charset="-120"/>
               </a:rPr>
               <a:t>マイナンバー紐づけ一元徴収</a:t>
             </a:r>
@@ -3035,11 +3035,11 @@
             <a:r>
               <a:rPr lang="en-US" sz="1000" dirty="0">
                 <a:solidFill>
-                  <a:srgbClr val="CCCCCC"/>
+                  <a:srgbClr val="2B2F36"/>
                 </a:solidFill>
                 <a:latin typeface="Arial" pitchFamily="34" charset="0"/>
-                <a:ea typeface="Arial" pitchFamily="34" charset="-122"/>
-                <a:cs typeface="Arial" pitchFamily="34" charset="-120"/>
+                <a:ea typeface="BIZ UDPGothic" pitchFamily="34" charset="-122"/>
+                <a:cs typeface="BIZ UDPGothic" pitchFamily="34" charset="-120"/>
               </a:rPr>
               <a:t>住民税・社会保険料等との一元徴収へ移行。マイナポータルを通じた自動決済。「デジタル公共アカウント」として世帯単位に統合。</a:t>
             </a:r>
@@ -3074,11 +3074,11 @@
             <a:r>
               <a:rPr lang="en-US" sz="1100" b="1" dirty="0">
                 <a:solidFill>
-                  <a:srgbClr val="D62828"/>
-                </a:solidFill>
-                <a:latin typeface="Cambria" pitchFamily="34" charset="0"/>
-                <a:ea typeface="Cambria" pitchFamily="34" charset="-122"/>
-                <a:cs typeface="Cambria" pitchFamily="34" charset="-120"/>
+                  <a:srgbClr val="C8161D"/>
+                </a:solidFill>
+                <a:latin typeface="BIZ UDPGothic" pitchFamily="34" charset="0"/>
+                <a:ea typeface="BIZ UDPGothic" pitchFamily="34" charset="-122"/>
+                <a:cs typeface="BIZ UDPGothic" pitchFamily="34" charset="-120"/>
               </a:rPr>
               <a:t>いずれの場合も NHK独自の徴収業務はゼロ　　削減効果：約500億円</a:t>
             </a:r>
@@ -3100,7 +3100,7 @@
     <p:bg>
       <p:bgPr>
         <a:solidFill>
-          <a:srgbClr val="0A0A0A"/>
+          <a:srgbClr val="F5F6F8"/>
         </a:solidFill>
       </p:bgPr>
     </p:bg>
@@ -3145,11 +3145,11 @@
             <a:r>
               <a:rPr lang="en-US" sz="900" b="1" spc="400" kern="0" dirty="0">
                 <a:solidFill>
-                  <a:srgbClr val="D62828"/>
+                  <a:srgbClr val="C8161D"/>
                 </a:solidFill>
                 <a:latin typeface="Arial" pitchFamily="34" charset="0"/>
-                <a:ea typeface="Arial" pitchFamily="34" charset="-122"/>
-                <a:cs typeface="Arial" pitchFamily="34" charset="-120"/>
+                <a:ea typeface="BIZ UDPGothic" pitchFamily="34" charset="-122"/>
+                <a:cs typeface="BIZ UDPGothic" pitchFamily="34" charset="-120"/>
               </a:rPr>
               <a:t>PILLAR 04 — DETAIL</a:t>
             </a:r>
@@ -3184,11 +3184,11 @@
             <a:r>
               <a:rPr lang="en-US" sz="2800" b="1" dirty="0">
                 <a:solidFill>
-                  <a:srgbClr val="F5F5F0"/>
-                </a:solidFill>
-                <a:latin typeface="Cambria" pitchFamily="34" charset="0"/>
-                <a:ea typeface="Cambria" pitchFamily="34" charset="-122"/>
-                <a:cs typeface="Cambria" pitchFamily="34" charset="-120"/>
+                  <a:srgbClr val="16181D"/>
+                </a:solidFill>
+                <a:latin typeface="BIZ UDPGothic" pitchFamily="34" charset="0"/>
+                <a:ea typeface="BIZ UDPGothic" pitchFamily="34" charset="-122"/>
+                <a:cs typeface="BIZ UDPGothic" pitchFamily="34" charset="-120"/>
               </a:rPr>
               <a:t>「住居単位」から「世帯アカウント単位」へ</a:t>
             </a:r>
@@ -3211,11 +3211,11 @@
             <a:avLst/>
           </a:prstGeom>
           <a:solidFill>
-            <a:srgbClr val="2E2E2E"/>
+            <a:srgbClr val="DDE0E6"/>
           </a:solidFill>
           <a:ln w="12700">
             <a:solidFill>
-              <a:srgbClr val="2E2E2E"/>
+              <a:srgbClr val="DDE0E6"/>
             </a:solidFill>
             <a:prstDash val="solid"/>
           </a:ln>
@@ -3238,11 +3238,11 @@
             </a:avLst>
           </a:prstGeom>
           <a:solidFill>
-            <a:srgbClr val="1A0808"/>
+            <a:srgbClr val="FCEBEB"/>
           </a:solidFill>
           <a:ln w="12700">
             <a:solidFill>
-              <a:srgbClr val="2E2E2E"/>
+              <a:srgbClr val="DDE0E6"/>
             </a:solidFill>
             <a:prstDash val="solid"/>
           </a:ln>
@@ -3282,11 +3282,11 @@
             <a:r>
               <a:rPr lang="en-US" sz="1500" b="1" dirty="0">
                 <a:solidFill>
-                  <a:srgbClr val="D62828"/>
-                </a:solidFill>
-                <a:latin typeface="Cambria" pitchFamily="34" charset="0"/>
-                <a:ea typeface="Cambria" pitchFamily="34" charset="-122"/>
-                <a:cs typeface="Cambria" pitchFamily="34" charset="-120"/>
+                  <a:srgbClr val="C8161D"/>
+                </a:solidFill>
+                <a:latin typeface="BIZ UDPGothic" pitchFamily="34" charset="0"/>
+                <a:ea typeface="BIZ UDPGothic" pitchFamily="34" charset="-122"/>
+                <a:cs typeface="BIZ UDPGothic" pitchFamily="34" charset="-120"/>
               </a:rPr>
               <a:t>現行の問題</a:t>
             </a:r>
@@ -3325,11 +3325,11 @@
             <a:r>
               <a:rPr lang="en-US" sz="1100" dirty="0">
                 <a:solidFill>
-                  <a:srgbClr val="CCCCCC"/>
+                  <a:srgbClr val="2B2F36"/>
                 </a:solidFill>
                 <a:latin typeface="Arial" pitchFamily="34" charset="0"/>
-                <a:ea typeface="Arial" pitchFamily="34" charset="-122"/>
-                <a:cs typeface="Arial" pitchFamily="34" charset="-120"/>
+                <a:ea typeface="BIZ UDPGothic" pitchFamily="34" charset="-122"/>
+                <a:cs typeface="BIZ UDPGothic" pitchFamily="34" charset="-120"/>
               </a:rPr>
               <a:t>住居ごとに契約＝二重払い</a:t>
             </a:r>
@@ -3346,11 +3346,11 @@
             <a:r>
               <a:rPr lang="en-US" sz="1100" dirty="0">
                 <a:solidFill>
-                  <a:srgbClr val="CCCCCC"/>
+                  <a:srgbClr val="2B2F36"/>
                 </a:solidFill>
                 <a:latin typeface="Arial" pitchFamily="34" charset="0"/>
-                <a:ea typeface="Arial" pitchFamily="34" charset="-122"/>
-                <a:cs typeface="Arial" pitchFamily="34" charset="-120"/>
+                <a:ea typeface="BIZ UDPGothic" pitchFamily="34" charset="-122"/>
+                <a:cs typeface="BIZ UDPGothic" pitchFamily="34" charset="-120"/>
               </a:rPr>
               <a:t>単身赴任で自宅＋赴任先に課金</a:t>
             </a:r>
@@ -3367,11 +3367,11 @@
             <a:r>
               <a:rPr lang="en-US" sz="1100" dirty="0">
                 <a:solidFill>
-                  <a:srgbClr val="CCCCCC"/>
+                  <a:srgbClr val="2B2F36"/>
                 </a:solidFill>
                 <a:latin typeface="Arial" pitchFamily="34" charset="0"/>
-                <a:ea typeface="Arial" pitchFamily="34" charset="-122"/>
-                <a:cs typeface="Arial" pitchFamily="34" charset="-120"/>
+                <a:ea typeface="BIZ UDPGothic" pitchFamily="34" charset="-122"/>
+                <a:cs typeface="BIZ UDPGothic" pitchFamily="34" charset="-120"/>
               </a:rPr>
               <a:t>学生の別居でも別途契約</a:t>
             </a:r>
@@ -3388,11 +3388,11 @@
             <a:r>
               <a:rPr lang="en-US" sz="1100" dirty="0">
                 <a:solidFill>
-                  <a:srgbClr val="CCCCCC"/>
+                  <a:srgbClr val="2B2F36"/>
                 </a:solidFill>
                 <a:latin typeface="Arial" pitchFamily="34" charset="0"/>
-                <a:ea typeface="Arial" pitchFamily="34" charset="-122"/>
-                <a:cs typeface="Arial" pitchFamily="34" charset="-120"/>
+                <a:ea typeface="BIZ UDPGothic" pitchFamily="34" charset="-122"/>
+                <a:cs typeface="BIZ UDPGothic" pitchFamily="34" charset="-120"/>
               </a:rPr>
               <a:t>スマホ・PCは別途扱い</a:t>
             </a:r>
@@ -3417,11 +3417,11 @@
             </a:avLst>
           </a:prstGeom>
           <a:solidFill>
-            <a:srgbClr val="081808"/>
+            <a:srgbClr val="E9EFF8"/>
           </a:solidFill>
           <a:ln w="12700">
             <a:solidFill>
-              <a:srgbClr val="2E2E2E"/>
+              <a:srgbClr val="DDE0E6"/>
             </a:solidFill>
             <a:prstDash val="solid"/>
           </a:ln>
@@ -3461,11 +3461,11 @@
             <a:r>
               <a:rPr lang="en-US" sz="1500" b="1" dirty="0">
                 <a:solidFill>
-                  <a:srgbClr val="4CAF50"/>
-                </a:solidFill>
-                <a:latin typeface="Cambria" pitchFamily="34" charset="0"/>
-                <a:ea typeface="Cambria" pitchFamily="34" charset="-122"/>
-                <a:cs typeface="Cambria" pitchFamily="34" charset="-120"/>
+                  <a:srgbClr val="1D4F91"/>
+                </a:solidFill>
+                <a:latin typeface="BIZ UDPGothic" pitchFamily="34" charset="0"/>
+                <a:ea typeface="BIZ UDPGothic" pitchFamily="34" charset="-122"/>
+                <a:cs typeface="BIZ UDPGothic" pitchFamily="34" charset="-120"/>
               </a:rPr>
               <a:t>改革後</a:t>
             </a:r>
@@ -3504,11 +3504,11 @@
             <a:r>
               <a:rPr lang="en-US" sz="1100" dirty="0">
                 <a:solidFill>
-                  <a:srgbClr val="CCCCCC"/>
+                  <a:srgbClr val="2B2F36"/>
                 </a:solidFill>
                 <a:latin typeface="Arial" pitchFamily="34" charset="0"/>
-                <a:ea typeface="Arial" pitchFamily="34" charset="-122"/>
-                <a:cs typeface="Arial" pitchFamily="34" charset="-120"/>
+                <a:ea typeface="BIZ UDPGothic" pitchFamily="34" charset="-122"/>
+                <a:cs typeface="BIZ UDPGothic" pitchFamily="34" charset="-120"/>
               </a:rPr>
               <a:t>1世帯＝1つのデジタル公共アカウント</a:t>
             </a:r>
@@ -3525,11 +3525,11 @@
             <a:r>
               <a:rPr lang="en-US" sz="1100" dirty="0">
                 <a:solidFill>
-                  <a:srgbClr val="CCCCCC"/>
+                  <a:srgbClr val="2B2F36"/>
                 </a:solidFill>
                 <a:latin typeface="Arial" pitchFamily="34" charset="0"/>
-                <a:ea typeface="Arial" pitchFamily="34" charset="-122"/>
-                <a:cs typeface="Arial" pitchFamily="34" charset="-120"/>
+                <a:ea typeface="BIZ UDPGothic" pitchFamily="34" charset="-122"/>
+                <a:cs typeface="BIZ UDPGothic" pitchFamily="34" charset="-120"/>
               </a:rPr>
               <a:t>単身赴任先でも追加料金なし</a:t>
             </a:r>
@@ -3546,11 +3546,11 @@
             <a:r>
               <a:rPr lang="en-US" sz="1100" dirty="0">
                 <a:solidFill>
-                  <a:srgbClr val="CCCCCC"/>
+                  <a:srgbClr val="2B2F36"/>
                 </a:solidFill>
                 <a:latin typeface="Arial" pitchFamily="34" charset="0"/>
-                <a:ea typeface="Arial" pitchFamily="34" charset="-122"/>
-                <a:cs typeface="Arial" pitchFamily="34" charset="-120"/>
+                <a:ea typeface="BIZ UDPGothic" pitchFamily="34" charset="-122"/>
+                <a:cs typeface="BIZ UDPGothic" pitchFamily="34" charset="-120"/>
               </a:rPr>
               <a:t>家族全員が同一アカウントで利用</a:t>
             </a:r>
@@ -3567,11 +3567,11 @@
             <a:r>
               <a:rPr lang="en-US" sz="1100" dirty="0">
                 <a:solidFill>
-                  <a:srgbClr val="CCCCCC"/>
+                  <a:srgbClr val="2B2F36"/>
                 </a:solidFill>
                 <a:latin typeface="Arial" pitchFamily="34" charset="0"/>
-                <a:ea typeface="Arial" pitchFamily="34" charset="-122"/>
-                <a:cs typeface="Arial" pitchFamily="34" charset="-120"/>
+                <a:ea typeface="BIZ UDPGothic" pitchFamily="34" charset="-122"/>
+                <a:cs typeface="BIZ UDPGothic" pitchFamily="34" charset="-120"/>
               </a:rPr>
               <a:t>スマホ・PCも同一アカウントで視聴可</a:t>
             </a:r>
@@ -3606,11 +3606,11 @@
             <a:r>
               <a:rPr lang="en-US" sz="4000" dirty="0">
                 <a:solidFill>
-                  <a:srgbClr val="D62828"/>
+                  <a:srgbClr val="C8161D"/>
                 </a:solidFill>
                 <a:latin typeface="Arial" pitchFamily="34" charset="0"/>
-                <a:ea typeface="Arial" pitchFamily="34" charset="-122"/>
-                <a:cs typeface="Arial" pitchFamily="34" charset="-120"/>
+                <a:ea typeface="BIZ UDPGothic" pitchFamily="34" charset="-122"/>
+                <a:cs typeface="BIZ UDPGothic" pitchFamily="34" charset="-120"/>
               </a:rPr>
               <a:t>→</a:t>
             </a:r>
@@ -3632,7 +3632,7 @@
     <p:bg>
       <p:bgPr>
         <a:solidFill>
-          <a:srgbClr val="0A0A0A"/>
+          <a:srgbClr val="F5F6F8"/>
         </a:solidFill>
       </p:bgPr>
     </p:bg>
@@ -3677,11 +3677,11 @@
             <a:r>
               <a:rPr lang="en-US" sz="900" b="1" spc="400" kern="0" dirty="0">
                 <a:solidFill>
-                  <a:srgbClr val="D62828"/>
+                  <a:srgbClr val="C8161D"/>
                 </a:solidFill>
                 <a:latin typeface="Arial" pitchFamily="34" charset="0"/>
-                <a:ea typeface="Arial" pitchFamily="34" charset="-122"/>
-                <a:cs typeface="Arial" pitchFamily="34" charset="-120"/>
+                <a:ea typeface="BIZ UDPGothic" pitchFamily="34" charset="-122"/>
+                <a:cs typeface="BIZ UDPGothic" pitchFamily="34" charset="-120"/>
               </a:rPr>
               <a:t>FINANCE</a:t>
             </a:r>
@@ -3716,11 +3716,11 @@
             <a:r>
               <a:rPr lang="en-US" sz="3600" b="1" dirty="0">
                 <a:solidFill>
-                  <a:srgbClr val="F5F5F0"/>
-                </a:solidFill>
-                <a:latin typeface="Cambria" pitchFamily="34" charset="0"/>
-                <a:ea typeface="Cambria" pitchFamily="34" charset="-122"/>
-                <a:cs typeface="Cambria" pitchFamily="34" charset="-120"/>
+                  <a:srgbClr val="16181D"/>
+                </a:solidFill>
+                <a:latin typeface="BIZ UDPGothic" pitchFamily="34" charset="0"/>
+                <a:ea typeface="BIZ UDPGothic" pitchFamily="34" charset="-122"/>
+                <a:cs typeface="BIZ UDPGothic" pitchFamily="34" charset="-120"/>
               </a:rPr>
               <a:t>財政削減効果：▲約2,500億円</a:t>
             </a:r>
@@ -3743,11 +3743,11 @@
             <a:avLst/>
           </a:prstGeom>
           <a:solidFill>
-            <a:srgbClr val="2E2E2E"/>
+            <a:srgbClr val="DDE0E6"/>
           </a:solidFill>
           <a:ln w="12700">
             <a:solidFill>
-              <a:srgbClr val="2E2E2E"/>
+              <a:srgbClr val="DDE0E6"/>
             </a:solidFill>
             <a:prstDash val="solid"/>
           </a:ln>
@@ -3770,11 +3770,11 @@
             </a:avLst>
           </a:prstGeom>
           <a:solidFill>
-            <a:srgbClr val="1A1A1A"/>
+            <a:srgbClr val="FFFFFF"/>
           </a:solidFill>
           <a:ln w="12700">
             <a:solidFill>
-              <a:srgbClr val="2E2E2E"/>
+              <a:srgbClr val="DDE0E6"/>
             </a:solidFill>
             <a:prstDash val="solid"/>
           </a:ln>
@@ -3814,11 +3814,11 @@
             <a:r>
               <a:rPr lang="en-US" sz="1300" b="1" dirty="0">
                 <a:solidFill>
-                  <a:srgbClr val="F5F5F0"/>
-                </a:solidFill>
-                <a:latin typeface="Cambria" pitchFamily="34" charset="0"/>
-                <a:ea typeface="Cambria" pitchFamily="34" charset="-122"/>
-                <a:cs typeface="Cambria" pitchFamily="34" charset="-120"/>
+                  <a:srgbClr val="16181D"/>
+                </a:solidFill>
+                <a:latin typeface="BIZ UDPGothic" pitchFamily="34" charset="0"/>
+                <a:ea typeface="BIZ UDPGothic" pitchFamily="34" charset="-122"/>
+                <a:cs typeface="BIZ UDPGothic" pitchFamily="34" charset="-120"/>
               </a:rPr>
               <a:t>営業・徴収費の完全廃止</a:t>
             </a:r>
@@ -3853,11 +3853,11 @@
             <a:r>
               <a:rPr lang="en-US" sz="1400" b="1" dirty="0">
                 <a:solidFill>
-                  <a:srgbClr val="D62828"/>
-                </a:solidFill>
-                <a:latin typeface="Cambria" pitchFamily="34" charset="0"/>
-                <a:ea typeface="Cambria" pitchFamily="34" charset="-122"/>
-                <a:cs typeface="Cambria" pitchFamily="34" charset="-120"/>
+                  <a:srgbClr val="C8161D"/>
+                </a:solidFill>
+                <a:latin typeface="BIZ UDPGothic" pitchFamily="34" charset="0"/>
+                <a:ea typeface="BIZ UDPGothic" pitchFamily="34" charset="-122"/>
+                <a:cs typeface="BIZ UDPGothic" pitchFamily="34" charset="-120"/>
               </a:rPr>
               <a:t>▲500億円</a:t>
             </a:r>
@@ -3892,11 +3892,11 @@
             <a:r>
               <a:rPr lang="en-US" sz="900" dirty="0">
                 <a:solidFill>
-                  <a:srgbClr val="888888"/>
+                  <a:srgbClr val="626875"/>
                 </a:solidFill>
                 <a:latin typeface="Arial" pitchFamily="34" charset="0"/>
-                <a:ea typeface="Arial" pitchFamily="34" charset="-122"/>
-                <a:cs typeface="Arial" pitchFamily="34" charset="-120"/>
+                <a:ea typeface="BIZ UDPGothic" pitchFamily="34" charset="-122"/>
+                <a:cs typeface="BIZ UDPGothic" pitchFamily="34" charset="-120"/>
               </a:rPr>
               <a:t>NHK独自の徴収業務を電気料金等に統合</a:t>
             </a:r>
@@ -3921,11 +3921,11 @@
             </a:avLst>
           </a:prstGeom>
           <a:solidFill>
-            <a:srgbClr val="1A1A1A"/>
+            <a:srgbClr val="FFFFFF"/>
           </a:solidFill>
           <a:ln w="12700">
             <a:solidFill>
-              <a:srgbClr val="2E2E2E"/>
+              <a:srgbClr val="DDE0E6"/>
             </a:solidFill>
             <a:prstDash val="solid"/>
           </a:ln>
@@ -3965,11 +3965,11 @@
             <a:r>
               <a:rPr lang="en-US" sz="1300" b="1" dirty="0">
                 <a:solidFill>
-                  <a:srgbClr val="F5F5F0"/>
-                </a:solidFill>
-                <a:latin typeface="Cambria" pitchFamily="34" charset="0"/>
-                <a:ea typeface="Cambria" pitchFamily="34" charset="-122"/>
-                <a:cs typeface="Cambria" pitchFamily="34" charset="-120"/>
+                  <a:srgbClr val="16181D"/>
+                </a:solidFill>
+                <a:latin typeface="BIZ UDPGothic" pitchFamily="34" charset="0"/>
+                <a:ea typeface="BIZ UDPGothic" pitchFamily="34" charset="-122"/>
+                <a:cs typeface="BIZ UDPGothic" pitchFamily="34" charset="-120"/>
               </a:rPr>
               <a:t>人件費の業界中央値連動</a:t>
             </a:r>
@@ -4004,11 +4004,11 @@
             <a:r>
               <a:rPr lang="en-US" sz="1400" b="1" dirty="0">
                 <a:solidFill>
-                  <a:srgbClr val="D62828"/>
-                </a:solidFill>
-                <a:latin typeface="Cambria" pitchFamily="34" charset="0"/>
-                <a:ea typeface="Cambria" pitchFamily="34" charset="-122"/>
-                <a:cs typeface="Cambria" pitchFamily="34" charset="-120"/>
+                  <a:srgbClr val="C8161D"/>
+                </a:solidFill>
+                <a:latin typeface="BIZ UDPGothic" pitchFamily="34" charset="0"/>
+                <a:ea typeface="BIZ UDPGothic" pitchFamily="34" charset="-122"/>
+                <a:cs typeface="BIZ UDPGothic" pitchFamily="34" charset="-120"/>
               </a:rPr>
               <a:t>▲450億円</a:t>
             </a:r>
@@ -4043,11 +4043,11 @@
             <a:r>
               <a:rPr lang="en-US" sz="900" dirty="0">
                 <a:solidFill>
-                  <a:srgbClr val="888888"/>
+                  <a:srgbClr val="626875"/>
                 </a:solidFill>
                 <a:latin typeface="Arial" pitchFamily="34" charset="0"/>
-                <a:ea typeface="Arial" pitchFamily="34" charset="-122"/>
-                <a:cs typeface="Arial" pitchFamily="34" charset="-120"/>
+                <a:ea typeface="BIZ UDPGothic" pitchFamily="34" charset="-122"/>
+                <a:cs typeface="BIZ UDPGothic" pitchFamily="34" charset="-120"/>
               </a:rPr>
               <a:t>平均1,100万円→700〜750万円（放送法義務化）</a:t>
             </a:r>
@@ -4072,11 +4072,11 @@
             </a:avLst>
           </a:prstGeom>
           <a:solidFill>
-            <a:srgbClr val="1A1A1A"/>
+            <a:srgbClr val="FFFFFF"/>
           </a:solidFill>
           <a:ln w="12700">
             <a:solidFill>
-              <a:srgbClr val="2E2E2E"/>
+              <a:srgbClr val="DDE0E6"/>
             </a:solidFill>
             <a:prstDash val="solid"/>
           </a:ln>
@@ -4116,11 +4116,11 @@
             <a:r>
               <a:rPr lang="en-US" sz="1300" b="1" dirty="0">
                 <a:solidFill>
-                  <a:srgbClr val="F5F5F0"/>
-                </a:solidFill>
-                <a:latin typeface="Cambria" pitchFamily="34" charset="0"/>
-                <a:ea typeface="Cambria" pitchFamily="34" charset="-122"/>
-                <a:cs typeface="Cambria" pitchFamily="34" charset="-120"/>
+                  <a:srgbClr val="16181D"/>
+                </a:solidFill>
+                <a:latin typeface="BIZ UDPGothic" pitchFamily="34" charset="0"/>
+                <a:ea typeface="BIZ UDPGothic" pitchFamily="34" charset="-122"/>
+                <a:cs typeface="BIZ UDPGothic" pitchFamily="34" charset="-120"/>
               </a:rPr>
               <a:t>番組制作費の公共特化</a:t>
             </a:r>
@@ -4155,11 +4155,11 @@
             <a:r>
               <a:rPr lang="en-US" sz="1400" b="1" dirty="0">
                 <a:solidFill>
-                  <a:srgbClr val="D62828"/>
-                </a:solidFill>
-                <a:latin typeface="Cambria" pitchFamily="34" charset="0"/>
-                <a:ea typeface="Cambria" pitchFamily="34" charset="-122"/>
-                <a:cs typeface="Cambria" pitchFamily="34" charset="-120"/>
+                  <a:srgbClr val="C8161D"/>
+                </a:solidFill>
+                <a:latin typeface="BIZ UDPGothic" pitchFamily="34" charset="0"/>
+                <a:ea typeface="BIZ UDPGothic" pitchFamily="34" charset="-122"/>
+                <a:cs typeface="BIZ UDPGothic" pitchFamily="34" charset="-120"/>
               </a:rPr>
               <a:t>▲1,300億円</a:t>
             </a:r>
@@ -4194,11 +4194,11 @@
             <a:r>
               <a:rPr lang="en-US" sz="900" dirty="0">
                 <a:solidFill>
-                  <a:srgbClr val="888888"/>
+                  <a:srgbClr val="626875"/>
                 </a:solidFill>
                 <a:latin typeface="Arial" pitchFamily="34" charset="0"/>
-                <a:ea typeface="Arial" pitchFamily="34" charset="-122"/>
-                <a:cs typeface="Arial" pitchFamily="34" charset="-120"/>
+                <a:ea typeface="BIZ UDPGothic" pitchFamily="34" charset="-122"/>
+                <a:cs typeface="BIZ UDPGothic" pitchFamily="34" charset="-120"/>
               </a:rPr>
               <a:t>エンタメ・スポーツを分社化または民間移管</a:t>
             </a:r>
@@ -4223,11 +4223,11 @@
             </a:avLst>
           </a:prstGeom>
           <a:solidFill>
-            <a:srgbClr val="1A1A1A"/>
+            <a:srgbClr val="FFFFFF"/>
           </a:solidFill>
           <a:ln w="12700">
             <a:solidFill>
-              <a:srgbClr val="2E2E2E"/>
+              <a:srgbClr val="DDE0E6"/>
             </a:solidFill>
             <a:prstDash val="solid"/>
           </a:ln>
@@ -4267,11 +4267,11 @@
             <a:r>
               <a:rPr lang="en-US" sz="1300" b="1" dirty="0">
                 <a:solidFill>
-                  <a:srgbClr val="F5F5F0"/>
-                </a:solidFill>
-                <a:latin typeface="Cambria" pitchFamily="34" charset="0"/>
-                <a:ea typeface="Cambria" pitchFamily="34" charset="-122"/>
-                <a:cs typeface="Cambria" pitchFamily="34" charset="-120"/>
+                  <a:srgbClr val="16181D"/>
+                </a:solidFill>
+                <a:latin typeface="BIZ UDPGothic" pitchFamily="34" charset="0"/>
+                <a:ea typeface="BIZ UDPGothic" pitchFamily="34" charset="-122"/>
+                <a:cs typeface="BIZ UDPGothic" pitchFamily="34" charset="-120"/>
               </a:rPr>
               <a:t>技研の大学移管</a:t>
             </a:r>
@@ -4306,11 +4306,11 @@
             <a:r>
               <a:rPr lang="en-US" sz="1400" b="1" dirty="0">
                 <a:solidFill>
-                  <a:srgbClr val="D62828"/>
-                </a:solidFill>
-                <a:latin typeface="Cambria" pitchFamily="34" charset="0"/>
-                <a:ea typeface="Cambria" pitchFamily="34" charset="-122"/>
-                <a:cs typeface="Cambria" pitchFamily="34" charset="-120"/>
+                  <a:srgbClr val="C8161D"/>
+                </a:solidFill>
+                <a:latin typeface="BIZ UDPGothic" pitchFamily="34" charset="0"/>
+                <a:ea typeface="BIZ UDPGothic" pitchFamily="34" charset="-122"/>
+                <a:cs typeface="BIZ UDPGothic" pitchFamily="34" charset="-120"/>
               </a:rPr>
               <a:t>▲250億円</a:t>
             </a:r>
@@ -4345,11 +4345,11 @@
             <a:r>
               <a:rPr lang="en-US" sz="900" dirty="0">
                 <a:solidFill>
-                  <a:srgbClr val="888888"/>
+                  <a:srgbClr val="626875"/>
                 </a:solidFill>
                 <a:latin typeface="Arial" pitchFamily="34" charset="0"/>
-                <a:ea typeface="Arial" pitchFamily="34" charset="-122"/>
-                <a:cs typeface="Arial" pitchFamily="34" charset="-120"/>
+                <a:ea typeface="BIZ UDPGothic" pitchFamily="34" charset="-122"/>
+                <a:cs typeface="BIZ UDPGothic" pitchFamily="34" charset="-120"/>
               </a:rPr>
               <a:t>受信料からの支出をゼロに（国費に付け替え）</a:t>
             </a:r>
@@ -4374,11 +4374,11 @@
             </a:avLst>
           </a:prstGeom>
           <a:solidFill>
-            <a:srgbClr val="D62828"/>
+            <a:srgbClr val="C8161D"/>
           </a:solidFill>
           <a:ln w="12700">
             <a:solidFill>
-              <a:srgbClr val="D62828"/>
+              <a:srgbClr val="C8161D"/>
             </a:solidFill>
             <a:prstDash val="solid"/>
           </a:ln>
@@ -4411,11 +4411,11 @@
             <a:r>
               <a:rPr lang="en-US" sz="1300" b="1" dirty="0">
                 <a:solidFill>
-                  <a:srgbClr val="F5F5F0"/>
-                </a:solidFill>
-                <a:latin typeface="Cambria" pitchFamily="34" charset="0"/>
-                <a:ea typeface="Cambria" pitchFamily="34" charset="-122"/>
-                <a:cs typeface="Cambria" pitchFamily="34" charset="-120"/>
+                  <a:srgbClr val="FFFFFF"/>
+                </a:solidFill>
+                <a:latin typeface="BIZ UDPGothic" pitchFamily="34" charset="0"/>
+                <a:ea typeface="BIZ UDPGothic" pitchFamily="34" charset="-122"/>
+                <a:cs typeface="BIZ UDPGothic" pitchFamily="34" charset="-120"/>
               </a:rPr>
               <a:t>削減総額　▲約2,500億円　（受信料収入5,900億円の約42%をカット）</a:t>
             </a:r>
@@ -4437,7 +4437,7 @@
     <p:bg>
       <p:bgPr>
         <a:solidFill>
-          <a:srgbClr val="0A0A0A"/>
+          <a:srgbClr val="F5F6F8"/>
         </a:solidFill>
       </p:bgPr>
     </p:bg>
@@ -4482,11 +4482,11 @@
             <a:r>
               <a:rPr lang="en-US" sz="900" b="1" spc="400" kern="0" dirty="0">
                 <a:solidFill>
-                  <a:srgbClr val="D62828"/>
+                  <a:srgbClr val="C8161D"/>
                 </a:solidFill>
                 <a:latin typeface="Arial" pitchFamily="34" charset="0"/>
-                <a:ea typeface="Arial" pitchFamily="34" charset="-122"/>
-                <a:cs typeface="Arial" pitchFamily="34" charset="-120"/>
+                <a:ea typeface="BIZ UDPGothic" pitchFamily="34" charset="-122"/>
+                <a:cs typeface="BIZ UDPGothic" pitchFamily="34" charset="-120"/>
               </a:rPr>
               <a:t>NEW PRICING</a:t>
             </a:r>
@@ -4521,11 +4521,11 @@
             <a:r>
               <a:rPr lang="en-US" sz="3600" b="1" dirty="0">
                 <a:solidFill>
-                  <a:srgbClr val="F5F5F0"/>
-                </a:solidFill>
-                <a:latin typeface="Cambria" pitchFamily="34" charset="0"/>
-                <a:ea typeface="Cambria" pitchFamily="34" charset="-122"/>
-                <a:cs typeface="Cambria" pitchFamily="34" charset="-120"/>
+                  <a:srgbClr val="16181D"/>
+                </a:solidFill>
+                <a:latin typeface="BIZ UDPGothic" pitchFamily="34" charset="0"/>
+                <a:ea typeface="BIZ UDPGothic" pitchFamily="34" charset="-122"/>
+                <a:cs typeface="BIZ UDPGothic" pitchFamily="34" charset="-120"/>
               </a:rPr>
               <a:t>受信料シミュレーション</a:t>
             </a:r>
@@ -4548,11 +4548,11 @@
             <a:avLst/>
           </a:prstGeom>
           <a:solidFill>
-            <a:srgbClr val="2E2E2E"/>
+            <a:srgbClr val="DDE0E6"/>
           </a:solidFill>
           <a:ln w="12700">
             <a:solidFill>
-              <a:srgbClr val="2E2E2E"/>
+              <a:srgbClr val="DDE0E6"/>
             </a:solidFill>
             <a:prstDash val="solid"/>
           </a:ln>
@@ -4575,11 +4575,11 @@
             </a:avLst>
           </a:prstGeom>
           <a:solidFill>
-            <a:srgbClr val="1A1A1A"/>
+            <a:srgbClr val="FFFFFF"/>
           </a:solidFill>
           <a:ln w="12700">
             <a:solidFill>
-              <a:srgbClr val="2E2E2E"/>
+              <a:srgbClr val="DDE0E6"/>
             </a:solidFill>
             <a:prstDash val="solid"/>
           </a:ln>
@@ -4619,11 +4619,11 @@
             <a:r>
               <a:rPr lang="en-US" sz="1400" b="1" dirty="0">
                 <a:solidFill>
-                  <a:srgbClr val="F5F5F0"/>
-                </a:solidFill>
-                <a:latin typeface="Cambria" pitchFamily="34" charset="0"/>
-                <a:ea typeface="Cambria" pitchFamily="34" charset="-122"/>
-                <a:cs typeface="Cambria" pitchFamily="34" charset="-120"/>
+                  <a:srgbClr val="16181D"/>
+                </a:solidFill>
+                <a:latin typeface="BIZ UDPGothic" pitchFamily="34" charset="0"/>
+                <a:ea typeface="BIZ UDPGothic" pitchFamily="34" charset="-122"/>
+                <a:cs typeface="BIZ UDPGothic" pitchFamily="34" charset="-120"/>
               </a:rPr>
               <a:t>5,900億円（現行収入）　−　2,500億円（削減）　＝　3,400億円（必要維持費）</a:t>
             </a:r>
@@ -4648,11 +4648,11 @@
             </a:avLst>
           </a:prstGeom>
           <a:solidFill>
-            <a:srgbClr val="1A0808"/>
+            <a:srgbClr val="FCEBEB"/>
           </a:solidFill>
           <a:ln w="12700">
             <a:solidFill>
-              <a:srgbClr val="2E2E2E"/>
+              <a:srgbClr val="DDE0E6"/>
             </a:solidFill>
             <a:prstDash val="solid"/>
           </a:ln>
@@ -4692,11 +4692,11 @@
             <a:r>
               <a:rPr lang="en-US" sz="1600" b="1" dirty="0">
                 <a:solidFill>
-                  <a:srgbClr val="D62828"/>
-                </a:solidFill>
-                <a:latin typeface="Cambria" pitchFamily="34" charset="0"/>
-                <a:ea typeface="Cambria" pitchFamily="34" charset="-122"/>
-                <a:cs typeface="Cambria" pitchFamily="34" charset="-120"/>
+                  <a:srgbClr val="C8161D"/>
+                </a:solidFill>
+                <a:latin typeface="BIZ UDPGothic" pitchFamily="34" charset="0"/>
+                <a:ea typeface="BIZ UDPGothic" pitchFamily="34" charset="-122"/>
+                <a:cs typeface="BIZ UDPGothic" pitchFamily="34" charset="-120"/>
               </a:rPr>
               <a:t>現行</a:t>
             </a:r>
@@ -4735,11 +4735,11 @@
             <a:r>
               <a:rPr lang="en-US" sz="1100" dirty="0">
                 <a:solidFill>
-                  <a:srgbClr val="CCCCCC"/>
+                  <a:srgbClr val="2B2F36"/>
                 </a:solidFill>
                 <a:latin typeface="Arial" pitchFamily="34" charset="0"/>
-                <a:ea typeface="Arial" pitchFamily="34" charset="-122"/>
-                <a:cs typeface="Arial" pitchFamily="34" charset="-120"/>
+                <a:ea typeface="BIZ UDPGothic" pitchFamily="34" charset="-122"/>
+                <a:cs typeface="BIZ UDPGothic" pitchFamily="34" charset="-120"/>
               </a:rPr>
               <a:t>地上契約：月額 1,225円</a:t>
             </a:r>
@@ -4756,11 +4756,11 @@
             <a:r>
               <a:rPr lang="en-US" sz="1100" dirty="0">
                 <a:solidFill>
-                  <a:srgbClr val="CCCCCC"/>
+                  <a:srgbClr val="2B2F36"/>
                 </a:solidFill>
                 <a:latin typeface="Arial" pitchFamily="34" charset="0"/>
-                <a:ea typeface="Arial" pitchFamily="34" charset="-122"/>
-                <a:cs typeface="Arial" pitchFamily="34" charset="-120"/>
+                <a:ea typeface="BIZ UDPGothic" pitchFamily="34" charset="-122"/>
+                <a:cs typeface="BIZ UDPGothic" pitchFamily="34" charset="-120"/>
               </a:rPr>
               <a:t>衛星BS契約：月額 2,034円</a:t>
             </a:r>
@@ -4777,11 +4777,11 @@
             <a:r>
               <a:rPr lang="en-US" sz="1100" dirty="0">
                 <a:solidFill>
-                  <a:srgbClr val="CCCCCC"/>
+                  <a:srgbClr val="2B2F36"/>
                 </a:solidFill>
                 <a:latin typeface="Arial" pitchFamily="34" charset="0"/>
-                <a:ea typeface="Arial" pitchFamily="34" charset="-122"/>
-                <a:cs typeface="Arial" pitchFamily="34" charset="-120"/>
+                <a:ea typeface="BIZ UDPGothic" pitchFamily="34" charset="-122"/>
+                <a:cs typeface="BIZ UDPGothic" pitchFamily="34" charset="-120"/>
               </a:rPr>
               <a:t>年額：14,700〜24,408円</a:t>
             </a:r>
@@ -4798,11 +4798,11 @@
             <a:r>
               <a:rPr lang="en-US" sz="1100" dirty="0">
                 <a:solidFill>
-                  <a:srgbClr val="CCCCCC"/>
+                  <a:srgbClr val="2B2F36"/>
                 </a:solidFill>
                 <a:latin typeface="Arial" pitchFamily="34" charset="0"/>
-                <a:ea typeface="Arial" pitchFamily="34" charset="-122"/>
-                <a:cs typeface="Arial" pitchFamily="34" charset="-120"/>
+                <a:ea typeface="BIZ UDPGothic" pitchFamily="34" charset="-122"/>
+                <a:cs typeface="BIZ UDPGothic" pitchFamily="34" charset="-120"/>
               </a:rPr>
               <a:t>単位：住居ごと</a:t>
             </a:r>
@@ -4827,11 +4827,11 @@
             </a:avLst>
           </a:prstGeom>
           <a:solidFill>
-            <a:srgbClr val="081808"/>
+            <a:srgbClr val="E9EFF8"/>
           </a:solidFill>
           <a:ln w="12700">
             <a:solidFill>
-              <a:srgbClr val="2E2E2E"/>
+              <a:srgbClr val="DDE0E6"/>
             </a:solidFill>
             <a:prstDash val="solid"/>
           </a:ln>
@@ -4871,11 +4871,11 @@
             <a:r>
               <a:rPr lang="en-US" sz="1600" b="1" dirty="0">
                 <a:solidFill>
-                  <a:srgbClr val="4CAF50"/>
-                </a:solidFill>
-                <a:latin typeface="Cambria" pitchFamily="34" charset="0"/>
-                <a:ea typeface="Cambria" pitchFamily="34" charset="-122"/>
-                <a:cs typeface="Cambria" pitchFamily="34" charset="-120"/>
+                  <a:srgbClr val="1D4F91"/>
+                </a:solidFill>
+                <a:latin typeface="BIZ UDPGothic" pitchFamily="34" charset="0"/>
+                <a:ea typeface="BIZ UDPGothic" pitchFamily="34" charset="-122"/>
+                <a:cs typeface="BIZ UDPGothic" pitchFamily="34" charset="-120"/>
               </a:rPr>
               <a:t>改革後</a:t>
             </a:r>
@@ -4914,11 +4914,11 @@
             <a:r>
               <a:rPr lang="en-US" sz="1100" dirty="0">
                 <a:solidFill>
-                  <a:srgbClr val="CCCCCC"/>
+                  <a:srgbClr val="2B2F36"/>
                 </a:solidFill>
                 <a:latin typeface="Arial" pitchFamily="34" charset="0"/>
-                <a:ea typeface="Arial" pitchFamily="34" charset="-122"/>
-                <a:cs typeface="Arial" pitchFamily="34" charset="-120"/>
+                <a:ea typeface="BIZ UDPGothic" pitchFamily="34" charset="-122"/>
+                <a:cs typeface="BIZ UDPGothic" pitchFamily="34" charset="-120"/>
               </a:rPr>
               <a:t>一律ワンプラン：月額 600円</a:t>
             </a:r>
@@ -4935,11 +4935,11 @@
             <a:r>
               <a:rPr lang="en-US" sz="1100" dirty="0">
                 <a:solidFill>
-                  <a:srgbClr val="CCCCCC"/>
+                  <a:srgbClr val="2B2F36"/>
                 </a:solidFill>
                 <a:latin typeface="Arial" pitchFamily="34" charset="0"/>
-                <a:ea typeface="Arial" pitchFamily="34" charset="-122"/>
-                <a:cs typeface="Arial" pitchFamily="34" charset="-120"/>
+                <a:ea typeface="BIZ UDPGothic" pitchFamily="34" charset="-122"/>
+                <a:cs typeface="BIZ UDPGothic" pitchFamily="34" charset="-120"/>
               </a:rPr>
               <a:t>BS区分：廃止・統合</a:t>
             </a:r>
@@ -4956,11 +4956,11 @@
             <a:r>
               <a:rPr lang="en-US" sz="1100" dirty="0">
                 <a:solidFill>
-                  <a:srgbClr val="CCCCCC"/>
+                  <a:srgbClr val="2B2F36"/>
                 </a:solidFill>
                 <a:latin typeface="Arial" pitchFamily="34" charset="0"/>
-                <a:ea typeface="Arial" pitchFamily="34" charset="-122"/>
-                <a:cs typeface="Arial" pitchFamily="34" charset="-120"/>
+                <a:ea typeface="BIZ UDPGothic" pitchFamily="34" charset="-122"/>
+                <a:cs typeface="BIZ UDPGothic" pitchFamily="34" charset="-120"/>
               </a:rPr>
               <a:t>年額：7,200円</a:t>
             </a:r>
@@ -4977,11 +4977,11 @@
             <a:r>
               <a:rPr lang="en-US" sz="1100" dirty="0">
                 <a:solidFill>
-                  <a:srgbClr val="CCCCCC"/>
+                  <a:srgbClr val="2B2F36"/>
                 </a:solidFill>
                 <a:latin typeface="Arial" pitchFamily="34" charset="0"/>
-                <a:ea typeface="Arial" pitchFamily="34" charset="-122"/>
-                <a:cs typeface="Arial" pitchFamily="34" charset="-120"/>
+                <a:ea typeface="BIZ UDPGothic" pitchFamily="34" charset="-122"/>
+                <a:cs typeface="BIZ UDPGothic" pitchFamily="34" charset="-120"/>
               </a:rPr>
               <a:t>単位：世帯アカウント</a:t>
             </a:r>
@@ -5016,11 +5016,11 @@
             <a:r>
               <a:rPr lang="en-US" sz="4000" dirty="0">
                 <a:solidFill>
-                  <a:srgbClr val="D62828"/>
+                  <a:srgbClr val="C8161D"/>
                 </a:solidFill>
                 <a:latin typeface="Arial" pitchFamily="34" charset="0"/>
-                <a:ea typeface="Arial" pitchFamily="34" charset="-122"/>
-                <a:cs typeface="Arial" pitchFamily="34" charset="-120"/>
+                <a:ea typeface="BIZ UDPGothic" pitchFamily="34" charset="-122"/>
+                <a:cs typeface="BIZ UDPGothic" pitchFamily="34" charset="-120"/>
               </a:rPr>
               <a:t>→</a:t>
             </a:r>
@@ -5045,11 +5045,11 @@
             </a:avLst>
           </a:prstGeom>
           <a:solidFill>
-            <a:srgbClr val="2E2E2E"/>
+            <a:srgbClr val="DDE0E6"/>
           </a:solidFill>
           <a:ln w="12700">
             <a:solidFill>
-              <a:srgbClr val="2E2E2E"/>
+              <a:srgbClr val="DDE0E6"/>
             </a:solidFill>
             <a:prstDash val="solid"/>
           </a:ln>
@@ -5082,11 +5082,11 @@
             <a:r>
               <a:rPr lang="en-US" sz="1100" b="1" dirty="0">
                 <a:solidFill>
-                  <a:srgbClr val="F5F5F0"/>
-                </a:solidFill>
-                <a:latin typeface="Cambria" pitchFamily="34" charset="0"/>
-                <a:ea typeface="Cambria" pitchFamily="34" charset="-122"/>
-                <a:cs typeface="Cambria" pitchFamily="34" charset="-120"/>
+                  <a:srgbClr val="16181D"/>
+                </a:solidFill>
+                <a:latin typeface="BIZ UDPGothic" pitchFamily="34" charset="0"/>
+                <a:ea typeface="BIZ UDPGothic" pitchFamily="34" charset="-122"/>
+                <a:cs typeface="BIZ UDPGothic" pitchFamily="34" charset="-120"/>
               </a:rPr>
               <a:t>現行の約3分の1　月額600円（ワンコイン＋税）　世帯アカウント単位での完全統合</a:t>
             </a:r>
@@ -5108,7 +5108,7 @@
     <p:bg>
       <p:bgPr>
         <a:solidFill>
-          <a:srgbClr val="0A0A0A"/>
+          <a:srgbClr val="F5F6F8"/>
         </a:solidFill>
       </p:bgPr>
     </p:bg>
@@ -5153,11 +5153,11 @@
             <a:r>
               <a:rPr lang="en-US" sz="900" b="1" spc="400" kern="0" dirty="0">
                 <a:solidFill>
-                  <a:srgbClr val="D62828"/>
+                  <a:srgbClr val="C8161D"/>
                 </a:solidFill>
                 <a:latin typeface="Arial" pitchFamily="34" charset="0"/>
-                <a:ea typeface="Arial" pitchFamily="34" charset="-122"/>
-                <a:cs typeface="Arial" pitchFamily="34" charset="-120"/>
+                <a:ea typeface="BIZ UDPGothic" pitchFamily="34" charset="-122"/>
+                <a:cs typeface="BIZ UDPGothic" pitchFamily="34" charset="-120"/>
               </a:rPr>
               <a:t>KEY QUESTION</a:t>
             </a:r>
@@ -5192,11 +5192,11 @@
             <a:r>
               <a:rPr lang="en-US" sz="3600" b="1" dirty="0">
                 <a:solidFill>
-                  <a:srgbClr val="F5F5F0"/>
-                </a:solidFill>
-                <a:latin typeface="Cambria" pitchFamily="34" charset="0"/>
-                <a:ea typeface="Cambria" pitchFamily="34" charset="-122"/>
-                <a:cs typeface="Cambria" pitchFamily="34" charset="-120"/>
+                  <a:srgbClr val="16181D"/>
+                </a:solidFill>
+                <a:latin typeface="BIZ UDPGothic" pitchFamily="34" charset="0"/>
+                <a:ea typeface="BIZ UDPGothic" pitchFamily="34" charset="-122"/>
+                <a:cs typeface="BIZ UDPGothic" pitchFamily="34" charset="-120"/>
               </a:rPr>
               <a:t>「国費化」はなぜ今まで阻まれてきたか</a:t>
             </a:r>
@@ -5219,11 +5219,11 @@
             <a:avLst/>
           </a:prstGeom>
           <a:solidFill>
-            <a:srgbClr val="2E2E2E"/>
+            <a:srgbClr val="DDE0E6"/>
           </a:solidFill>
           <a:ln w="12700">
             <a:solidFill>
-              <a:srgbClr val="2E2E2E"/>
+              <a:srgbClr val="DDE0E6"/>
             </a:solidFill>
             <a:prstDash val="solid"/>
           </a:ln>
@@ -5246,11 +5246,11 @@
             </a:avLst>
           </a:prstGeom>
           <a:solidFill>
-            <a:srgbClr val="1A1A1A"/>
+            <a:srgbClr val="FFFFFF"/>
           </a:solidFill>
           <a:ln w="12700">
             <a:solidFill>
-              <a:srgbClr val="2E2E2E"/>
+              <a:srgbClr val="DDE0E6"/>
             </a:solidFill>
             <a:prstDash val="solid"/>
           </a:ln>
@@ -5271,11 +5271,11 @@
             <a:avLst/>
           </a:prstGeom>
           <a:solidFill>
-            <a:srgbClr val="D62828"/>
+            <a:srgbClr val="C8161D"/>
           </a:solidFill>
           <a:ln w="12700">
             <a:solidFill>
-              <a:srgbClr val="D62828"/>
+              <a:srgbClr val="C8161D"/>
             </a:solidFill>
             <a:prstDash val="solid"/>
           </a:ln>
@@ -5308,11 +5308,11 @@
             <a:r>
               <a:rPr lang="en-US" sz="2000" b="1" dirty="0">
                 <a:solidFill>
-                  <a:srgbClr val="F5F5F0"/>
-                </a:solidFill>
-                <a:latin typeface="Cambria" pitchFamily="34" charset="0"/>
-                <a:ea typeface="Cambria" pitchFamily="34" charset="-122"/>
-                <a:cs typeface="Cambria" pitchFamily="34" charset="-120"/>
+                  <a:srgbClr val="16181D"/>
+                </a:solidFill>
+                <a:latin typeface="BIZ UDPGothic" pitchFamily="34" charset="0"/>
+                <a:ea typeface="BIZ UDPGothic" pitchFamily="34" charset="-122"/>
+                <a:cs typeface="BIZ UDPGothic" pitchFamily="34" charset="-120"/>
               </a:rPr>
               <a:t>「時の政権が予算を握ることで、</a:t>
             </a:r>
@@ -5325,11 +5325,11 @@
             <a:r>
               <a:rPr lang="en-US" sz="2000" b="1" dirty="0">
                 <a:solidFill>
-                  <a:srgbClr val="F5F5F0"/>
-                </a:solidFill>
-                <a:latin typeface="Cambria" pitchFamily="34" charset="0"/>
-                <a:ea typeface="Cambria" pitchFamily="34" charset="-122"/>
-                <a:cs typeface="Cambria" pitchFamily="34" charset="-120"/>
+                  <a:srgbClr val="16181D"/>
+                </a:solidFill>
+                <a:latin typeface="BIZ UDPGothic" pitchFamily="34" charset="0"/>
+                <a:ea typeface="BIZ UDPGothic" pitchFamily="34" charset="-122"/>
+                <a:cs typeface="BIZ UDPGothic" pitchFamily="34" charset="-120"/>
               </a:rPr>
               <a:t>報道の独立性が損なわれる」</a:t>
             </a:r>
@@ -5364,11 +5364,11 @@
             <a:r>
               <a:rPr lang="en-US" sz="1100" dirty="0">
                 <a:solidFill>
-                  <a:srgbClr val="CCCCCC"/>
+                  <a:srgbClr val="2B2F36"/>
                 </a:solidFill>
                 <a:latin typeface="Arial" pitchFamily="34" charset="0"/>
-                <a:ea typeface="Arial" pitchFamily="34" charset="-122"/>
-                <a:cs typeface="Arial" pitchFamily="34" charset="-120"/>
+                <a:ea typeface="BIZ UDPGothic" pitchFamily="34" charset="-122"/>
+                <a:cs typeface="BIZ UDPGothic" pitchFamily="34" charset="-120"/>
               </a:rPr>
               <a:t>この懸念は正当である。国営放送化は、報道の自由の観点から絶対に避けなければならない。</a:t>
             </a:r>
@@ -5403,11 +5403,11 @@
             <a:r>
               <a:rPr lang="en-US" sz="1600" b="1" dirty="0">
                 <a:solidFill>
-                  <a:srgbClr val="D62828"/>
-                </a:solidFill>
-                <a:latin typeface="Cambria" pitchFamily="34" charset="0"/>
-                <a:ea typeface="Cambria" pitchFamily="34" charset="-122"/>
-                <a:cs typeface="Cambria" pitchFamily="34" charset="-120"/>
+                  <a:srgbClr val="C8161D"/>
+                </a:solidFill>
+                <a:latin typeface="BIZ UDPGothic" pitchFamily="34" charset="0"/>
+                <a:ea typeface="BIZ UDPGothic" pitchFamily="34" charset="-122"/>
+                <a:cs typeface="BIZ UDPGothic" pitchFamily="34" charset="-120"/>
               </a:rPr>
               <a:t>では、なぜ「今なら可能」なのか。</a:t>
             </a:r>
@@ -5442,11 +5442,11 @@
             <a:r>
               <a:rPr lang="en-US" sz="1600" b="1" dirty="0">
                 <a:solidFill>
-                  <a:srgbClr val="F5F5F0"/>
-                </a:solidFill>
-                <a:latin typeface="Cambria" pitchFamily="34" charset="0"/>
-                <a:ea typeface="Cambria" pitchFamily="34" charset="-122"/>
-                <a:cs typeface="Cambria" pitchFamily="34" charset="-120"/>
+                  <a:srgbClr val="16181D"/>
+                </a:solidFill>
+                <a:latin typeface="BIZ UDPGothic" pitchFamily="34" charset="0"/>
+                <a:ea typeface="BIZ UDPGothic" pitchFamily="34" charset="-122"/>
+                <a:cs typeface="BIZ UDPGothic" pitchFamily="34" charset="-120"/>
               </a:rPr>
               <a:t>答えは「スリム化の順序」にある。</a:t>
             </a:r>
@@ -5468,7 +5468,7 @@
     <p:bg>
       <p:bgPr>
         <a:solidFill>
-          <a:srgbClr val="0A0A0A"/>
+          <a:srgbClr val="F5F6F8"/>
         </a:solidFill>
       </p:bgPr>
     </p:bg>
@@ -5513,11 +5513,11 @@
             <a:r>
               <a:rPr lang="en-US" sz="900" b="1" spc="400" kern="0" dirty="0">
                 <a:solidFill>
-                  <a:srgbClr val="D62828"/>
+                  <a:srgbClr val="C8161D"/>
                 </a:solidFill>
                 <a:latin typeface="Arial" pitchFamily="34" charset="0"/>
-                <a:ea typeface="Arial" pitchFamily="34" charset="-122"/>
-                <a:cs typeface="Arial" pitchFamily="34" charset="-120"/>
+                <a:ea typeface="BIZ UDPGothic" pitchFamily="34" charset="-122"/>
+                <a:cs typeface="BIZ UDPGothic" pitchFamily="34" charset="-120"/>
               </a:rPr>
               <a:t>KEY LOGIC</a:t>
             </a:r>
@@ -5552,11 +5552,11 @@
             <a:r>
               <a:rPr lang="en-US" sz="2800" b="1" dirty="0">
                 <a:solidFill>
-                  <a:srgbClr val="F5F5F0"/>
-                </a:solidFill>
-                <a:latin typeface="Cambria" pitchFamily="34" charset="0"/>
-                <a:ea typeface="Cambria" pitchFamily="34" charset="-122"/>
-                <a:cs typeface="Cambria" pitchFamily="34" charset="-120"/>
+                  <a:srgbClr val="16181D"/>
+                </a:solidFill>
+                <a:latin typeface="BIZ UDPGothic" pitchFamily="34" charset="0"/>
+                <a:ea typeface="BIZ UDPGothic" pitchFamily="34" charset="-122"/>
+                <a:cs typeface="BIZ UDPGothic" pitchFamily="34" charset="-120"/>
               </a:rPr>
               <a:t>スリム化して初めて、国費化の大義名分が立つ</a:t>
             </a:r>
@@ -5579,11 +5579,11 @@
             <a:avLst/>
           </a:prstGeom>
           <a:solidFill>
-            <a:srgbClr val="2E2E2E"/>
+            <a:srgbClr val="DDE0E6"/>
           </a:solidFill>
           <a:ln w="12700">
             <a:solidFill>
-              <a:srgbClr val="2E2E2E"/>
+              <a:srgbClr val="DDE0E6"/>
             </a:solidFill>
             <a:prstDash val="solid"/>
           </a:ln>
@@ -5606,11 +5606,11 @@
             </a:avLst>
           </a:prstGeom>
           <a:solidFill>
-            <a:srgbClr val="1A0808"/>
+            <a:srgbClr val="FCEBEB"/>
           </a:solidFill>
           <a:ln w="12700">
             <a:solidFill>
-              <a:srgbClr val="2E2E2E"/>
+              <a:srgbClr val="DDE0E6"/>
             </a:solidFill>
             <a:prstDash val="solid"/>
           </a:ln>
@@ -5650,11 +5650,11 @@
             <a:r>
               <a:rPr lang="en-US" sz="1400" b="1" dirty="0">
                 <a:solidFill>
-                  <a:srgbClr val="D62828"/>
-                </a:solidFill>
-                <a:latin typeface="Cambria" pitchFamily="34" charset="0"/>
-                <a:ea typeface="Cambria" pitchFamily="34" charset="-122"/>
-                <a:cs typeface="Cambria" pitchFamily="34" charset="-120"/>
+                  <a:srgbClr val="C8161D"/>
+                </a:solidFill>
+                <a:latin typeface="BIZ UDPGothic" pitchFamily="34" charset="0"/>
+                <a:ea typeface="BIZ UDPGothic" pitchFamily="34" charset="-122"/>
+                <a:cs typeface="BIZ UDPGothic" pitchFamily="34" charset="-120"/>
               </a:rPr>
               <a:t>現在のNHK</a:t>
             </a:r>
@@ -5677,11 +5677,11 @@
             <a:avLst/>
           </a:prstGeom>
           <a:solidFill>
-            <a:srgbClr val="2E2E2E"/>
+            <a:srgbClr val="DDE0E6"/>
           </a:solidFill>
           <a:ln w="12700">
             <a:solidFill>
-              <a:srgbClr val="2E2E2E"/>
+              <a:srgbClr val="DDE0E6"/>
             </a:solidFill>
             <a:prstDash val="solid"/>
           </a:ln>
@@ -5714,11 +5714,11 @@
             <a:r>
               <a:rPr lang="en-US" sz="1000" dirty="0">
                 <a:solidFill>
-                  <a:srgbClr val="CCCCCC"/>
+                  <a:srgbClr val="2B2F36"/>
                 </a:solidFill>
                 <a:latin typeface="Arial" pitchFamily="34" charset="0"/>
-                <a:ea typeface="Arial" pitchFamily="34" charset="-122"/>
-                <a:cs typeface="Arial" pitchFamily="34" charset="-120"/>
+                <a:ea typeface="BIZ UDPGothic" pitchFamily="34" charset="-122"/>
+                <a:cs typeface="BIZ UDPGothic" pitchFamily="34" charset="-120"/>
               </a:rPr>
               <a:t>エンタメ・スポーツ・研究・商業サービスを</a:t>
             </a:r>
@@ -5731,11 +5731,11 @@
             <a:r>
               <a:rPr lang="en-US" sz="1000" dirty="0">
                 <a:solidFill>
-                  <a:srgbClr val="CCCCCC"/>
+                  <a:srgbClr val="2B2F36"/>
                 </a:solidFill>
                 <a:latin typeface="Arial" pitchFamily="34" charset="0"/>
-                <a:ea typeface="Arial" pitchFamily="34" charset="-122"/>
-                <a:cs typeface="Arial" pitchFamily="34" charset="-120"/>
+                <a:ea typeface="BIZ UDPGothic" pitchFamily="34" charset="-122"/>
+                <a:cs typeface="BIZ UDPGothic" pitchFamily="34" charset="-120"/>
               </a:rPr>
               <a:t>抱えた「巨大メディア企業」</a:t>
             </a:r>
@@ -5770,11 +5770,11 @@
             <a:r>
               <a:rPr lang="en-US" sz="2400" dirty="0">
                 <a:solidFill>
-                  <a:srgbClr val="D62828"/>
+                  <a:srgbClr val="C8161D"/>
                 </a:solidFill>
                 <a:latin typeface="Arial" pitchFamily="34" charset="0"/>
-                <a:ea typeface="Arial" pitchFamily="34" charset="-122"/>
-                <a:cs typeface="Arial" pitchFamily="34" charset="-120"/>
+                <a:ea typeface="BIZ UDPGothic" pitchFamily="34" charset="-122"/>
+                <a:cs typeface="BIZ UDPGothic" pitchFamily="34" charset="-120"/>
               </a:rPr>
               <a:t>→</a:t>
             </a:r>
@@ -5799,11 +5799,11 @@
             </a:avLst>
           </a:prstGeom>
           <a:solidFill>
-            <a:srgbClr val="081808"/>
+            <a:srgbClr val="E9EFF8"/>
           </a:solidFill>
           <a:ln w="12700">
             <a:solidFill>
-              <a:srgbClr val="2E2E2E"/>
+              <a:srgbClr val="DDE0E6"/>
             </a:solidFill>
             <a:prstDash val="solid"/>
           </a:ln>
@@ -5843,11 +5843,11 @@
             <a:r>
               <a:rPr lang="en-US" sz="1400" b="1" dirty="0">
                 <a:solidFill>
-                  <a:srgbClr val="4CAF50"/>
-                </a:solidFill>
-                <a:latin typeface="Cambria" pitchFamily="34" charset="0"/>
-                <a:ea typeface="Cambria" pitchFamily="34" charset="-122"/>
-                <a:cs typeface="Cambria" pitchFamily="34" charset="-120"/>
+                  <a:srgbClr val="1D4F91"/>
+                </a:solidFill>
+                <a:latin typeface="BIZ UDPGothic" pitchFamily="34" charset="0"/>
+                <a:ea typeface="BIZ UDPGothic" pitchFamily="34" charset="-122"/>
+                <a:cs typeface="BIZ UDPGothic" pitchFamily="34" charset="-120"/>
               </a:rPr>
               <a:t>提言006後のNHK</a:t>
             </a:r>
@@ -5870,11 +5870,11 @@
             <a:avLst/>
           </a:prstGeom>
           <a:solidFill>
-            <a:srgbClr val="2E2E2E"/>
+            <a:srgbClr val="DDE0E6"/>
           </a:solidFill>
           <a:ln w="12700">
             <a:solidFill>
-              <a:srgbClr val="2E2E2E"/>
+              <a:srgbClr val="DDE0E6"/>
             </a:solidFill>
             <a:prstDash val="solid"/>
           </a:ln>
@@ -5907,11 +5907,11 @@
             <a:r>
               <a:rPr lang="en-US" sz="1000" dirty="0">
                 <a:solidFill>
-                  <a:srgbClr val="CCCCCC"/>
+                  <a:srgbClr val="2B2F36"/>
                 </a:solidFill>
                 <a:latin typeface="Arial" pitchFamily="34" charset="0"/>
-                <a:ea typeface="Arial" pitchFamily="34" charset="-122"/>
-                <a:cs typeface="Arial" pitchFamily="34" charset="-120"/>
+                <a:ea typeface="BIZ UDPGothic" pitchFamily="34" charset="-122"/>
+                <a:cs typeface="BIZ UDPGothic" pitchFamily="34" charset="-120"/>
               </a:rPr>
               <a:t>ニュース・災害・教育に特化した</a:t>
             </a:r>
@@ -5924,11 +5924,11 @@
             <a:r>
               <a:rPr lang="en-US" sz="1000" dirty="0">
                 <a:solidFill>
-                  <a:srgbClr val="CCCCCC"/>
+                  <a:srgbClr val="2B2F36"/>
                 </a:solidFill>
                 <a:latin typeface="Arial" pitchFamily="34" charset="0"/>
-                <a:ea typeface="Arial" pitchFamily="34" charset="-122"/>
-                <a:cs typeface="Arial" pitchFamily="34" charset="-120"/>
+                <a:ea typeface="BIZ UDPGothic" pitchFamily="34" charset="-122"/>
+                <a:cs typeface="BIZ UDPGothic" pitchFamily="34" charset="-120"/>
               </a:rPr>
               <a:t>純粋な「報道インフラ」</a:t>
             </a:r>
@@ -5963,11 +5963,11 @@
             <a:r>
               <a:rPr lang="en-US" sz="2400" dirty="0">
                 <a:solidFill>
-                  <a:srgbClr val="D62828"/>
+                  <a:srgbClr val="C8161D"/>
                 </a:solidFill>
                 <a:latin typeface="Arial" pitchFamily="34" charset="0"/>
-                <a:ea typeface="Arial" pitchFamily="34" charset="-122"/>
-                <a:cs typeface="Arial" pitchFamily="34" charset="-120"/>
+                <a:ea typeface="BIZ UDPGothic" pitchFamily="34" charset="-122"/>
+                <a:cs typeface="BIZ UDPGothic" pitchFamily="34" charset="-120"/>
               </a:rPr>
               <a:t>→</a:t>
             </a:r>
@@ -5992,11 +5992,11 @@
             </a:avLst>
           </a:prstGeom>
           <a:solidFill>
-            <a:srgbClr val="08101A"/>
+            <a:srgbClr val="E9EFF8"/>
           </a:solidFill>
           <a:ln w="12700">
             <a:solidFill>
-              <a:srgbClr val="2E2E2E"/>
+              <a:srgbClr val="DDE0E6"/>
             </a:solidFill>
             <a:prstDash val="solid"/>
           </a:ln>
@@ -6036,11 +6036,11 @@
             <a:r>
               <a:rPr lang="en-US" sz="1400" b="1" dirty="0">
                 <a:solidFill>
-                  <a:srgbClr val="4090D0"/>
-                </a:solidFill>
-                <a:latin typeface="Cambria" pitchFamily="34" charset="0"/>
-                <a:ea typeface="Cambria" pitchFamily="34" charset="-122"/>
-                <a:cs typeface="Cambria" pitchFamily="34" charset="-120"/>
+                  <a:srgbClr val="1D4F91"/>
+                </a:solidFill>
+                <a:latin typeface="BIZ UDPGothic" pitchFamily="34" charset="0"/>
+                <a:ea typeface="BIZ UDPGothic" pitchFamily="34" charset="-122"/>
+                <a:cs typeface="BIZ UDPGothic" pitchFamily="34" charset="-120"/>
               </a:rPr>
               <a:t>気象庁・消防庁と</a:t>
             </a:r>
@@ -6053,11 +6053,11 @@
             <a:r>
               <a:rPr lang="en-US" sz="1400" b="1" dirty="0">
                 <a:solidFill>
-                  <a:srgbClr val="4090D0"/>
-                </a:solidFill>
-                <a:latin typeface="Cambria" pitchFamily="34" charset="0"/>
-                <a:ea typeface="Cambria" pitchFamily="34" charset="-122"/>
-                <a:cs typeface="Cambria" pitchFamily="34" charset="-120"/>
+                  <a:srgbClr val="1D4F91"/>
+                </a:solidFill>
+                <a:latin typeface="BIZ UDPGothic" pitchFamily="34" charset="0"/>
+                <a:ea typeface="BIZ UDPGothic" pitchFamily="34" charset="-122"/>
+                <a:cs typeface="BIZ UDPGothic" pitchFamily="34" charset="-120"/>
               </a:rPr>
               <a:t>同じカテゴリ</a:t>
             </a:r>
@@ -6080,11 +6080,11 @@
             <a:avLst/>
           </a:prstGeom>
           <a:solidFill>
-            <a:srgbClr val="2E2E2E"/>
+            <a:srgbClr val="DDE0E6"/>
           </a:solidFill>
           <a:ln w="12700">
             <a:solidFill>
-              <a:srgbClr val="2E2E2E"/>
+              <a:srgbClr val="DDE0E6"/>
             </a:solidFill>
             <a:prstDash val="solid"/>
           </a:ln>
@@ -6117,11 +6117,11 @@
             <a:r>
               <a:rPr lang="en-US" sz="1000" dirty="0">
                 <a:solidFill>
-                  <a:srgbClr val="CCCCCC"/>
+                  <a:srgbClr val="2B2F36"/>
                 </a:solidFill>
                 <a:latin typeface="Arial" pitchFamily="34" charset="0"/>
-                <a:ea typeface="Arial" pitchFamily="34" charset="-122"/>
-                <a:cs typeface="Arial" pitchFamily="34" charset="-120"/>
+                <a:ea typeface="BIZ UDPGothic" pitchFamily="34" charset="-122"/>
+                <a:cs typeface="BIZ UDPGothic" pitchFamily="34" charset="-120"/>
               </a:rPr>
               <a:t>インフラ維持費は国費で。</a:t>
             </a:r>
@@ -6134,11 +6134,11 @@
             <a:r>
               <a:rPr lang="en-US" sz="1000" dirty="0">
                 <a:solidFill>
-                  <a:srgbClr val="CCCCCC"/>
+                  <a:srgbClr val="2B2F36"/>
                 </a:solidFill>
                 <a:latin typeface="Arial" pitchFamily="34" charset="0"/>
-                <a:ea typeface="Arial" pitchFamily="34" charset="-122"/>
-                <a:cs typeface="Arial" pitchFamily="34" charset="-120"/>
+                <a:ea typeface="BIZ UDPGothic" pitchFamily="34" charset="-122"/>
+                <a:cs typeface="BIZ UDPGothic" pitchFamily="34" charset="-120"/>
               </a:rPr>
               <a:t>編集権の独立は放送法で明文化。</a:t>
             </a:r>
@@ -6163,11 +6163,11 @@
             </a:avLst>
           </a:prstGeom>
           <a:solidFill>
-            <a:srgbClr val="1A1A1A"/>
+            <a:srgbClr val="FFFFFF"/>
           </a:solidFill>
           <a:ln w="12700">
             <a:solidFill>
-              <a:srgbClr val="2E2E2E"/>
+              <a:srgbClr val="DDE0E6"/>
             </a:solidFill>
             <a:prstDash val="solid"/>
           </a:ln>
@@ -6207,11 +6207,11 @@
             <a:r>
               <a:rPr lang="en-US" sz="1000" dirty="0">
                 <a:solidFill>
-                  <a:srgbClr val="CCCCCC"/>
+                  <a:srgbClr val="2B2F36"/>
                 </a:solidFill>
                 <a:latin typeface="Arial" pitchFamily="34" charset="0"/>
-                <a:ea typeface="Arial" pitchFamily="34" charset="-122"/>
-                <a:cs typeface="Arial" pitchFamily="34" charset="-120"/>
+                <a:ea typeface="BIZ UDPGothic" pitchFamily="34" charset="-122"/>
+                <a:cs typeface="BIZ UDPGothic" pitchFamily="34" charset="-120"/>
               </a:rPr>
               <a:t>本提言が求めるのは「NHKを政府の広報機関にせよ」ではない。「報道インフラの維持費を、受信料という非効率な私的徴収から、税という効率的な公的調達へ移行せよ」である。</a:t>
             </a:r>
@@ -6233,7 +6233,7 @@
     <p:bg>
       <p:bgPr>
         <a:solidFill>
-          <a:srgbClr val="0A0A0A"/>
+          <a:srgbClr val="F5F6F8"/>
         </a:solidFill>
       </p:bgPr>
     </p:bg>
@@ -6278,11 +6278,11 @@
             <a:r>
               <a:rPr lang="en-US" sz="900" b="1" spc="400" kern="0" dirty="0">
                 <a:solidFill>
-                  <a:srgbClr val="D62828"/>
+                  <a:srgbClr val="C8161D"/>
                 </a:solidFill>
                 <a:latin typeface="Arial" pitchFamily="34" charset="0"/>
-                <a:ea typeface="Arial" pitchFamily="34" charset="-122"/>
-                <a:cs typeface="Arial" pitchFamily="34" charset="-120"/>
+                <a:ea typeface="BIZ UDPGothic" pitchFamily="34" charset="-122"/>
+                <a:cs typeface="BIZ UDPGothic" pitchFamily="34" charset="-120"/>
               </a:rPr>
               <a:t>REMAINING ISSUES</a:t>
             </a:r>
@@ -6317,11 +6317,11 @@
             <a:r>
               <a:rPr lang="en-US" sz="3600" b="1" dirty="0">
                 <a:solidFill>
-                  <a:srgbClr val="F5F5F0"/>
-                </a:solidFill>
-                <a:latin typeface="Cambria" pitchFamily="34" charset="0"/>
-                <a:ea typeface="Cambria" pitchFamily="34" charset="-122"/>
-                <a:cs typeface="Cambria" pitchFamily="34" charset="-120"/>
+                  <a:srgbClr val="16181D"/>
+                </a:solidFill>
+                <a:latin typeface="BIZ UDPGothic" pitchFamily="34" charset="0"/>
+                <a:ea typeface="BIZ UDPGothic" pitchFamily="34" charset="-122"/>
+                <a:cs typeface="BIZ UDPGothic" pitchFamily="34" charset="-120"/>
               </a:rPr>
               <a:t>前提条件・今後の検討課題</a:t>
             </a:r>
@@ -6344,11 +6344,11 @@
             <a:avLst/>
           </a:prstGeom>
           <a:solidFill>
-            <a:srgbClr val="2E2E2E"/>
+            <a:srgbClr val="DDE0E6"/>
           </a:solidFill>
           <a:ln w="12700">
             <a:solidFill>
-              <a:srgbClr val="2E2E2E"/>
+              <a:srgbClr val="DDE0E6"/>
             </a:solidFill>
             <a:prstDash val="solid"/>
           </a:ln>
@@ -6371,11 +6371,11 @@
             </a:avLst>
           </a:prstGeom>
           <a:solidFill>
-            <a:srgbClr val="1A1A1A"/>
+            <a:srgbClr val="FFFFFF"/>
           </a:solidFill>
           <a:ln w="12700">
             <a:solidFill>
-              <a:srgbClr val="2E2E2E"/>
+              <a:srgbClr val="DDE0E6"/>
             </a:solidFill>
             <a:prstDash val="solid"/>
           </a:ln>
@@ -6415,11 +6415,11 @@
             <a:r>
               <a:rPr lang="en-US" sz="1000" dirty="0">
                 <a:solidFill>
-                  <a:srgbClr val="CCCCCC"/>
+                  <a:srgbClr val="2B2F36"/>
                 </a:solidFill>
                 <a:latin typeface="Arial" pitchFamily="34" charset="0"/>
-                <a:ea typeface="Arial" pitchFamily="34" charset="-122"/>
-                <a:cs typeface="Arial" pitchFamily="34" charset="-120"/>
+                <a:ea typeface="BIZ UDPGothic" pitchFamily="34" charset="-122"/>
+                <a:cs typeface="BIZ UDPGothic" pitchFamily="34" charset="-120"/>
               </a:rPr>
               <a:t>分社化された「エンタメNHK」の株式・資産の帰属と処分方法</a:t>
             </a:r>
@@ -6444,11 +6444,11 @@
             </a:avLst>
           </a:prstGeom>
           <a:solidFill>
-            <a:srgbClr val="1A1A1A"/>
+            <a:srgbClr val="FFFFFF"/>
           </a:solidFill>
           <a:ln w="12700">
             <a:solidFill>
-              <a:srgbClr val="2E2E2E"/>
+              <a:srgbClr val="DDE0E6"/>
             </a:solidFill>
             <a:prstDash val="solid"/>
           </a:ln>
@@ -6488,11 +6488,11 @@
             <a:r>
               <a:rPr lang="en-US" sz="1000" dirty="0">
                 <a:solidFill>
-                  <a:srgbClr val="CCCCCC"/>
+                  <a:srgbClr val="2B2F36"/>
                 </a:solidFill>
                 <a:latin typeface="Arial" pitchFamily="34" charset="0"/>
-                <a:ea typeface="Arial" pitchFamily="34" charset="-122"/>
-                <a:cs typeface="Arial" pitchFamily="34" charset="-120"/>
+                <a:ea typeface="BIZ UDPGothic" pitchFamily="34" charset="-122"/>
+                <a:cs typeface="BIZ UDPGothic" pitchFamily="34" charset="-120"/>
               </a:rPr>
               <a:t>技研の人材・知的財産（特許等）の大学移管における法的整理</a:t>
             </a:r>
@@ -6517,11 +6517,11 @@
             </a:avLst>
           </a:prstGeom>
           <a:solidFill>
-            <a:srgbClr val="1A1A1A"/>
+            <a:srgbClr val="FFFFFF"/>
           </a:solidFill>
           <a:ln w="12700">
             <a:solidFill>
-              <a:srgbClr val="2E2E2E"/>
+              <a:srgbClr val="DDE0E6"/>
             </a:solidFill>
             <a:prstDash val="solid"/>
           </a:ln>
@@ -6561,11 +6561,11 @@
             <a:r>
               <a:rPr lang="en-US" sz="1000" dirty="0">
                 <a:solidFill>
-                  <a:srgbClr val="CCCCCC"/>
+                  <a:srgbClr val="2B2F36"/>
                 </a:solidFill>
                 <a:latin typeface="Arial" pitchFamily="34" charset="0"/>
-                <a:ea typeface="Arial" pitchFamily="34" charset="-122"/>
-                <a:cs typeface="Arial" pitchFamily="34" charset="-120"/>
+                <a:ea typeface="BIZ UDPGothic" pitchFamily="34" charset="-122"/>
+                <a:cs typeface="BIZ UDPGothic" pitchFamily="34" charset="-120"/>
               </a:rPr>
               <a:t>電気料金上乗せ vs マイナンバー一元徴収の選択における公平性の検証</a:t>
             </a:r>
@@ -6590,11 +6590,11 @@
             </a:avLst>
           </a:prstGeom>
           <a:solidFill>
-            <a:srgbClr val="1A1A1A"/>
+            <a:srgbClr val="FFFFFF"/>
           </a:solidFill>
           <a:ln w="12700">
             <a:solidFill>
-              <a:srgbClr val="2E2E2E"/>
+              <a:srgbClr val="DDE0E6"/>
             </a:solidFill>
             <a:prstDash val="solid"/>
           </a:ln>
@@ -6634,11 +6634,11 @@
             <a:r>
               <a:rPr lang="en-US" sz="1000" dirty="0">
                 <a:solidFill>
-                  <a:srgbClr val="CCCCCC"/>
+                  <a:srgbClr val="2B2F36"/>
                 </a:solidFill>
                 <a:latin typeface="Arial" pitchFamily="34" charset="0"/>
-                <a:ea typeface="Arial" pitchFamily="34" charset="-122"/>
-                <a:cs typeface="Arial" pitchFamily="34" charset="-120"/>
+                <a:ea typeface="BIZ UDPGothic" pitchFamily="34" charset="-122"/>
+                <a:cs typeface="BIZ UDPGothic" pitchFamily="34" charset="-120"/>
               </a:rPr>
               <a:t>「デジタル公共アカウント」の設計・セキュリティ・運用主体</a:t>
             </a:r>
@@ -6663,11 +6663,11 @@
             </a:avLst>
           </a:prstGeom>
           <a:solidFill>
-            <a:srgbClr val="1A1A1A"/>
+            <a:srgbClr val="FFFFFF"/>
           </a:solidFill>
           <a:ln w="12700">
             <a:solidFill>
-              <a:srgbClr val="2E2E2E"/>
+              <a:srgbClr val="DDE0E6"/>
             </a:solidFill>
             <a:prstDash val="solid"/>
           </a:ln>
@@ -6707,11 +6707,11 @@
             <a:r>
               <a:rPr lang="en-US" sz="1000" dirty="0">
                 <a:solidFill>
-                  <a:srgbClr val="CCCCCC"/>
+                  <a:srgbClr val="2B2F36"/>
                 </a:solidFill>
                 <a:latin typeface="Arial" pitchFamily="34" charset="0"/>
-                <a:ea typeface="Arial" pitchFamily="34" charset="-122"/>
-                <a:cs typeface="Arial" pitchFamily="34" charset="-120"/>
+                <a:ea typeface="BIZ UDPGothic" pitchFamily="34" charset="-122"/>
+                <a:cs typeface="BIZ UDPGothic" pitchFamily="34" charset="-120"/>
               </a:rPr>
               <a:t>受信料廃止後の放送法改正における「編集権の独立」の明文化</a:t>
             </a:r>
@@ -6736,11 +6736,11 @@
             </a:avLst>
           </a:prstGeom>
           <a:solidFill>
-            <a:srgbClr val="1A1A1A"/>
+            <a:srgbClr val="FFFFFF"/>
           </a:solidFill>
           <a:ln w="12700">
             <a:solidFill>
-              <a:srgbClr val="2E2E2E"/>
+              <a:srgbClr val="DDE0E6"/>
             </a:solidFill>
             <a:prstDash val="solid"/>
           </a:ln>
@@ -6780,11 +6780,11 @@
             <a:r>
               <a:rPr lang="en-US" sz="1000" dirty="0">
                 <a:solidFill>
-                  <a:srgbClr val="CCCCCC"/>
+                  <a:srgbClr val="2B2F36"/>
                 </a:solidFill>
                 <a:latin typeface="Arial" pitchFamily="34" charset="0"/>
-                <a:ea typeface="Arial" pitchFamily="34" charset="-122"/>
-                <a:cs typeface="Arial" pitchFamily="34" charset="-120"/>
+                <a:ea typeface="BIZ UDPGothic" pitchFamily="34" charset="-122"/>
+                <a:cs typeface="BIZ UDPGothic" pitchFamily="34" charset="-120"/>
               </a:rPr>
               <a:t>BS廃止統合に伴う衛星帯域の利用・返還ルール</a:t>
             </a:r>
@@ -6809,11 +6809,11 @@
             </a:avLst>
           </a:prstGeom>
           <a:solidFill>
-            <a:srgbClr val="1A1A1A"/>
+            <a:srgbClr val="FFFFFF"/>
           </a:solidFill>
           <a:ln w="12700">
             <a:solidFill>
-              <a:srgbClr val="2E2E2E"/>
+              <a:srgbClr val="DDE0E6"/>
             </a:solidFill>
             <a:prstDash val="solid"/>
           </a:ln>
@@ -6853,11 +6853,11 @@
             <a:r>
               <a:rPr lang="en-US" sz="1100" dirty="0">
                 <a:solidFill>
-                  <a:srgbClr val="CCCCCC"/>
+                  <a:srgbClr val="2B2F36"/>
                 </a:solidFill>
                 <a:latin typeface="Arial" pitchFamily="34" charset="0"/>
-                <a:ea typeface="Arial" pitchFamily="34" charset="-122"/>
-                <a:cs typeface="Arial" pitchFamily="34" charset="-120"/>
+                <a:ea typeface="BIZ UDPGothic" pitchFamily="34" charset="-122"/>
+                <a:cs typeface="BIZ UDPGothic" pitchFamily="34" charset="-120"/>
               </a:rPr>
               <a:t>移行期間（既存職員・契約・番組の段階的整理）の設計</a:t>
             </a:r>
@@ -6879,7 +6879,7 @@
     <p:bg>
       <p:bgPr>
         <a:solidFill>
-          <a:srgbClr val="0A0A0A"/>
+          <a:srgbClr val="F5F6F8"/>
         </a:solidFill>
       </p:bgPr>
     </p:bg>
@@ -6912,11 +6912,11 @@
             <a:avLst/>
           </a:prstGeom>
           <a:solidFill>
-            <a:srgbClr val="D62828"/>
+            <a:srgbClr val="C8161D"/>
           </a:solidFill>
           <a:ln w="12700">
             <a:solidFill>
-              <a:srgbClr val="D62828"/>
+              <a:srgbClr val="C8161D"/>
             </a:solidFill>
             <a:prstDash val="solid"/>
           </a:ln>
@@ -6949,11 +6949,11 @@
             <a:r>
               <a:rPr lang="en-US" sz="1000" b="1" spc="300" kern="0" dirty="0">
                 <a:solidFill>
-                  <a:srgbClr val="D62828"/>
+                  <a:srgbClr val="C8161D"/>
                 </a:solidFill>
                 <a:latin typeface="Arial" pitchFamily="34" charset="0"/>
-                <a:ea typeface="Arial" pitchFamily="34" charset="-122"/>
-                <a:cs typeface="Arial" pitchFamily="34" charset="-120"/>
+                <a:ea typeface="BIZ UDPGothic" pitchFamily="34" charset="-122"/>
+                <a:cs typeface="BIZ UDPGothic" pitchFamily="34" charset="-120"/>
               </a:rPr>
               <a:t>REBOOT JAPAN ── 提言006　まとめ</a:t>
             </a:r>
@@ -6988,11 +6988,11 @@
             <a:r>
               <a:rPr lang="en-US" sz="3400" b="1" dirty="0">
                 <a:solidFill>
-                  <a:srgbClr val="F5F5F0"/>
-                </a:solidFill>
-                <a:latin typeface="Cambria" pitchFamily="34" charset="0"/>
-                <a:ea typeface="Cambria" pitchFamily="34" charset="-122"/>
-                <a:cs typeface="Cambria" pitchFamily="34" charset="-120"/>
+                  <a:srgbClr val="16181D"/>
+                </a:solidFill>
+                <a:latin typeface="BIZ UDPGothic" pitchFamily="34" charset="0"/>
+                <a:ea typeface="BIZ UDPGothic" pitchFamily="34" charset="-122"/>
+                <a:cs typeface="BIZ UDPGothic" pitchFamily="34" charset="-120"/>
               </a:rPr>
               <a:t>月額600円。</a:t>
             </a:r>
@@ -7005,11 +7005,11 @@
             <a:r>
               <a:rPr lang="en-US" sz="3400" b="1" dirty="0">
                 <a:solidFill>
-                  <a:srgbClr val="F5F5F0"/>
-                </a:solidFill>
-                <a:latin typeface="Cambria" pitchFamily="34" charset="0"/>
-                <a:ea typeface="Cambria" pitchFamily="34" charset="-122"/>
-                <a:cs typeface="Cambria" pitchFamily="34" charset="-120"/>
+                  <a:srgbClr val="16181D"/>
+                </a:solidFill>
+                <a:latin typeface="BIZ UDPGothic" pitchFamily="34" charset="0"/>
+                <a:ea typeface="BIZ UDPGothic" pitchFamily="34" charset="-122"/>
+                <a:cs typeface="BIZ UDPGothic" pitchFamily="34" charset="-120"/>
               </a:rPr>
               <a:t>それが、義務に見合った</a:t>
             </a:r>
@@ -7022,11 +7022,11 @@
             <a:r>
               <a:rPr lang="en-US" sz="3400" b="1" dirty="0">
                 <a:solidFill>
-                  <a:srgbClr val="F5F5F0"/>
-                </a:solidFill>
-                <a:latin typeface="Cambria" pitchFamily="34" charset="0"/>
-                <a:ea typeface="Cambria" pitchFamily="34" charset="-122"/>
-                <a:cs typeface="Cambria" pitchFamily="34" charset="-120"/>
+                  <a:srgbClr val="16181D"/>
+                </a:solidFill>
+                <a:latin typeface="BIZ UDPGothic" pitchFamily="34" charset="0"/>
+                <a:ea typeface="BIZ UDPGothic" pitchFamily="34" charset="-122"/>
+                <a:cs typeface="BIZ UDPGothic" pitchFamily="34" charset="-120"/>
               </a:rPr>
               <a:t>公共放送の価格である。</a:t>
             </a:r>
@@ -7049,11 +7049,11 @@
             <a:avLst/>
           </a:prstGeom>
           <a:solidFill>
-            <a:srgbClr val="2E2E2E"/>
+            <a:srgbClr val="DDE0E6"/>
           </a:solidFill>
           <a:ln w="12700">
             <a:solidFill>
-              <a:srgbClr val="2E2E2E"/>
+              <a:srgbClr val="DDE0E6"/>
             </a:solidFill>
             <a:prstDash val="solid"/>
           </a:ln>
@@ -7089,11 +7089,11 @@
             <a:r>
               <a:rPr lang="en-US" sz="1200" dirty="0">
                 <a:solidFill>
-                  <a:srgbClr val="CCCCCC"/>
+                  <a:srgbClr val="2B2F36"/>
                 </a:solidFill>
                 <a:latin typeface="Arial" pitchFamily="34" charset="0"/>
-                <a:ea typeface="Arial" pitchFamily="34" charset="-122"/>
-                <a:cs typeface="Arial" pitchFamily="34" charset="-120"/>
+                <a:ea typeface="BIZ UDPGothic" pitchFamily="34" charset="-122"/>
+                <a:cs typeface="BIZ UDPGothic" pitchFamily="34" charset="-120"/>
               </a:rPr>
               <a:t>① 公共インフラに特化：エンタメ・スポーツを分社化</a:t>
             </a:r>
@@ -7109,11 +7109,11 @@
             <a:r>
               <a:rPr lang="en-US" sz="1200" dirty="0">
                 <a:solidFill>
-                  <a:srgbClr val="CCCCCC"/>
+                  <a:srgbClr val="2B2F36"/>
                 </a:solidFill>
                 <a:latin typeface="Arial" pitchFamily="34" charset="0"/>
-                <a:ea typeface="Arial" pitchFamily="34" charset="-122"/>
-                <a:cs typeface="Arial" pitchFamily="34" charset="-120"/>
+                <a:ea typeface="BIZ UDPGothic" pitchFamily="34" charset="-122"/>
+                <a:cs typeface="BIZ UDPGothic" pitchFamily="34" charset="-120"/>
               </a:rPr>
               <a:t>② 人件費を業界中央値へ：放送法・省令で義務化</a:t>
             </a:r>
@@ -7129,11 +7129,11 @@
             <a:r>
               <a:rPr lang="en-US" sz="1200" dirty="0">
                 <a:solidFill>
-                  <a:srgbClr val="CCCCCC"/>
+                  <a:srgbClr val="2B2F36"/>
                 </a:solidFill>
                 <a:latin typeface="Arial" pitchFamily="34" charset="0"/>
-                <a:ea typeface="Arial" pitchFamily="34" charset="-122"/>
-                <a:cs typeface="Arial" pitchFamily="34" charset="-120"/>
+                <a:ea typeface="BIZ UDPGothic" pitchFamily="34" charset="-122"/>
+                <a:cs typeface="BIZ UDPGothic" pitchFamily="34" charset="-120"/>
               </a:rPr>
               <a:t>③ 技研を廃止・大学へ移管：成果はオープン化</a:t>
             </a:r>
@@ -7149,11 +7149,11 @@
             <a:r>
               <a:rPr lang="en-US" sz="1200" dirty="0">
                 <a:solidFill>
-                  <a:srgbClr val="CCCCCC"/>
+                  <a:srgbClr val="2B2F36"/>
                 </a:solidFill>
                 <a:latin typeface="Arial" pitchFamily="34" charset="0"/>
-                <a:ea typeface="Arial" pitchFamily="34" charset="-122"/>
-                <a:cs typeface="Arial" pitchFamily="34" charset="-120"/>
+                <a:ea typeface="BIZ UDPGothic" pitchFamily="34" charset="-122"/>
+                <a:cs typeface="BIZ UDPGothic" pitchFamily="34" charset="-120"/>
               </a:rPr>
               <a:t>④ 営業費ゼロ：インフラ決済で一括徴収</a:t>
             </a:r>
@@ -7175,7 +7175,7 @@
     <p:bg>
       <p:bgPr>
         <a:solidFill>
-          <a:srgbClr val="0A0A0A"/>
+          <a:srgbClr val="F5F6F8"/>
         </a:solidFill>
       </p:bgPr>
     </p:bg>
@@ -7220,11 +7220,11 @@
             <a:r>
               <a:rPr lang="en-US" sz="900" b="1" spc="400" kern="0" dirty="0">
                 <a:solidFill>
-                  <a:srgbClr val="D62828"/>
+                  <a:srgbClr val="C8161D"/>
                 </a:solidFill>
                 <a:latin typeface="Arial" pitchFamily="34" charset="0"/>
-                <a:ea typeface="Arial" pitchFamily="34" charset="-122"/>
-                <a:cs typeface="Arial" pitchFamily="34" charset="-120"/>
+                <a:ea typeface="BIZ UDPGothic" pitchFamily="34" charset="-122"/>
+                <a:cs typeface="BIZ UDPGothic" pitchFamily="34" charset="-120"/>
               </a:rPr>
               <a:t>PROBLEM</a:t>
             </a:r>
@@ -7259,11 +7259,11 @@
             <a:r>
               <a:rPr lang="en-US" sz="3600" b="1" dirty="0">
                 <a:solidFill>
-                  <a:srgbClr val="F5F5F0"/>
-                </a:solidFill>
-                <a:latin typeface="Cambria" pitchFamily="34" charset="0"/>
-                <a:ea typeface="Cambria" pitchFamily="34" charset="-122"/>
-                <a:cs typeface="Cambria" pitchFamily="34" charset="-120"/>
+                  <a:srgbClr val="16181D"/>
+                </a:solidFill>
+                <a:latin typeface="BIZ UDPGothic" pitchFamily="34" charset="0"/>
+                <a:ea typeface="BIZ UDPGothic" pitchFamily="34" charset="-122"/>
+                <a:cs typeface="BIZ UDPGothic" pitchFamily="34" charset="-120"/>
               </a:rPr>
               <a:t>法的義務に守られた組織の末路</a:t>
             </a:r>
@@ -7286,11 +7286,11 @@
             <a:avLst/>
           </a:prstGeom>
           <a:solidFill>
-            <a:srgbClr val="2E2E2E"/>
+            <a:srgbClr val="DDE0E6"/>
           </a:solidFill>
           <a:ln w="12700">
             <a:solidFill>
-              <a:srgbClr val="2E2E2E"/>
+              <a:srgbClr val="DDE0E6"/>
             </a:solidFill>
             <a:prstDash val="solid"/>
           </a:ln>
@@ -7313,11 +7313,11 @@
             </a:avLst>
           </a:prstGeom>
           <a:solidFill>
-            <a:srgbClr val="1A1A1A"/>
+            <a:srgbClr val="FFFFFF"/>
           </a:solidFill>
           <a:ln w="12700">
             <a:solidFill>
-              <a:srgbClr val="2E2E2E"/>
+              <a:srgbClr val="DDE0E6"/>
             </a:solidFill>
             <a:prstDash val="solid"/>
           </a:ln>
@@ -7357,11 +7357,11 @@
             <a:r>
               <a:rPr lang="en-US" sz="2800" b="1" dirty="0">
                 <a:solidFill>
-                  <a:srgbClr val="D62828"/>
-                </a:solidFill>
-                <a:latin typeface="Cambria" pitchFamily="34" charset="0"/>
-                <a:ea typeface="Cambria" pitchFamily="34" charset="-122"/>
-                <a:cs typeface="Cambria" pitchFamily="34" charset="-120"/>
+                  <a:srgbClr val="C8161D"/>
+                </a:solidFill>
+                <a:latin typeface="BIZ UDPGothic" pitchFamily="34" charset="0"/>
+                <a:ea typeface="BIZ UDPGothic" pitchFamily="34" charset="-122"/>
+                <a:cs typeface="BIZ UDPGothic" pitchFamily="34" charset="-120"/>
               </a:rPr>
               <a:t>01</a:t>
             </a:r>
@@ -7384,11 +7384,11 @@
             <a:avLst/>
           </a:prstGeom>
           <a:solidFill>
-            <a:srgbClr val="2E2E2E"/>
+            <a:srgbClr val="DDE0E6"/>
           </a:solidFill>
           <a:ln w="12700">
             <a:solidFill>
-              <a:srgbClr val="2E2E2E"/>
+              <a:srgbClr val="DDE0E6"/>
             </a:solidFill>
             <a:prstDash val="solid"/>
           </a:ln>
@@ -7421,11 +7421,11 @@
             <a:r>
               <a:rPr lang="en-US" sz="1400" b="1" dirty="0">
                 <a:solidFill>
-                  <a:srgbClr val="F5F5F0"/>
-                </a:solidFill>
-                <a:latin typeface="Cambria" pitchFamily="34" charset="0"/>
-                <a:ea typeface="Cambria" pitchFamily="34" charset="-122"/>
-                <a:cs typeface="Cambria" pitchFamily="34" charset="-120"/>
+                  <a:srgbClr val="16181D"/>
+                </a:solidFill>
+                <a:latin typeface="BIZ UDPGothic" pitchFamily="34" charset="0"/>
+                <a:ea typeface="BIZ UDPGothic" pitchFamily="34" charset="-122"/>
+                <a:cs typeface="BIZ UDPGothic" pitchFamily="34" charset="-120"/>
               </a:rPr>
               <a:t>肥大化した業務範囲</a:t>
             </a:r>
@@ -7460,11 +7460,11 @@
             <a:r>
               <a:rPr lang="en-US" sz="1100" dirty="0">
                 <a:solidFill>
-                  <a:srgbClr val="CCCCCC"/>
+                  <a:srgbClr val="2B2F36"/>
                 </a:solidFill>
                 <a:latin typeface="Arial" pitchFamily="34" charset="0"/>
-                <a:ea typeface="Arial" pitchFamily="34" charset="-122"/>
-                <a:cs typeface="Arial" pitchFamily="34" charset="-120"/>
+                <a:ea typeface="BIZ UDPGothic" pitchFamily="34" charset="-122"/>
+                <a:cs typeface="BIZ UDPGothic" pitchFamily="34" charset="-120"/>
               </a:rPr>
               <a:t>ニュースから紅白・バラエティ・スポーツ・研究まで、民間代替可能な事業を受信料で全方位展開</a:t>
             </a:r>
@@ -7489,11 +7489,11 @@
             </a:avLst>
           </a:prstGeom>
           <a:solidFill>
-            <a:srgbClr val="1A1A1A"/>
+            <a:srgbClr val="FFFFFF"/>
           </a:solidFill>
           <a:ln w="12700">
             <a:solidFill>
-              <a:srgbClr val="2E2E2E"/>
+              <a:srgbClr val="DDE0E6"/>
             </a:solidFill>
             <a:prstDash val="solid"/>
           </a:ln>
@@ -7533,11 +7533,11 @@
             <a:r>
               <a:rPr lang="en-US" sz="2800" b="1" dirty="0">
                 <a:solidFill>
-                  <a:srgbClr val="D62828"/>
-                </a:solidFill>
-                <a:latin typeface="Cambria" pitchFamily="34" charset="0"/>
-                <a:ea typeface="Cambria" pitchFamily="34" charset="-122"/>
-                <a:cs typeface="Cambria" pitchFamily="34" charset="-120"/>
+                  <a:srgbClr val="C8161D"/>
+                </a:solidFill>
+                <a:latin typeface="BIZ UDPGothic" pitchFamily="34" charset="0"/>
+                <a:ea typeface="BIZ UDPGothic" pitchFamily="34" charset="-122"/>
+                <a:cs typeface="BIZ UDPGothic" pitchFamily="34" charset="-120"/>
               </a:rPr>
               <a:t>02</a:t>
             </a:r>
@@ -7560,11 +7560,11 @@
             <a:avLst/>
           </a:prstGeom>
           <a:solidFill>
-            <a:srgbClr val="2E2E2E"/>
+            <a:srgbClr val="DDE0E6"/>
           </a:solidFill>
           <a:ln w="12700">
             <a:solidFill>
-              <a:srgbClr val="2E2E2E"/>
+              <a:srgbClr val="DDE0E6"/>
             </a:solidFill>
             <a:prstDash val="solid"/>
           </a:ln>
@@ -7597,11 +7597,11 @@
             <a:r>
               <a:rPr lang="en-US" sz="1400" b="1" dirty="0">
                 <a:solidFill>
-                  <a:srgbClr val="F5F5F0"/>
-                </a:solidFill>
-                <a:latin typeface="Cambria" pitchFamily="34" charset="0"/>
-                <a:ea typeface="Cambria" pitchFamily="34" charset="-122"/>
-                <a:cs typeface="Cambria" pitchFamily="34" charset="-120"/>
+                  <a:srgbClr val="16181D"/>
+                </a:solidFill>
+                <a:latin typeface="BIZ UDPGothic" pitchFamily="34" charset="0"/>
+                <a:ea typeface="BIZ UDPGothic" pitchFamily="34" charset="-122"/>
+                <a:cs typeface="BIZ UDPGothic" pitchFamily="34" charset="-120"/>
               </a:rPr>
               <a:t>競争なき高給与</a:t>
             </a:r>
@@ -7636,11 +7636,11 @@
             <a:r>
               <a:rPr lang="en-US" sz="1100" dirty="0">
                 <a:solidFill>
-                  <a:srgbClr val="CCCCCC"/>
+                  <a:srgbClr val="2B2F36"/>
                 </a:solidFill>
                 <a:latin typeface="Arial" pitchFamily="34" charset="0"/>
-                <a:ea typeface="Arial" pitchFamily="34" charset="-122"/>
-                <a:cs typeface="Arial" pitchFamily="34" charset="-120"/>
+                <a:ea typeface="BIZ UDPGothic" pitchFamily="34" charset="-122"/>
+                <a:cs typeface="BIZ UDPGothic" pitchFamily="34" charset="-120"/>
               </a:rPr>
               <a:t>職員平均1,100万円。地方民放局を含む業界中央値（700〜750万円）から大きくかけ離れた年功序列体系</a:t>
             </a:r>
@@ -7665,11 +7665,11 @@
             </a:avLst>
           </a:prstGeom>
           <a:solidFill>
-            <a:srgbClr val="1A1A1A"/>
+            <a:srgbClr val="FFFFFF"/>
           </a:solidFill>
           <a:ln w="12700">
             <a:solidFill>
-              <a:srgbClr val="2E2E2E"/>
+              <a:srgbClr val="DDE0E6"/>
             </a:solidFill>
             <a:prstDash val="solid"/>
           </a:ln>
@@ -7709,11 +7709,11 @@
             <a:r>
               <a:rPr lang="en-US" sz="2800" b="1" dirty="0">
                 <a:solidFill>
-                  <a:srgbClr val="D62828"/>
-                </a:solidFill>
-                <a:latin typeface="Cambria" pitchFamily="34" charset="0"/>
-                <a:ea typeface="Cambria" pitchFamily="34" charset="-122"/>
-                <a:cs typeface="Cambria" pitchFamily="34" charset="-120"/>
+                  <a:srgbClr val="C8161D"/>
+                </a:solidFill>
+                <a:latin typeface="BIZ UDPGothic" pitchFamily="34" charset="0"/>
+                <a:ea typeface="BIZ UDPGothic" pitchFamily="34" charset="-122"/>
+                <a:cs typeface="BIZ UDPGothic" pitchFamily="34" charset="-120"/>
               </a:rPr>
               <a:t>03</a:t>
             </a:r>
@@ -7736,11 +7736,11 @@
             <a:avLst/>
           </a:prstGeom>
           <a:solidFill>
-            <a:srgbClr val="2E2E2E"/>
+            <a:srgbClr val="DDE0E6"/>
           </a:solidFill>
           <a:ln w="12700">
             <a:solidFill>
-              <a:srgbClr val="2E2E2E"/>
+              <a:srgbClr val="DDE0E6"/>
             </a:solidFill>
             <a:prstDash val="solid"/>
           </a:ln>
@@ -7773,11 +7773,11 @@
             <a:r>
               <a:rPr lang="en-US" sz="1400" b="1" dirty="0">
                 <a:solidFill>
-                  <a:srgbClr val="F5F5F0"/>
-                </a:solidFill>
-                <a:latin typeface="Cambria" pitchFamily="34" charset="0"/>
-                <a:ea typeface="Cambria" pitchFamily="34" charset="-122"/>
-                <a:cs typeface="Cambria" pitchFamily="34" charset="-120"/>
+                  <a:srgbClr val="16181D"/>
+                </a:solidFill>
+                <a:latin typeface="BIZ UDPGothic" pitchFamily="34" charset="0"/>
+                <a:ea typeface="BIZ UDPGothic" pitchFamily="34" charset="-122"/>
+                <a:cs typeface="BIZ UDPGothic" pitchFamily="34" charset="-120"/>
               </a:rPr>
               <a:t>義務なのに徴収コスト</a:t>
             </a:r>
@@ -7812,11 +7812,11 @@
             <a:r>
               <a:rPr lang="en-US" sz="1100" dirty="0">
                 <a:solidFill>
-                  <a:srgbClr val="CCCCCC"/>
+                  <a:srgbClr val="2B2F36"/>
                 </a:solidFill>
                 <a:latin typeface="Arial" pitchFamily="34" charset="0"/>
-                <a:ea typeface="Arial" pitchFamily="34" charset="-122"/>
-                <a:cs typeface="Arial" pitchFamily="34" charset="-120"/>
+                <a:ea typeface="BIZ UDPGothic" pitchFamily="34" charset="-122"/>
+                <a:cs typeface="BIZ UDPGothic" pitchFamily="34" charset="-120"/>
               </a:rPr>
               <a:t>支払い義務があるにもかかわらず、督促・訪問・コールセンターに年間500〜600億円を費やす構造的矛盾</a:t>
             </a:r>
@@ -7838,7 +7838,7 @@
     <p:bg>
       <p:bgPr>
         <a:solidFill>
-          <a:srgbClr val="0A0A0A"/>
+          <a:srgbClr val="F5F6F8"/>
         </a:solidFill>
       </p:bgPr>
     </p:bg>
@@ -7883,11 +7883,11 @@
             <a:r>
               <a:rPr lang="en-US" sz="900" b="1" spc="400" kern="0" dirty="0">
                 <a:solidFill>
-                  <a:srgbClr val="D62828"/>
+                  <a:srgbClr val="C8161D"/>
                 </a:solidFill>
                 <a:latin typeface="Arial" pitchFamily="34" charset="0"/>
-                <a:ea typeface="Arial" pitchFamily="34" charset="-122"/>
-                <a:cs typeface="Arial" pitchFamily="34" charset="-120"/>
+                <a:ea typeface="BIZ UDPGothic" pitchFamily="34" charset="-122"/>
+                <a:cs typeface="BIZ UDPGothic" pitchFamily="34" charset="-120"/>
               </a:rPr>
               <a:t>DATA</a:t>
             </a:r>
@@ -7922,11 +7922,11 @@
             <a:r>
               <a:rPr lang="en-US" sz="3600" b="1" dirty="0">
                 <a:solidFill>
-                  <a:srgbClr val="F5F5F0"/>
-                </a:solidFill>
-                <a:latin typeface="Cambria" pitchFamily="34" charset="0"/>
-                <a:ea typeface="Cambria" pitchFamily="34" charset="-122"/>
-                <a:cs typeface="Cambria" pitchFamily="34" charset="-120"/>
+                  <a:srgbClr val="16181D"/>
+                </a:solidFill>
+                <a:latin typeface="BIZ UDPGothic" pitchFamily="34" charset="0"/>
+                <a:ea typeface="BIZ UDPGothic" pitchFamily="34" charset="-122"/>
+                <a:cs typeface="BIZ UDPGothic" pitchFamily="34" charset="-120"/>
               </a:rPr>
               <a:t>NHKの現状</a:t>
             </a:r>
@@ -7949,11 +7949,11 @@
             <a:avLst/>
           </a:prstGeom>
           <a:solidFill>
-            <a:srgbClr val="2E2E2E"/>
+            <a:srgbClr val="DDE0E6"/>
           </a:solidFill>
           <a:ln w="12700">
             <a:solidFill>
-              <a:srgbClr val="2E2E2E"/>
+              <a:srgbClr val="DDE0E6"/>
             </a:solidFill>
             <a:prstDash val="solid"/>
           </a:ln>
@@ -7976,11 +7976,11 @@
             </a:avLst>
           </a:prstGeom>
           <a:solidFill>
-            <a:srgbClr val="1A1A1A"/>
+            <a:srgbClr val="FFFFFF"/>
           </a:solidFill>
           <a:ln w="12700">
             <a:solidFill>
-              <a:srgbClr val="2E2E2E"/>
+              <a:srgbClr val="DDE0E6"/>
             </a:solidFill>
             <a:prstDash val="solid"/>
           </a:ln>
@@ -8020,11 +8020,11 @@
             <a:r>
               <a:rPr lang="en-US" sz="2000" b="1" dirty="0">
                 <a:solidFill>
-                  <a:srgbClr val="D62828"/>
-                </a:solidFill>
-                <a:latin typeface="Cambria" pitchFamily="34" charset="0"/>
-                <a:ea typeface="Cambria" pitchFamily="34" charset="-122"/>
-                <a:cs typeface="Cambria" pitchFamily="34" charset="-120"/>
+                  <a:srgbClr val="C8161D"/>
+                </a:solidFill>
+                <a:latin typeface="BIZ UDPGothic" pitchFamily="34" charset="0"/>
+                <a:ea typeface="BIZ UDPGothic" pitchFamily="34" charset="-122"/>
+                <a:cs typeface="BIZ UDPGothic" pitchFamily="34" charset="-120"/>
               </a:rPr>
               <a:t>5,900億円</a:t>
             </a:r>
@@ -8059,11 +8059,11 @@
             <a:r>
               <a:rPr lang="en-US" sz="1000" dirty="0">
                 <a:solidFill>
-                  <a:srgbClr val="CCCCCC"/>
+                  <a:srgbClr val="2B2F36"/>
                 </a:solidFill>
                 <a:latin typeface="Arial" pitchFamily="34" charset="0"/>
-                <a:ea typeface="Arial" pitchFamily="34" charset="-122"/>
-                <a:cs typeface="Arial" pitchFamily="34" charset="-120"/>
+                <a:ea typeface="BIZ UDPGothic" pitchFamily="34" charset="-122"/>
+                <a:cs typeface="BIZ UDPGothic" pitchFamily="34" charset="-120"/>
               </a:rPr>
               <a:t>受信料収入（年間）</a:t>
             </a:r>
@@ -8088,11 +8088,11 @@
             </a:avLst>
           </a:prstGeom>
           <a:solidFill>
-            <a:srgbClr val="1A1A1A"/>
+            <a:srgbClr val="FFFFFF"/>
           </a:solidFill>
           <a:ln w="12700">
             <a:solidFill>
-              <a:srgbClr val="2E2E2E"/>
+              <a:srgbClr val="DDE0E6"/>
             </a:solidFill>
             <a:prstDash val="solid"/>
           </a:ln>
@@ -8132,11 +8132,11 @@
             <a:r>
               <a:rPr lang="en-US" sz="2000" b="1" dirty="0">
                 <a:solidFill>
-                  <a:srgbClr val="D62828"/>
-                </a:solidFill>
-                <a:latin typeface="Cambria" pitchFamily="34" charset="0"/>
-                <a:ea typeface="Cambria" pitchFamily="34" charset="-122"/>
-                <a:cs typeface="Cambria" pitchFamily="34" charset="-120"/>
+                  <a:srgbClr val="C8161D"/>
+                </a:solidFill>
+                <a:latin typeface="BIZ UDPGothic" pitchFamily="34" charset="0"/>
+                <a:ea typeface="BIZ UDPGothic" pitchFamily="34" charset="-122"/>
+                <a:cs typeface="BIZ UDPGothic" pitchFamily="34" charset="-120"/>
               </a:rPr>
               <a:t>1,100万円</a:t>
             </a:r>
@@ -8171,11 +8171,11 @@
             <a:r>
               <a:rPr lang="en-US" sz="1000" dirty="0">
                 <a:solidFill>
-                  <a:srgbClr val="CCCCCC"/>
+                  <a:srgbClr val="2B2F36"/>
                 </a:solidFill>
                 <a:latin typeface="Arial" pitchFamily="34" charset="0"/>
-                <a:ea typeface="Arial" pitchFamily="34" charset="-122"/>
-                <a:cs typeface="Arial" pitchFamily="34" charset="-120"/>
+                <a:ea typeface="BIZ UDPGothic" pitchFamily="34" charset="-122"/>
+                <a:cs typeface="BIZ UDPGothic" pitchFamily="34" charset="-120"/>
               </a:rPr>
               <a:t>職員平均給与</a:t>
             </a:r>
@@ -8200,11 +8200,11 @@
             </a:avLst>
           </a:prstGeom>
           <a:solidFill>
-            <a:srgbClr val="1A1A1A"/>
+            <a:srgbClr val="FFFFFF"/>
           </a:solidFill>
           <a:ln w="12700">
             <a:solidFill>
-              <a:srgbClr val="2E2E2E"/>
+              <a:srgbClr val="DDE0E6"/>
             </a:solidFill>
             <a:prstDash val="solid"/>
           </a:ln>
@@ -8244,11 +8244,11 @@
             <a:r>
               <a:rPr lang="en-US" sz="2000" b="1" dirty="0">
                 <a:solidFill>
-                  <a:srgbClr val="D62828"/>
-                </a:solidFill>
-                <a:latin typeface="Cambria" pitchFamily="34" charset="0"/>
-                <a:ea typeface="Cambria" pitchFamily="34" charset="-122"/>
-                <a:cs typeface="Cambria" pitchFamily="34" charset="-120"/>
+                  <a:srgbClr val="C8161D"/>
+                </a:solidFill>
+                <a:latin typeface="BIZ UDPGothic" pitchFamily="34" charset="0"/>
+                <a:ea typeface="BIZ UDPGothic" pitchFamily="34" charset="-122"/>
+                <a:cs typeface="BIZ UDPGothic" pitchFamily="34" charset="-120"/>
               </a:rPr>
               <a:t>500〜600億円</a:t>
             </a:r>
@@ -8283,11 +8283,11 @@
             <a:r>
               <a:rPr lang="en-US" sz="1000" dirty="0">
                 <a:solidFill>
-                  <a:srgbClr val="CCCCCC"/>
+                  <a:srgbClr val="2B2F36"/>
                 </a:solidFill>
                 <a:latin typeface="Arial" pitchFamily="34" charset="0"/>
-                <a:ea typeface="Arial" pitchFamily="34" charset="-122"/>
-                <a:cs typeface="Arial" pitchFamily="34" charset="-120"/>
+                <a:ea typeface="BIZ UDPGothic" pitchFamily="34" charset="-122"/>
+                <a:cs typeface="BIZ UDPGothic" pitchFamily="34" charset="-120"/>
               </a:rPr>
               <a:t>営業・徴収コスト（年間）</a:t>
             </a:r>
@@ -8312,11 +8312,11 @@
             </a:avLst>
           </a:prstGeom>
           <a:solidFill>
-            <a:srgbClr val="1A1A1A"/>
+            <a:srgbClr val="FFFFFF"/>
           </a:solidFill>
           <a:ln w="12700">
             <a:solidFill>
-              <a:srgbClr val="2E2E2E"/>
+              <a:srgbClr val="DDE0E6"/>
             </a:solidFill>
             <a:prstDash val="solid"/>
           </a:ln>
@@ -8356,11 +8356,11 @@
             <a:r>
               <a:rPr lang="en-US" sz="2000" b="1" dirty="0">
                 <a:solidFill>
-                  <a:srgbClr val="D62828"/>
-                </a:solidFill>
-                <a:latin typeface="Cambria" pitchFamily="34" charset="0"/>
-                <a:ea typeface="Cambria" pitchFamily="34" charset="-122"/>
-                <a:cs typeface="Cambria" pitchFamily="34" charset="-120"/>
+                  <a:srgbClr val="C8161D"/>
+                </a:solidFill>
+                <a:latin typeface="BIZ UDPGothic" pitchFamily="34" charset="0"/>
+                <a:ea typeface="BIZ UDPGothic" pitchFamily="34" charset="-122"/>
+                <a:cs typeface="BIZ UDPGothic" pitchFamily="34" charset="-120"/>
               </a:rPr>
               <a:t>250〜280億円</a:t>
             </a:r>
@@ -8395,11 +8395,11 @@
             <a:r>
               <a:rPr lang="en-US" sz="1000" dirty="0">
                 <a:solidFill>
-                  <a:srgbClr val="CCCCCC"/>
+                  <a:srgbClr val="2B2F36"/>
                 </a:solidFill>
                 <a:latin typeface="Arial" pitchFamily="34" charset="0"/>
-                <a:ea typeface="Arial" pitchFamily="34" charset="-122"/>
-                <a:cs typeface="Arial" pitchFamily="34" charset="-120"/>
+                <a:ea typeface="BIZ UDPGothic" pitchFamily="34" charset="-122"/>
+                <a:cs typeface="BIZ UDPGothic" pitchFamily="34" charset="-120"/>
               </a:rPr>
               <a:t>技研（放送技術研究所）予算（年間）</a:t>
             </a:r>
@@ -8424,11 +8424,11 @@
             </a:avLst>
           </a:prstGeom>
           <a:solidFill>
-            <a:srgbClr val="1A1A1A"/>
+            <a:srgbClr val="FFFFFF"/>
           </a:solidFill>
           <a:ln w="12700">
             <a:solidFill>
-              <a:srgbClr val="2E2E2E"/>
+              <a:srgbClr val="DDE0E6"/>
             </a:solidFill>
             <a:prstDash val="solid"/>
           </a:ln>
@@ -8468,11 +8468,11 @@
             <a:r>
               <a:rPr lang="en-US" sz="2000" b="1" dirty="0">
                 <a:solidFill>
-                  <a:srgbClr val="D62828"/>
-                </a:solidFill>
-                <a:latin typeface="Cambria" pitchFamily="34" charset="0"/>
-                <a:ea typeface="Cambria" pitchFamily="34" charset="-122"/>
-                <a:cs typeface="Cambria" pitchFamily="34" charset="-120"/>
+                  <a:srgbClr val="C8161D"/>
+                </a:solidFill>
+                <a:latin typeface="BIZ UDPGothic" pitchFamily="34" charset="0"/>
+                <a:ea typeface="BIZ UDPGothic" pitchFamily="34" charset="-122"/>
+                <a:cs typeface="BIZ UDPGothic" pitchFamily="34" charset="-120"/>
               </a:rPr>
               <a:t>月額 1,225円</a:t>
             </a:r>
@@ -8507,11 +8507,11 @@
             <a:r>
               <a:rPr lang="en-US" sz="1000" dirty="0">
                 <a:solidFill>
-                  <a:srgbClr val="CCCCCC"/>
+                  <a:srgbClr val="2B2F36"/>
                 </a:solidFill>
                 <a:latin typeface="Arial" pitchFamily="34" charset="0"/>
-                <a:ea typeface="Arial" pitchFamily="34" charset="-122"/>
-                <a:cs typeface="Arial" pitchFamily="34" charset="-120"/>
+                <a:ea typeface="BIZ UDPGothic" pitchFamily="34" charset="-122"/>
+                <a:cs typeface="BIZ UDPGothic" pitchFamily="34" charset="-120"/>
               </a:rPr>
               <a:t>受信料・地上契約（2024年度）</a:t>
             </a:r>
@@ -8536,11 +8536,11 @@
             </a:avLst>
           </a:prstGeom>
           <a:solidFill>
-            <a:srgbClr val="1A1A1A"/>
+            <a:srgbClr val="FFFFFF"/>
           </a:solidFill>
           <a:ln w="12700">
             <a:solidFill>
-              <a:srgbClr val="2E2E2E"/>
+              <a:srgbClr val="DDE0E6"/>
             </a:solidFill>
             <a:prstDash val="solid"/>
           </a:ln>
@@ -8580,11 +8580,11 @@
             <a:r>
               <a:rPr lang="en-US" sz="2000" b="1" dirty="0">
                 <a:solidFill>
-                  <a:srgbClr val="D62828"/>
-                </a:solidFill>
-                <a:latin typeface="Cambria" pitchFamily="34" charset="0"/>
-                <a:ea typeface="Cambria" pitchFamily="34" charset="-122"/>
-                <a:cs typeface="Cambria" pitchFamily="34" charset="-120"/>
+                  <a:srgbClr val="C8161D"/>
+                </a:solidFill>
+                <a:latin typeface="BIZ UDPGothic" pitchFamily="34" charset="0"/>
+                <a:ea typeface="BIZ UDPGothic" pitchFamily="34" charset="-122"/>
+                <a:cs typeface="BIZ UDPGothic" pitchFamily="34" charset="-120"/>
               </a:rPr>
               <a:t>月額 2,034円</a:t>
             </a:r>
@@ -8619,11 +8619,11 @@
             <a:r>
               <a:rPr lang="en-US" sz="1000" dirty="0">
                 <a:solidFill>
-                  <a:srgbClr val="CCCCCC"/>
+                  <a:srgbClr val="2B2F36"/>
                 </a:solidFill>
                 <a:latin typeface="Arial" pitchFamily="34" charset="0"/>
-                <a:ea typeface="Arial" pitchFamily="34" charset="-122"/>
-                <a:cs typeface="Arial" pitchFamily="34" charset="-120"/>
+                <a:ea typeface="BIZ UDPGothic" pitchFamily="34" charset="-122"/>
+                <a:cs typeface="BIZ UDPGothic" pitchFamily="34" charset="-120"/>
               </a:rPr>
               <a:t>受信料・衛星BS契約（2024年度）</a:t>
             </a:r>
@@ -8645,7 +8645,7 @@
     <p:bg>
       <p:bgPr>
         <a:solidFill>
-          <a:srgbClr val="0A0A0A"/>
+          <a:srgbClr val="F5F6F8"/>
         </a:solidFill>
       </p:bgPr>
     </p:bg>
@@ -8690,11 +8690,11 @@
             <a:r>
               <a:rPr lang="en-US" sz="900" b="1" spc="400" kern="0" dirty="0">
                 <a:solidFill>
-                  <a:srgbClr val="D62828"/>
+                  <a:srgbClr val="C8161D"/>
                 </a:solidFill>
                 <a:latin typeface="Arial" pitchFamily="34" charset="0"/>
-                <a:ea typeface="Arial" pitchFamily="34" charset="-122"/>
-                <a:cs typeface="Arial" pitchFamily="34" charset="-120"/>
+                <a:ea typeface="BIZ UDPGothic" pitchFamily="34" charset="-122"/>
+                <a:cs typeface="BIZ UDPGothic" pitchFamily="34" charset="-120"/>
               </a:rPr>
               <a:t>OVERVIEW</a:t>
             </a:r>
@@ -8729,11 +8729,11 @@
             <a:r>
               <a:rPr lang="en-US" sz="3600" b="1" dirty="0">
                 <a:solidFill>
-                  <a:srgbClr val="F5F5F0"/>
-                </a:solidFill>
-                <a:latin typeface="Cambria" pitchFamily="34" charset="0"/>
-                <a:ea typeface="Cambria" pitchFamily="34" charset="-122"/>
-                <a:cs typeface="Cambria" pitchFamily="34" charset="-120"/>
+                  <a:srgbClr val="16181D"/>
+                </a:solidFill>
+                <a:latin typeface="BIZ UDPGothic" pitchFamily="34" charset="0"/>
+                <a:ea typeface="BIZ UDPGothic" pitchFamily="34" charset="-122"/>
+                <a:cs typeface="BIZ UDPGothic" pitchFamily="34" charset="-120"/>
               </a:rPr>
               <a:t>改革の4つの柱</a:t>
             </a:r>
@@ -8756,11 +8756,11 @@
             <a:avLst/>
           </a:prstGeom>
           <a:solidFill>
-            <a:srgbClr val="2E2E2E"/>
+            <a:srgbClr val="DDE0E6"/>
           </a:solidFill>
           <a:ln w="12700">
             <a:solidFill>
-              <a:srgbClr val="2E2E2E"/>
+              <a:srgbClr val="DDE0E6"/>
             </a:solidFill>
             <a:prstDash val="solid"/>
           </a:ln>
@@ -8783,11 +8783,11 @@
             </a:avLst>
           </a:prstGeom>
           <a:solidFill>
-            <a:srgbClr val="1A1A1A"/>
+            <a:srgbClr val="FFFFFF"/>
           </a:solidFill>
           <a:ln w="12700">
             <a:solidFill>
-              <a:srgbClr val="2E2E2E"/>
+              <a:srgbClr val="DDE0E6"/>
             </a:solidFill>
             <a:prstDash val="solid"/>
           </a:ln>
@@ -8817,11 +8817,11 @@
             </a:avLst>
           </a:prstGeom>
           <a:solidFill>
-            <a:srgbClr val="D62828"/>
+            <a:srgbClr val="C8161D"/>
           </a:solidFill>
           <a:ln w="12700">
             <a:solidFill>
-              <a:srgbClr val="D62828"/>
+              <a:srgbClr val="C8161D"/>
             </a:solidFill>
             <a:prstDash val="solid"/>
           </a:ln>
@@ -8854,11 +8854,11 @@
             <a:r>
               <a:rPr lang="en-US" sz="2200" b="1" dirty="0">
                 <a:solidFill>
-                  <a:srgbClr val="F5F5F0"/>
-                </a:solidFill>
-                <a:latin typeface="Cambria" pitchFamily="34" charset="0"/>
-                <a:ea typeface="Cambria" pitchFamily="34" charset="-122"/>
-                <a:cs typeface="Cambria" pitchFamily="34" charset="-120"/>
+                  <a:srgbClr val="FFFFFF"/>
+                </a:solidFill>
+                <a:latin typeface="BIZ UDPGothic" pitchFamily="34" charset="0"/>
+                <a:ea typeface="BIZ UDPGothic" pitchFamily="34" charset="-122"/>
+                <a:cs typeface="BIZ UDPGothic" pitchFamily="34" charset="-120"/>
               </a:rPr>
               <a:t>01</a:t>
             </a:r>
@@ -8893,11 +8893,11 @@
             <a:r>
               <a:rPr lang="en-US" sz="1300" b="1" dirty="0">
                 <a:solidFill>
-                  <a:srgbClr val="F5F5F0"/>
-                </a:solidFill>
-                <a:latin typeface="Cambria" pitchFamily="34" charset="0"/>
-                <a:ea typeface="Cambria" pitchFamily="34" charset="-122"/>
-                <a:cs typeface="Cambria" pitchFamily="34" charset="-120"/>
+                  <a:srgbClr val="16181D"/>
+                </a:solidFill>
+                <a:latin typeface="BIZ UDPGothic" pitchFamily="34" charset="0"/>
+                <a:ea typeface="BIZ UDPGothic" pitchFamily="34" charset="-122"/>
+                <a:cs typeface="BIZ UDPGothic" pitchFamily="34" charset="-120"/>
               </a:rPr>
               <a:t>分社化と公共特化</a:t>
             </a:r>
@@ -8920,11 +8920,11 @@
             <a:avLst/>
           </a:prstGeom>
           <a:solidFill>
-            <a:srgbClr val="2E2E2E"/>
+            <a:srgbClr val="DDE0E6"/>
           </a:solidFill>
           <a:ln w="12700">
             <a:solidFill>
-              <a:srgbClr val="2E2E2E"/>
+              <a:srgbClr val="DDE0E6"/>
             </a:solidFill>
             <a:prstDash val="solid"/>
           </a:ln>
@@ -8957,11 +8957,11 @@
             <a:r>
               <a:rPr lang="en-US" sz="1000" dirty="0">
                 <a:solidFill>
-                  <a:srgbClr val="CCCCCC"/>
+                  <a:srgbClr val="2B2F36"/>
                 </a:solidFill>
                 <a:latin typeface="Arial" pitchFamily="34" charset="0"/>
-                <a:ea typeface="Arial" pitchFamily="34" charset="-122"/>
-                <a:cs typeface="Arial" pitchFamily="34" charset="-120"/>
+                <a:ea typeface="BIZ UDPGothic" pitchFamily="34" charset="-122"/>
+                <a:cs typeface="BIZ UDPGothic" pitchFamily="34" charset="-120"/>
               </a:rPr>
               <a:t>エンタメ・スポーツを切り離し</a:t>
             </a:r>
@@ -8974,11 +8974,11 @@
             <a:r>
               <a:rPr lang="en-US" sz="1000" dirty="0">
                 <a:solidFill>
-                  <a:srgbClr val="CCCCCC"/>
+                  <a:srgbClr val="2B2F36"/>
                 </a:solidFill>
                 <a:latin typeface="Arial" pitchFamily="34" charset="0"/>
-                <a:ea typeface="Arial" pitchFamily="34" charset="-122"/>
-                <a:cs typeface="Arial" pitchFamily="34" charset="-120"/>
+                <a:ea typeface="BIZ UDPGothic" pitchFamily="34" charset="-122"/>
+                <a:cs typeface="BIZ UDPGothic" pitchFamily="34" charset="-120"/>
               </a:rPr>
               <a:t>ニュース・教育・災害に集中</a:t>
             </a:r>
@@ -9003,11 +9003,11 @@
             </a:avLst>
           </a:prstGeom>
           <a:solidFill>
-            <a:srgbClr val="1A1A1A"/>
+            <a:srgbClr val="FFFFFF"/>
           </a:solidFill>
           <a:ln w="12700">
             <a:solidFill>
-              <a:srgbClr val="2E2E2E"/>
+              <a:srgbClr val="DDE0E6"/>
             </a:solidFill>
             <a:prstDash val="solid"/>
           </a:ln>
@@ -9037,11 +9037,11 @@
             </a:avLst>
           </a:prstGeom>
           <a:solidFill>
-            <a:srgbClr val="D62828"/>
+            <a:srgbClr val="C8161D"/>
           </a:solidFill>
           <a:ln w="12700">
             <a:solidFill>
-              <a:srgbClr val="D62828"/>
+              <a:srgbClr val="C8161D"/>
             </a:solidFill>
             <a:prstDash val="solid"/>
           </a:ln>
@@ -9074,11 +9074,11 @@
             <a:r>
               <a:rPr lang="en-US" sz="2200" b="1" dirty="0">
                 <a:solidFill>
-                  <a:srgbClr val="F5F5F0"/>
-                </a:solidFill>
-                <a:latin typeface="Cambria" pitchFamily="34" charset="0"/>
-                <a:ea typeface="Cambria" pitchFamily="34" charset="-122"/>
-                <a:cs typeface="Cambria" pitchFamily="34" charset="-120"/>
+                  <a:srgbClr val="FFFFFF"/>
+                </a:solidFill>
+                <a:latin typeface="BIZ UDPGothic" pitchFamily="34" charset="0"/>
+                <a:ea typeface="BIZ UDPGothic" pitchFamily="34" charset="-122"/>
+                <a:cs typeface="BIZ UDPGothic" pitchFamily="34" charset="-120"/>
               </a:rPr>
               <a:t>02</a:t>
             </a:r>
@@ -9113,11 +9113,11 @@
             <a:r>
               <a:rPr lang="en-US" sz="1300" b="1" dirty="0">
                 <a:solidFill>
-                  <a:srgbClr val="F5F5F0"/>
-                </a:solidFill>
-                <a:latin typeface="Cambria" pitchFamily="34" charset="0"/>
-                <a:ea typeface="Cambria" pitchFamily="34" charset="-122"/>
-                <a:cs typeface="Cambria" pitchFamily="34" charset="-120"/>
+                  <a:srgbClr val="16181D"/>
+                </a:solidFill>
+                <a:latin typeface="BIZ UDPGothic" pitchFamily="34" charset="0"/>
+                <a:ea typeface="BIZ UDPGothic" pitchFamily="34" charset="-122"/>
+                <a:cs typeface="BIZ UDPGothic" pitchFamily="34" charset="-120"/>
               </a:rPr>
               <a:t>人件費の適正化</a:t>
             </a:r>
@@ -9140,11 +9140,11 @@
             <a:avLst/>
           </a:prstGeom>
           <a:solidFill>
-            <a:srgbClr val="2E2E2E"/>
+            <a:srgbClr val="DDE0E6"/>
           </a:solidFill>
           <a:ln w="12700">
             <a:solidFill>
-              <a:srgbClr val="2E2E2E"/>
+              <a:srgbClr val="DDE0E6"/>
             </a:solidFill>
             <a:prstDash val="solid"/>
           </a:ln>
@@ -9177,11 +9177,11 @@
             <a:r>
               <a:rPr lang="en-US" sz="1000" dirty="0">
                 <a:solidFill>
-                  <a:srgbClr val="CCCCCC"/>
+                  <a:srgbClr val="2B2F36"/>
                 </a:solidFill>
                 <a:latin typeface="Arial" pitchFamily="34" charset="0"/>
-                <a:ea typeface="Arial" pitchFamily="34" charset="-122"/>
-                <a:cs typeface="Arial" pitchFamily="34" charset="-120"/>
+                <a:ea typeface="BIZ UDPGothic" pitchFamily="34" charset="-122"/>
+                <a:cs typeface="BIZ UDPGothic" pitchFamily="34" charset="-120"/>
               </a:rPr>
               <a:t>業界中央値（700〜750万円）に</a:t>
             </a:r>
@@ -9194,11 +9194,11 @@
             <a:r>
               <a:rPr lang="en-US" sz="1000" dirty="0">
                 <a:solidFill>
-                  <a:srgbClr val="CCCCCC"/>
+                  <a:srgbClr val="2B2F36"/>
                 </a:solidFill>
                 <a:latin typeface="Arial" pitchFamily="34" charset="0"/>
-                <a:ea typeface="Arial" pitchFamily="34" charset="-122"/>
-                <a:cs typeface="Arial" pitchFamily="34" charset="-120"/>
+                <a:ea typeface="BIZ UDPGothic" pitchFamily="34" charset="-122"/>
+                <a:cs typeface="BIZ UDPGothic" pitchFamily="34" charset="-120"/>
               </a:rPr>
               <a:t>放送法・省令で上限を義務化</a:t>
             </a:r>
@@ -9223,11 +9223,11 @@
             </a:avLst>
           </a:prstGeom>
           <a:solidFill>
-            <a:srgbClr val="1A1A1A"/>
+            <a:srgbClr val="FFFFFF"/>
           </a:solidFill>
           <a:ln w="12700">
             <a:solidFill>
-              <a:srgbClr val="2E2E2E"/>
+              <a:srgbClr val="DDE0E6"/>
             </a:solidFill>
             <a:prstDash val="solid"/>
           </a:ln>
@@ -9257,11 +9257,11 @@
             </a:avLst>
           </a:prstGeom>
           <a:solidFill>
-            <a:srgbClr val="D62828"/>
+            <a:srgbClr val="C8161D"/>
           </a:solidFill>
           <a:ln w="12700">
             <a:solidFill>
-              <a:srgbClr val="D62828"/>
+              <a:srgbClr val="C8161D"/>
             </a:solidFill>
             <a:prstDash val="solid"/>
           </a:ln>
@@ -9294,11 +9294,11 @@
             <a:r>
               <a:rPr lang="en-US" sz="2200" b="1" dirty="0">
                 <a:solidFill>
-                  <a:srgbClr val="F5F5F0"/>
-                </a:solidFill>
-                <a:latin typeface="Cambria" pitchFamily="34" charset="0"/>
-                <a:ea typeface="Cambria" pitchFamily="34" charset="-122"/>
-                <a:cs typeface="Cambria" pitchFamily="34" charset="-120"/>
+                  <a:srgbClr val="FFFFFF"/>
+                </a:solidFill>
+                <a:latin typeface="BIZ UDPGothic" pitchFamily="34" charset="0"/>
+                <a:ea typeface="BIZ UDPGothic" pitchFamily="34" charset="-122"/>
+                <a:cs typeface="BIZ UDPGothic" pitchFamily="34" charset="-120"/>
               </a:rPr>
               <a:t>03</a:t>
             </a:r>
@@ -9333,11 +9333,11 @@
             <a:r>
               <a:rPr lang="en-US" sz="1300" b="1" dirty="0">
                 <a:solidFill>
-                  <a:srgbClr val="F5F5F0"/>
-                </a:solidFill>
-                <a:latin typeface="Cambria" pitchFamily="34" charset="0"/>
-                <a:ea typeface="Cambria" pitchFamily="34" charset="-122"/>
-                <a:cs typeface="Cambria" pitchFamily="34" charset="-120"/>
+                  <a:srgbClr val="16181D"/>
+                </a:solidFill>
+                <a:latin typeface="BIZ UDPGothic" pitchFamily="34" charset="0"/>
+                <a:ea typeface="BIZ UDPGothic" pitchFamily="34" charset="-122"/>
+                <a:cs typeface="BIZ UDPGothic" pitchFamily="34" charset="-120"/>
               </a:rPr>
               <a:t>技研の大学移管</a:t>
             </a:r>
@@ -9360,11 +9360,11 @@
             <a:avLst/>
           </a:prstGeom>
           <a:solidFill>
-            <a:srgbClr val="2E2E2E"/>
+            <a:srgbClr val="DDE0E6"/>
           </a:solidFill>
           <a:ln w="12700">
             <a:solidFill>
-              <a:srgbClr val="2E2E2E"/>
+              <a:srgbClr val="DDE0E6"/>
             </a:solidFill>
             <a:prstDash val="solid"/>
           </a:ln>
@@ -9397,11 +9397,11 @@
             <a:r>
               <a:rPr lang="en-US" sz="1000" dirty="0">
                 <a:solidFill>
-                  <a:srgbClr val="CCCCCC"/>
+                  <a:srgbClr val="2B2F36"/>
                 </a:solidFill>
                 <a:latin typeface="Arial" pitchFamily="34" charset="0"/>
-                <a:ea typeface="Arial" pitchFamily="34" charset="-122"/>
-                <a:cs typeface="Arial" pitchFamily="34" charset="-120"/>
+                <a:ea typeface="BIZ UDPGothic" pitchFamily="34" charset="-122"/>
+                <a:cs typeface="BIZ UDPGothic" pitchFamily="34" charset="-120"/>
               </a:rPr>
               <a:t>受信料による研究を廃止し</a:t>
             </a:r>
@@ -9414,11 +9414,11 @@
             <a:r>
               <a:rPr lang="en-US" sz="1000" dirty="0">
                 <a:solidFill>
-                  <a:srgbClr val="CCCCCC"/>
+                  <a:srgbClr val="2B2F36"/>
                 </a:solidFill>
                 <a:latin typeface="Arial" pitchFamily="34" charset="0"/>
-                <a:ea typeface="Arial" pitchFamily="34" charset="-122"/>
-                <a:cs typeface="Arial" pitchFamily="34" charset="-120"/>
+                <a:ea typeface="BIZ UDPGothic" pitchFamily="34" charset="-122"/>
+                <a:cs typeface="BIZ UDPGothic" pitchFamily="34" charset="-120"/>
               </a:rPr>
               <a:t>国立大学でオープン化</a:t>
             </a:r>
@@ -9443,11 +9443,11 @@
             </a:avLst>
           </a:prstGeom>
           <a:solidFill>
-            <a:srgbClr val="1A1A1A"/>
+            <a:srgbClr val="FFFFFF"/>
           </a:solidFill>
           <a:ln w="12700">
             <a:solidFill>
-              <a:srgbClr val="2E2E2E"/>
+              <a:srgbClr val="DDE0E6"/>
             </a:solidFill>
             <a:prstDash val="solid"/>
           </a:ln>
@@ -9477,11 +9477,11 @@
             </a:avLst>
           </a:prstGeom>
           <a:solidFill>
-            <a:srgbClr val="D62828"/>
+            <a:srgbClr val="C8161D"/>
           </a:solidFill>
           <a:ln w="12700">
             <a:solidFill>
-              <a:srgbClr val="D62828"/>
+              <a:srgbClr val="C8161D"/>
             </a:solidFill>
             <a:prstDash val="solid"/>
           </a:ln>
@@ -9514,11 +9514,11 @@
             <a:r>
               <a:rPr lang="en-US" sz="2200" b="1" dirty="0">
                 <a:solidFill>
-                  <a:srgbClr val="F5F5F0"/>
-                </a:solidFill>
-                <a:latin typeface="Cambria" pitchFamily="34" charset="0"/>
-                <a:ea typeface="Cambria" pitchFamily="34" charset="-122"/>
-                <a:cs typeface="Cambria" pitchFamily="34" charset="-120"/>
+                  <a:srgbClr val="FFFFFF"/>
+                </a:solidFill>
+                <a:latin typeface="BIZ UDPGothic" pitchFamily="34" charset="0"/>
+                <a:ea typeface="BIZ UDPGothic" pitchFamily="34" charset="-122"/>
+                <a:cs typeface="BIZ UDPGothic" pitchFamily="34" charset="-120"/>
               </a:rPr>
               <a:t>04</a:t>
             </a:r>
@@ -9553,11 +9553,11 @@
             <a:r>
               <a:rPr lang="en-US" sz="1300" b="1" dirty="0">
                 <a:solidFill>
-                  <a:srgbClr val="F5F5F0"/>
-                </a:solidFill>
-                <a:latin typeface="Cambria" pitchFamily="34" charset="0"/>
-                <a:ea typeface="Cambria" pitchFamily="34" charset="-122"/>
-                <a:cs typeface="Cambria" pitchFamily="34" charset="-120"/>
+                  <a:srgbClr val="16181D"/>
+                </a:solidFill>
+                <a:latin typeface="BIZ UDPGothic" pitchFamily="34" charset="0"/>
+                <a:ea typeface="BIZ UDPGothic" pitchFamily="34" charset="-122"/>
+                <a:cs typeface="BIZ UDPGothic" pitchFamily="34" charset="-120"/>
               </a:rPr>
               <a:t>営業費ゼロへ</a:t>
             </a:r>
@@ -9580,11 +9580,11 @@
             <a:avLst/>
           </a:prstGeom>
           <a:solidFill>
-            <a:srgbClr val="2E2E2E"/>
+            <a:srgbClr val="DDE0E6"/>
           </a:solidFill>
           <a:ln w="12700">
             <a:solidFill>
-              <a:srgbClr val="2E2E2E"/>
+              <a:srgbClr val="DDE0E6"/>
             </a:solidFill>
             <a:prstDash val="solid"/>
           </a:ln>
@@ -9617,11 +9617,11 @@
             <a:r>
               <a:rPr lang="en-US" sz="1000" dirty="0">
                 <a:solidFill>
-                  <a:srgbClr val="CCCCCC"/>
+                  <a:srgbClr val="2B2F36"/>
                 </a:solidFill>
                 <a:latin typeface="Arial" pitchFamily="34" charset="0"/>
-                <a:ea typeface="Arial" pitchFamily="34" charset="-122"/>
-                <a:cs typeface="Arial" pitchFamily="34" charset="-120"/>
+                <a:ea typeface="BIZ UDPGothic" pitchFamily="34" charset="-122"/>
+                <a:cs typeface="BIZ UDPGothic" pitchFamily="34" charset="-120"/>
               </a:rPr>
               <a:t>インフラ決済に統合し</a:t>
             </a:r>
@@ -9634,11 +9634,11 @@
             <a:r>
               <a:rPr lang="en-US" sz="1000" dirty="0">
                 <a:solidFill>
-                  <a:srgbClr val="CCCCCC"/>
+                  <a:srgbClr val="2B2F36"/>
                 </a:solidFill>
                 <a:latin typeface="Arial" pitchFamily="34" charset="0"/>
-                <a:ea typeface="Arial" pitchFamily="34" charset="-122"/>
-                <a:cs typeface="Arial" pitchFamily="34" charset="-120"/>
+                <a:ea typeface="BIZ UDPGothic" pitchFamily="34" charset="-122"/>
+                <a:cs typeface="BIZ UDPGothic" pitchFamily="34" charset="-120"/>
               </a:rPr>
               <a:t>徴収コストを完全撤廃</a:t>
             </a:r>
@@ -9660,7 +9660,7 @@
     <p:bg>
       <p:bgPr>
         <a:solidFill>
-          <a:srgbClr val="0A0A0A"/>
+          <a:srgbClr val="F5F6F8"/>
         </a:solidFill>
       </p:bgPr>
     </p:bg>
@@ -9705,11 +9705,11 @@
             <a:r>
               <a:rPr lang="en-US" sz="900" b="1" spc="400" kern="0" dirty="0">
                 <a:solidFill>
-                  <a:srgbClr val="D62828"/>
+                  <a:srgbClr val="C8161D"/>
                 </a:solidFill>
                 <a:latin typeface="Arial" pitchFamily="34" charset="0"/>
-                <a:ea typeface="Arial" pitchFamily="34" charset="-122"/>
-                <a:cs typeface="Arial" pitchFamily="34" charset="-120"/>
+                <a:ea typeface="BIZ UDPGothic" pitchFamily="34" charset="-122"/>
+                <a:cs typeface="BIZ UDPGothic" pitchFamily="34" charset="-120"/>
               </a:rPr>
               <a:t>PILLAR 01</a:t>
             </a:r>
@@ -9744,11 +9744,11 @@
             <a:r>
               <a:rPr lang="en-US" sz="3600" b="1" dirty="0">
                 <a:solidFill>
-                  <a:srgbClr val="F5F5F0"/>
-                </a:solidFill>
-                <a:latin typeface="Cambria" pitchFamily="34" charset="0"/>
-                <a:ea typeface="Cambria" pitchFamily="34" charset="-122"/>
-                <a:cs typeface="Cambria" pitchFamily="34" charset="-120"/>
+                  <a:srgbClr val="16181D"/>
+                </a:solidFill>
+                <a:latin typeface="BIZ UDPGothic" pitchFamily="34" charset="0"/>
+                <a:ea typeface="BIZ UDPGothic" pitchFamily="34" charset="-122"/>
+                <a:cs typeface="BIZ UDPGothic" pitchFamily="34" charset="-120"/>
               </a:rPr>
               <a:t>分社化とNHK本体の公共特化</a:t>
             </a:r>
@@ -9771,11 +9771,11 @@
             <a:avLst/>
           </a:prstGeom>
           <a:solidFill>
-            <a:srgbClr val="2E2E2E"/>
+            <a:srgbClr val="DDE0E6"/>
           </a:solidFill>
           <a:ln w="12700">
             <a:solidFill>
-              <a:srgbClr val="2E2E2E"/>
+              <a:srgbClr val="DDE0E6"/>
             </a:solidFill>
             <a:prstDash val="solid"/>
           </a:ln>
@@ -9798,11 +9798,11 @@
             </a:avLst>
           </a:prstGeom>
           <a:solidFill>
-            <a:srgbClr val="180808"/>
+            <a:srgbClr val="FCEBEB"/>
           </a:solidFill>
           <a:ln w="12700">
             <a:solidFill>
-              <a:srgbClr val="2E2E2E"/>
+              <a:srgbClr val="DDE0E6"/>
             </a:solidFill>
             <a:prstDash val="solid"/>
           </a:ln>
@@ -9842,11 +9842,11 @@
             <a:r>
               <a:rPr lang="en-US" sz="1400" b="1" dirty="0">
                 <a:solidFill>
-                  <a:srgbClr val="D62828"/>
-                </a:solidFill>
-                <a:latin typeface="Cambria" pitchFamily="34" charset="0"/>
-                <a:ea typeface="Cambria" pitchFamily="34" charset="-122"/>
-                <a:cs typeface="Cambria" pitchFamily="34" charset="-120"/>
+                  <a:srgbClr val="C8161D"/>
+                </a:solidFill>
+                <a:latin typeface="BIZ UDPGothic" pitchFamily="34" charset="0"/>
+                <a:ea typeface="BIZ UDPGothic" pitchFamily="34" charset="-122"/>
+                <a:cs typeface="BIZ UDPGothic" pitchFamily="34" charset="-120"/>
               </a:rPr>
               <a:t>廃止する業務</a:t>
             </a:r>
@@ -9885,11 +9885,11 @@
             <a:r>
               <a:rPr lang="en-US" sz="1100" dirty="0">
                 <a:solidFill>
-                  <a:srgbClr val="CCCCCC"/>
+                  <a:srgbClr val="2B2F36"/>
                 </a:solidFill>
                 <a:latin typeface="Arial" pitchFamily="34" charset="0"/>
-                <a:ea typeface="Arial" pitchFamily="34" charset="-122"/>
-                <a:cs typeface="Arial" pitchFamily="34" charset="-120"/>
+                <a:ea typeface="BIZ UDPGothic" pitchFamily="34" charset="-122"/>
+                <a:cs typeface="BIZ UDPGothic" pitchFamily="34" charset="-120"/>
               </a:rPr>
               <a:t>バラエティ・クイズ・トーク・商業ドラマ</a:t>
             </a:r>
@@ -9906,11 +9906,11 @@
             <a:r>
               <a:rPr lang="en-US" sz="1100" dirty="0">
                 <a:solidFill>
-                  <a:srgbClr val="CCCCCC"/>
+                  <a:srgbClr val="2B2F36"/>
                 </a:solidFill>
                 <a:latin typeface="Arial" pitchFamily="34" charset="0"/>
-                <a:ea typeface="Arial" pitchFamily="34" charset="-122"/>
-                <a:cs typeface="Arial" pitchFamily="34" charset="-120"/>
+                <a:ea typeface="BIZ UDPGothic" pitchFamily="34" charset="-122"/>
+                <a:cs typeface="BIZ UDPGothic" pitchFamily="34" charset="-120"/>
               </a:rPr>
               <a:t>民間代替可能なスポーツ中継</a:t>
             </a:r>
@@ -9927,11 +9927,11 @@
             <a:r>
               <a:rPr lang="en-US" sz="1100" dirty="0">
                 <a:solidFill>
-                  <a:srgbClr val="CCCCCC"/>
+                  <a:srgbClr val="2B2F36"/>
                 </a:solidFill>
                 <a:latin typeface="Arial" pitchFamily="34" charset="0"/>
-                <a:ea typeface="Arial" pitchFamily="34" charset="-122"/>
-                <a:cs typeface="Arial" pitchFamily="34" charset="-120"/>
+                <a:ea typeface="BIZ UDPGothic" pitchFamily="34" charset="-122"/>
+                <a:cs typeface="BIZ UDPGothic" pitchFamily="34" charset="-120"/>
               </a:rPr>
               <a:t>NHKオンデマンドの商業的コンテンツ</a:t>
             </a:r>
@@ -9948,11 +9948,11 @@
             <a:r>
               <a:rPr lang="en-US" sz="1100" dirty="0">
                 <a:solidFill>
-                  <a:srgbClr val="CCCCCC"/>
+                  <a:srgbClr val="2B2F36"/>
                 </a:solidFill>
                 <a:latin typeface="Arial" pitchFamily="34" charset="0"/>
-                <a:ea typeface="Arial" pitchFamily="34" charset="-122"/>
-                <a:cs typeface="Arial" pitchFamily="34" charset="-120"/>
+                <a:ea typeface="BIZ UDPGothic" pitchFamily="34" charset="-122"/>
+                <a:cs typeface="BIZ UDPGothic" pitchFamily="34" charset="-120"/>
               </a:rPr>
               <a:t>過剰な国際展開（NHKワールド一部）</a:t>
             </a:r>
@@ -9977,11 +9977,11 @@
             </a:avLst>
           </a:prstGeom>
           <a:solidFill>
-            <a:srgbClr val="081808"/>
+            <a:srgbClr val="E9EFF8"/>
           </a:solidFill>
           <a:ln w="12700">
             <a:solidFill>
-              <a:srgbClr val="2E2E2E"/>
+              <a:srgbClr val="DDE0E6"/>
             </a:solidFill>
             <a:prstDash val="solid"/>
           </a:ln>
@@ -10021,11 +10021,11 @@
             <a:r>
               <a:rPr lang="en-US" sz="1400" b="1" dirty="0">
                 <a:solidFill>
-                  <a:srgbClr val="4CAF50"/>
-                </a:solidFill>
-                <a:latin typeface="Cambria" pitchFamily="34" charset="0"/>
-                <a:ea typeface="Cambria" pitchFamily="34" charset="-122"/>
-                <a:cs typeface="Cambria" pitchFamily="34" charset="-120"/>
+                  <a:srgbClr val="1D4F91"/>
+                </a:solidFill>
+                <a:latin typeface="BIZ UDPGothic" pitchFamily="34" charset="0"/>
+                <a:ea typeface="BIZ UDPGothic" pitchFamily="34" charset="-122"/>
+                <a:cs typeface="BIZ UDPGothic" pitchFamily="34" charset="-120"/>
               </a:rPr>
               <a:t>公共インフラとして存続</a:t>
             </a:r>
@@ -10064,11 +10064,11 @@
             <a:r>
               <a:rPr lang="en-US" sz="1100" dirty="0">
                 <a:solidFill>
-                  <a:srgbClr val="CCCCCC"/>
+                  <a:srgbClr val="2B2F36"/>
                 </a:solidFill>
                 <a:latin typeface="Arial" pitchFamily="34" charset="0"/>
-                <a:ea typeface="Arial" pitchFamily="34" charset="-122"/>
-                <a:cs typeface="Arial" pitchFamily="34" charset="-120"/>
+                <a:ea typeface="BIZ UDPGothic" pitchFamily="34" charset="-122"/>
+                <a:cs typeface="BIZ UDPGothic" pitchFamily="34" charset="-120"/>
               </a:rPr>
               <a:t>国内・国際ニュース報道</a:t>
             </a:r>
@@ -10085,11 +10085,11 @@
             <a:r>
               <a:rPr lang="en-US" sz="1100" dirty="0">
                 <a:solidFill>
-                  <a:srgbClr val="CCCCCC"/>
+                  <a:srgbClr val="2B2F36"/>
                 </a:solidFill>
                 <a:latin typeface="Arial" pitchFamily="34" charset="0"/>
-                <a:ea typeface="Arial" pitchFamily="34" charset="-122"/>
-                <a:cs typeface="Arial" pitchFamily="34" charset="-120"/>
+                <a:ea typeface="BIZ UDPGothic" pitchFamily="34" charset="-122"/>
+                <a:cs typeface="BIZ UDPGothic" pitchFamily="34" charset="-120"/>
               </a:rPr>
               <a:t>災害報道・緊急警報システム</a:t>
             </a:r>
@@ -10106,11 +10106,11 @@
             <a:r>
               <a:rPr lang="en-US" sz="1100" dirty="0">
                 <a:solidFill>
-                  <a:srgbClr val="CCCCCC"/>
+                  <a:srgbClr val="2B2F36"/>
                 </a:solidFill>
                 <a:latin typeface="Arial" pitchFamily="34" charset="0"/>
-                <a:ea typeface="Arial" pitchFamily="34" charset="-122"/>
-                <a:cs typeface="Arial" pitchFamily="34" charset="-120"/>
+                <a:ea typeface="BIZ UDPGothic" pitchFamily="34" charset="-122"/>
+                <a:cs typeface="BIZ UDPGothic" pitchFamily="34" charset="-120"/>
               </a:rPr>
               <a:t>選挙特番・国会中継</a:t>
             </a:r>
@@ -10127,11 +10127,11 @@
             <a:r>
               <a:rPr lang="en-US" sz="1100" dirty="0">
                 <a:solidFill>
-                  <a:srgbClr val="CCCCCC"/>
+                  <a:srgbClr val="2B2F36"/>
                 </a:solidFill>
                 <a:latin typeface="Arial" pitchFamily="34" charset="0"/>
-                <a:ea typeface="Arial" pitchFamily="34" charset="-122"/>
-                <a:cs typeface="Arial" pitchFamily="34" charset="-120"/>
+                <a:ea typeface="BIZ UDPGothic" pitchFamily="34" charset="-122"/>
+                <a:cs typeface="BIZ UDPGothic" pitchFamily="34" charset="-120"/>
               </a:rPr>
               <a:t>教育番組（Eテレ核心部分）</a:t>
             </a:r>
@@ -10148,11 +10148,11 @@
             <a:r>
               <a:rPr lang="en-US" sz="1100" dirty="0">
                 <a:solidFill>
-                  <a:srgbClr val="CCCCCC"/>
+                  <a:srgbClr val="2B2F36"/>
                 </a:solidFill>
                 <a:latin typeface="Arial" pitchFamily="34" charset="0"/>
-                <a:ea typeface="Arial" pitchFamily="34" charset="-122"/>
-                <a:cs typeface="Arial" pitchFamily="34" charset="-120"/>
+                <a:ea typeface="BIZ UDPGothic" pitchFamily="34" charset="-122"/>
+                <a:cs typeface="BIZ UDPGothic" pitchFamily="34" charset="-120"/>
               </a:rPr>
               <a:t>気象情報の公共放送</a:t>
             </a:r>
@@ -10174,7 +10174,7 @@
     <p:bg>
       <p:bgPr>
         <a:solidFill>
-          <a:srgbClr val="0A0A0A"/>
+          <a:srgbClr val="F5F6F8"/>
         </a:solidFill>
       </p:bgPr>
     </p:bg>
@@ -10219,11 +10219,11 @@
             <a:r>
               <a:rPr lang="en-US" sz="900" b="1" spc="400" kern="0" dirty="0">
                 <a:solidFill>
-                  <a:srgbClr val="D62828"/>
+                  <a:srgbClr val="C8161D"/>
                 </a:solidFill>
                 <a:latin typeface="Arial" pitchFamily="34" charset="0"/>
-                <a:ea typeface="Arial" pitchFamily="34" charset="-122"/>
-                <a:cs typeface="Arial" pitchFamily="34" charset="-120"/>
+                <a:ea typeface="BIZ UDPGothic" pitchFamily="34" charset="-122"/>
+                <a:cs typeface="BIZ UDPGothic" pitchFamily="34" charset="-120"/>
               </a:rPr>
               <a:t>PILLAR 01 — DETAIL</a:t>
             </a:r>
@@ -10258,11 +10258,11 @@
             <a:r>
               <a:rPr lang="en-US" sz="3600" b="1" dirty="0">
                 <a:solidFill>
-                  <a:srgbClr val="F5F5F0"/>
-                </a:solidFill>
-                <a:latin typeface="Cambria" pitchFamily="34" charset="0"/>
-                <a:ea typeface="Cambria" pitchFamily="34" charset="-122"/>
-                <a:cs typeface="Cambria" pitchFamily="34" charset="-120"/>
+                  <a:srgbClr val="16181D"/>
+                </a:solidFill>
+                <a:latin typeface="BIZ UDPGothic" pitchFamily="34" charset="0"/>
+                <a:ea typeface="BIZ UDPGothic" pitchFamily="34" charset="-122"/>
+                <a:cs typeface="BIZ UDPGothic" pitchFamily="34" charset="-120"/>
               </a:rPr>
               <a:t>文化的価値として維持する2コンテンツ</a:t>
             </a:r>
@@ -10285,11 +10285,11 @@
             <a:avLst/>
           </a:prstGeom>
           <a:solidFill>
-            <a:srgbClr val="2E2E2E"/>
+            <a:srgbClr val="DDE0E6"/>
           </a:solidFill>
           <a:ln w="12700">
             <a:solidFill>
-              <a:srgbClr val="2E2E2E"/>
+              <a:srgbClr val="DDE0E6"/>
             </a:solidFill>
             <a:prstDash val="solid"/>
           </a:ln>
@@ -10322,11 +10322,11 @@
             <a:r>
               <a:rPr lang="en-US" sz="1100" dirty="0">
                 <a:solidFill>
-                  <a:srgbClr val="CCCCCC"/>
+                  <a:srgbClr val="2B2F36"/>
                 </a:solidFill>
                 <a:latin typeface="Arial" pitchFamily="34" charset="0"/>
-                <a:ea typeface="Arial" pitchFamily="34" charset="-122"/>
-                <a:cs typeface="Arial" pitchFamily="34" charset="-120"/>
+                <a:ea typeface="BIZ UDPGothic" pitchFamily="34" charset="-122"/>
+                <a:cs typeface="BIZ UDPGothic" pitchFamily="34" charset="-120"/>
               </a:rPr>
               <a:t>エンタメを廃止する中で、この2つだけは公共性の根拠をもって残す。ただし、条件付きで。</a:t>
             </a:r>
@@ -10351,11 +10351,11 @@
             </a:avLst>
           </a:prstGeom>
           <a:solidFill>
-            <a:srgbClr val="1A1A1A"/>
+            <a:srgbClr val="FFFFFF"/>
           </a:solidFill>
           <a:ln w="12700">
             <a:solidFill>
-              <a:srgbClr val="2E2E2E"/>
+              <a:srgbClr val="DDE0E6"/>
             </a:solidFill>
             <a:prstDash val="solid"/>
           </a:ln>
@@ -10385,11 +10385,11 @@
             </a:avLst>
           </a:prstGeom>
           <a:solidFill>
-            <a:srgbClr val="D62828"/>
+            <a:srgbClr val="C8161D"/>
           </a:solidFill>
           <a:ln w="12700">
             <a:solidFill>
-              <a:srgbClr val="D62828"/>
+              <a:srgbClr val="C8161D"/>
             </a:solidFill>
             <a:prstDash val="solid"/>
           </a:ln>
@@ -10422,11 +10422,11 @@
             <a:r>
               <a:rPr lang="en-US" sz="1200" b="1" dirty="0">
                 <a:solidFill>
-                  <a:srgbClr val="F5F5F0"/>
-                </a:solidFill>
-                <a:latin typeface="Cambria" pitchFamily="34" charset="0"/>
-                <a:ea typeface="Cambria" pitchFamily="34" charset="-122"/>
-                <a:cs typeface="Cambria" pitchFamily="34" charset="-120"/>
+                  <a:srgbClr val="FFFFFF"/>
+                </a:solidFill>
+                <a:latin typeface="BIZ UDPGothic" pitchFamily="34" charset="0"/>
+                <a:ea typeface="BIZ UDPGothic" pitchFamily="34" charset="-122"/>
+                <a:cs typeface="BIZ UDPGothic" pitchFamily="34" charset="-120"/>
               </a:rPr>
               <a:t>紅白歌合戦</a:t>
             </a:r>
@@ -10461,11 +10461,11 @@
             <a:r>
               <a:rPr lang="en-US" sz="1100" b="1" dirty="0">
                 <a:solidFill>
-                  <a:srgbClr val="F5F5F0"/>
-                </a:solidFill>
-                <a:latin typeface="Cambria" pitchFamily="34" charset="0"/>
-                <a:ea typeface="Cambria" pitchFamily="34" charset="-122"/>
-                <a:cs typeface="Cambria" pitchFamily="34" charset="-120"/>
+                  <a:srgbClr val="16181D"/>
+                </a:solidFill>
+                <a:latin typeface="BIZ UDPGothic" pitchFamily="34" charset="0"/>
+                <a:ea typeface="BIZ UDPGothic" pitchFamily="34" charset="-122"/>
+                <a:cs typeface="BIZ UDPGothic" pitchFamily="34" charset="-120"/>
               </a:rPr>
               <a:t>維持の根拠：日本の音楽文化・歴史の継承</a:t>
             </a:r>
@@ -10500,11 +10500,11 @@
             <a:r>
               <a:rPr lang="en-US" sz="1000" dirty="0">
                 <a:solidFill>
-                  <a:srgbClr val="CCCCCC"/>
+                  <a:srgbClr val="2B2F36"/>
                 </a:solidFill>
                 <a:latin typeface="Arial" pitchFamily="34" charset="0"/>
-                <a:ea typeface="Arial" pitchFamily="34" charset="-122"/>
-                <a:cs typeface="Arial" pitchFamily="34" charset="-120"/>
+                <a:ea typeface="BIZ UDPGothic" pitchFamily="34" charset="-122"/>
+                <a:cs typeface="BIZ UDPGothic" pitchFamily="34" charset="-120"/>
               </a:rPr>
               <a:t>条件：「純国産」構成に原点回帰。視聴率・海外タレント依存の演出を廃止し、制作費を大幅削減。日本の音楽業界の健全な発展と歴史継承のための場として再定義。</a:t>
             </a:r>
@@ -10529,11 +10529,11 @@
             </a:avLst>
           </a:prstGeom>
           <a:solidFill>
-            <a:srgbClr val="1A1A1A"/>
+            <a:srgbClr val="FFFFFF"/>
           </a:solidFill>
           <a:ln w="12700">
             <a:solidFill>
-              <a:srgbClr val="2E2E2E"/>
+              <a:srgbClr val="DDE0E6"/>
             </a:solidFill>
             <a:prstDash val="solid"/>
           </a:ln>
@@ -10563,11 +10563,11 @@
             </a:avLst>
           </a:prstGeom>
           <a:solidFill>
-            <a:srgbClr val="D62828"/>
+            <a:srgbClr val="C8161D"/>
           </a:solidFill>
           <a:ln w="12700">
             <a:solidFill>
-              <a:srgbClr val="D62828"/>
+              <a:srgbClr val="C8161D"/>
             </a:solidFill>
             <a:prstDash val="solid"/>
           </a:ln>
@@ -10600,11 +10600,11 @@
             <a:r>
               <a:rPr lang="en-US" sz="1200" b="1" dirty="0">
                 <a:solidFill>
-                  <a:srgbClr val="F5F5F0"/>
-                </a:solidFill>
-                <a:latin typeface="Cambria" pitchFamily="34" charset="0"/>
-                <a:ea typeface="Cambria" pitchFamily="34" charset="-122"/>
-                <a:cs typeface="Cambria" pitchFamily="34" charset="-120"/>
+                  <a:srgbClr val="FFFFFF"/>
+                </a:solidFill>
+                <a:latin typeface="BIZ UDPGothic" pitchFamily="34" charset="0"/>
+                <a:ea typeface="BIZ UDPGothic" pitchFamily="34" charset="-122"/>
+                <a:cs typeface="BIZ UDPGothic" pitchFamily="34" charset="-120"/>
               </a:rPr>
               <a:t>大河ドラマ</a:t>
             </a:r>
@@ -10639,11 +10639,11 @@
             <a:r>
               <a:rPr lang="en-US" sz="1100" b="1" dirty="0">
                 <a:solidFill>
-                  <a:srgbClr val="F5F5F0"/>
-                </a:solidFill>
-                <a:latin typeface="Cambria" pitchFamily="34" charset="0"/>
-                <a:ea typeface="Cambria" pitchFamily="34" charset="-122"/>
-                <a:cs typeface="Cambria" pitchFamily="34" charset="-120"/>
+                  <a:srgbClr val="16181D"/>
+                </a:solidFill>
+                <a:latin typeface="BIZ UDPGothic" pitchFamily="34" charset="0"/>
+                <a:ea typeface="BIZ UDPGothic" pitchFamily="34" charset="-122"/>
+                <a:cs typeface="BIZ UDPGothic" pitchFamily="34" charset="-120"/>
               </a:rPr>
               <a:t>維持の根拠：歴史教育・文化的アーカイブとしての公共性</a:t>
             </a:r>
@@ -10678,11 +10678,11 @@
             <a:r>
               <a:rPr lang="en-US" sz="1000" dirty="0">
                 <a:solidFill>
-                  <a:srgbClr val="CCCCCC"/>
+                  <a:srgbClr val="2B2F36"/>
                 </a:solidFill>
                 <a:latin typeface="Arial" pitchFamily="34" charset="0"/>
-                <a:ea typeface="Arial" pitchFamily="34" charset="-122"/>
-                <a:cs typeface="Arial" pitchFamily="34" charset="-120"/>
+                <a:ea typeface="BIZ UDPGothic" pitchFamily="34" charset="-122"/>
+                <a:cs typeface="BIZ UDPGothic" pitchFamily="34" charset="-120"/>
               </a:rPr>
               <a:t>条件：教育的観点を軸に制作規模を適正化。商業的な視聴率競争や豪華キャスト優先の方針を廃し、歴史の正確な描写と教育価値を主軸に制作。</a:t>
             </a:r>
@@ -10704,7 +10704,7 @@
     <p:bg>
       <p:bgPr>
         <a:solidFill>
-          <a:srgbClr val="0A0A0A"/>
+          <a:srgbClr val="F5F6F8"/>
         </a:solidFill>
       </p:bgPr>
     </p:bg>
@@ -10749,11 +10749,11 @@
             <a:r>
               <a:rPr lang="en-US" sz="900" b="1" spc="400" kern="0" dirty="0">
                 <a:solidFill>
-                  <a:srgbClr val="D62828"/>
+                  <a:srgbClr val="C8161D"/>
                 </a:solidFill>
                 <a:latin typeface="Arial" pitchFamily="34" charset="0"/>
-                <a:ea typeface="Arial" pitchFamily="34" charset="-122"/>
-                <a:cs typeface="Arial" pitchFamily="34" charset="-120"/>
+                <a:ea typeface="BIZ UDPGothic" pitchFamily="34" charset="-122"/>
+                <a:cs typeface="BIZ UDPGothic" pitchFamily="34" charset="-120"/>
               </a:rPr>
               <a:t>PILLAR 02</a:t>
             </a:r>
@@ -10788,11 +10788,11 @@
             <a:r>
               <a:rPr lang="en-US" sz="2800" b="1" dirty="0">
                 <a:solidFill>
-                  <a:srgbClr val="F5F5F0"/>
-                </a:solidFill>
-                <a:latin typeface="Cambria" pitchFamily="34" charset="0"/>
-                <a:ea typeface="Cambria" pitchFamily="34" charset="-122"/>
-                <a:cs typeface="Cambria" pitchFamily="34" charset="-120"/>
+                  <a:srgbClr val="16181D"/>
+                </a:solidFill>
+                <a:latin typeface="BIZ UDPGothic" pitchFamily="34" charset="0"/>
+                <a:ea typeface="BIZ UDPGothic" pitchFamily="34" charset="-122"/>
+                <a:cs typeface="BIZ UDPGothic" pitchFamily="34" charset="-120"/>
               </a:rPr>
               <a:t>人件費を「テレビ業界の中央値」へ連動・適正化</a:t>
             </a:r>
@@ -10815,11 +10815,11 @@
             <a:avLst/>
           </a:prstGeom>
           <a:solidFill>
-            <a:srgbClr val="2E2E2E"/>
+            <a:srgbClr val="DDE0E6"/>
           </a:solidFill>
           <a:ln w="12700">
             <a:solidFill>
-              <a:srgbClr val="2E2E2E"/>
+              <a:srgbClr val="DDE0E6"/>
             </a:solidFill>
             <a:prstDash val="solid"/>
           </a:ln>
@@ -10842,11 +10842,11 @@
             </a:avLst>
           </a:prstGeom>
           <a:solidFill>
-            <a:srgbClr val="1A1A1A"/>
+            <a:srgbClr val="FFFFFF"/>
           </a:solidFill>
           <a:ln w="12700">
             <a:solidFill>
-              <a:srgbClr val="2E2E2E"/>
+              <a:srgbClr val="DDE0E6"/>
             </a:solidFill>
             <a:prstDash val="solid"/>
           </a:ln>
@@ -10886,11 +10886,11 @@
             <a:r>
               <a:rPr lang="en-US" sz="1100" dirty="0">
                 <a:solidFill>
-                  <a:srgbClr val="888888"/>
+                  <a:srgbClr val="626875"/>
                 </a:solidFill>
                 <a:latin typeface="Arial" pitchFamily="34" charset="0"/>
-                <a:ea typeface="Arial" pitchFamily="34" charset="-122"/>
-                <a:cs typeface="Arial" pitchFamily="34" charset="-120"/>
+                <a:ea typeface="BIZ UDPGothic" pitchFamily="34" charset="-122"/>
+                <a:cs typeface="BIZ UDPGothic" pitchFamily="34" charset="-120"/>
               </a:rPr>
               <a:t>現行</a:t>
             </a:r>
@@ -10925,11 +10925,11 @@
             <a:r>
               <a:rPr lang="en-US" sz="2600" b="1" dirty="0">
                 <a:solidFill>
-                  <a:srgbClr val="D62828"/>
-                </a:solidFill>
-                <a:latin typeface="Cambria" pitchFamily="34" charset="0"/>
-                <a:ea typeface="Cambria" pitchFamily="34" charset="-122"/>
-                <a:cs typeface="Cambria" pitchFamily="34" charset="-120"/>
+                  <a:srgbClr val="C8161D"/>
+                </a:solidFill>
+                <a:latin typeface="BIZ UDPGothic" pitchFamily="34" charset="0"/>
+                <a:ea typeface="BIZ UDPGothic" pitchFamily="34" charset="-122"/>
+                <a:cs typeface="BIZ UDPGothic" pitchFamily="34" charset="-120"/>
               </a:rPr>
               <a:t>平均 1,100万円</a:t>
             </a:r>
@@ -10964,11 +10964,11 @@
             <a:r>
               <a:rPr lang="en-US" sz="1000" dirty="0">
                 <a:solidFill>
-                  <a:srgbClr val="CCCCCC"/>
+                  <a:srgbClr val="2B2F36"/>
                 </a:solidFill>
                 <a:latin typeface="Arial" pitchFamily="34" charset="0"/>
-                <a:ea typeface="Arial" pitchFamily="34" charset="-122"/>
-                <a:cs typeface="Arial" pitchFamily="34" charset="-120"/>
+                <a:ea typeface="BIZ UDPGothic" pitchFamily="34" charset="-122"/>
+                <a:cs typeface="BIZ UDPGothic" pitchFamily="34" charset="-120"/>
               </a:rPr>
               <a:t>民放大手平均の1.3〜1.5倍</a:t>
             </a:r>
@@ -11003,11 +11003,11 @@
             <a:r>
               <a:rPr lang="en-US" sz="1000" dirty="0">
                 <a:solidFill>
-                  <a:srgbClr val="CCCCCC"/>
+                  <a:srgbClr val="2B2F36"/>
                 </a:solidFill>
                 <a:latin typeface="Arial" pitchFamily="34" charset="0"/>
-                <a:ea typeface="Arial" pitchFamily="34" charset="-122"/>
-                <a:cs typeface="Arial" pitchFamily="34" charset="-120"/>
+                <a:ea typeface="BIZ UDPGothic" pitchFamily="34" charset="-122"/>
+                <a:cs typeface="BIZ UDPGothic" pitchFamily="34" charset="-120"/>
               </a:rPr>
               <a:t>年功序列で自動到達</a:t>
             </a:r>
@@ -11030,11 +11030,11 @@
             <a:avLst/>
           </a:prstGeom>
           <a:solidFill>
-            <a:srgbClr val="D62828"/>
+            <a:srgbClr val="C8161D"/>
           </a:solidFill>
           <a:ln w="12700">
             <a:solidFill>
-              <a:srgbClr val="D62828"/>
+              <a:srgbClr val="C8161D"/>
             </a:solidFill>
             <a:prstDash val="solid"/>
           </a:ln>
@@ -11067,11 +11067,11 @@
             <a:r>
               <a:rPr lang="en-US" sz="3200" dirty="0">
                 <a:solidFill>
-                  <a:srgbClr val="D62828"/>
+                  <a:srgbClr val="C8161D"/>
                 </a:solidFill>
                 <a:latin typeface="Arial" pitchFamily="34" charset="0"/>
-                <a:ea typeface="Arial" pitchFamily="34" charset="-122"/>
-                <a:cs typeface="Arial" pitchFamily="34" charset="-120"/>
+                <a:ea typeface="BIZ UDPGothic" pitchFamily="34" charset="-122"/>
+                <a:cs typeface="BIZ UDPGothic" pitchFamily="34" charset="-120"/>
               </a:rPr>
               <a:t>→</a:t>
             </a:r>
@@ -11096,11 +11096,11 @@
             </a:avLst>
           </a:prstGeom>
           <a:solidFill>
-            <a:srgbClr val="081808"/>
+            <a:srgbClr val="E9EFF8"/>
           </a:solidFill>
           <a:ln w="12700">
             <a:solidFill>
-              <a:srgbClr val="2E2E2E"/>
+              <a:srgbClr val="DDE0E6"/>
             </a:solidFill>
             <a:prstDash val="solid"/>
           </a:ln>
@@ -11140,11 +11140,11 @@
             <a:r>
               <a:rPr lang="en-US" sz="1100" dirty="0">
                 <a:solidFill>
-                  <a:srgbClr val="888888"/>
+                  <a:srgbClr val="626875"/>
                 </a:solidFill>
                 <a:latin typeface="Arial" pitchFamily="34" charset="0"/>
-                <a:ea typeface="Arial" pitchFamily="34" charset="-122"/>
-                <a:cs typeface="Arial" pitchFamily="34" charset="-120"/>
+                <a:ea typeface="BIZ UDPGothic" pitchFamily="34" charset="-122"/>
+                <a:cs typeface="BIZ UDPGothic" pitchFamily="34" charset="-120"/>
               </a:rPr>
               <a:t>目標</a:t>
             </a:r>
@@ -11179,11 +11179,11 @@
             <a:r>
               <a:rPr lang="en-US" sz="2200" b="1" dirty="0">
                 <a:solidFill>
-                  <a:srgbClr val="4CAF50"/>
-                </a:solidFill>
-                <a:latin typeface="Cambria" pitchFamily="34" charset="0"/>
-                <a:ea typeface="Cambria" pitchFamily="34" charset="-122"/>
-                <a:cs typeface="Cambria" pitchFamily="34" charset="-120"/>
+                  <a:srgbClr val="1D4F91"/>
+                </a:solidFill>
+                <a:latin typeface="BIZ UDPGothic" pitchFamily="34" charset="0"/>
+                <a:ea typeface="BIZ UDPGothic" pitchFamily="34" charset="-122"/>
+                <a:cs typeface="BIZ UDPGothic" pitchFamily="34" charset="-120"/>
               </a:rPr>
               <a:t>平均 700〜750万円</a:t>
             </a:r>
@@ -11218,11 +11218,11 @@
             <a:r>
               <a:rPr lang="en-US" sz="1000" dirty="0">
                 <a:solidFill>
-                  <a:srgbClr val="CCCCCC"/>
+                  <a:srgbClr val="2B2F36"/>
                 </a:solidFill>
                 <a:latin typeface="Arial" pitchFamily="34" charset="0"/>
-                <a:ea typeface="Arial" pitchFamily="34" charset="-122"/>
-                <a:cs typeface="Arial" pitchFamily="34" charset="-120"/>
+                <a:ea typeface="BIZ UDPGothic" pitchFamily="34" charset="-122"/>
+                <a:cs typeface="BIZ UDPGothic" pitchFamily="34" charset="-120"/>
               </a:rPr>
               <a:t>全国テレビ業界・全職種中央値</a:t>
             </a:r>
@@ -11257,11 +11257,11 @@
             <a:r>
               <a:rPr lang="en-US" sz="1000" dirty="0">
                 <a:solidFill>
-                  <a:srgbClr val="CCCCCC"/>
+                  <a:srgbClr val="2B2F36"/>
                 </a:solidFill>
                 <a:latin typeface="Arial" pitchFamily="34" charset="0"/>
-                <a:ea typeface="Arial" pitchFamily="34" charset="-122"/>
-                <a:cs typeface="Arial" pitchFamily="34" charset="-120"/>
+                <a:ea typeface="BIZ UDPGothic" pitchFamily="34" charset="-122"/>
+                <a:cs typeface="BIZ UDPGothic" pitchFamily="34" charset="-120"/>
               </a:rPr>
               <a:t>放送法または省令で義務化</a:t>
             </a:r>
@@ -11274,11 +11274,11 @@
             <a:r>
               <a:rPr lang="en-US" sz="1000" dirty="0">
                 <a:solidFill>
-                  <a:srgbClr val="CCCCCC"/>
+                  <a:srgbClr val="2B2F36"/>
                 </a:solidFill>
                 <a:latin typeface="Arial" pitchFamily="34" charset="0"/>
-                <a:ea typeface="Arial" pitchFamily="34" charset="-122"/>
-                <a:cs typeface="Arial" pitchFamily="34" charset="-120"/>
+                <a:ea typeface="BIZ UDPGothic" pitchFamily="34" charset="-122"/>
+                <a:cs typeface="BIZ UDPGothic" pitchFamily="34" charset="-120"/>
               </a:rPr>
               <a:t>厚労省統計に自動連動</a:t>
             </a:r>
@@ -11303,11 +11303,11 @@
             </a:avLst>
           </a:prstGeom>
           <a:solidFill>
-            <a:srgbClr val="1A1A1A"/>
+            <a:srgbClr val="FFFFFF"/>
           </a:solidFill>
           <a:ln w="12700">
             <a:solidFill>
-              <a:srgbClr val="2E2E2E"/>
+              <a:srgbClr val="DDE0E6"/>
             </a:solidFill>
             <a:prstDash val="solid"/>
           </a:ln>
@@ -11347,11 +11347,11 @@
             <a:r>
               <a:rPr lang="en-US" sz="1000" dirty="0">
                 <a:solidFill>
-                  <a:srgbClr val="CCCCCC"/>
+                  <a:srgbClr val="2B2F36"/>
                 </a:solidFill>
                 <a:latin typeface="Arial" pitchFamily="34" charset="0"/>
-                <a:ea typeface="Arial" pitchFamily="34" charset="-122"/>
-                <a:cs typeface="Arial" pitchFamily="34" charset="-120"/>
+                <a:ea typeface="BIZ UDPGothic" pitchFamily="34" charset="-122"/>
+                <a:cs typeface="BIZ UDPGothic" pitchFamily="34" charset="-120"/>
               </a:rPr>
               <a:t>削減効果：約350〜450億円／年　　※地方の小規模局（山口・青森・岩手等）を含む業界全体の実態に連動させることで、「公共放送だから高くていい」という論理を構造的に封じる</a:t>
             </a:r>
@@ -11373,7 +11373,7 @@
     <p:bg>
       <p:bgPr>
         <a:solidFill>
-          <a:srgbClr val="0A0A0A"/>
+          <a:srgbClr val="F5F6F8"/>
         </a:solidFill>
       </p:bgPr>
     </p:bg>
@@ -11418,11 +11418,11 @@
             <a:r>
               <a:rPr lang="en-US" sz="900" b="1" spc="400" kern="0" dirty="0">
                 <a:solidFill>
-                  <a:srgbClr val="D62828"/>
+                  <a:srgbClr val="C8161D"/>
                 </a:solidFill>
                 <a:latin typeface="Arial" pitchFamily="34" charset="0"/>
-                <a:ea typeface="Arial" pitchFamily="34" charset="-122"/>
-                <a:cs typeface="Arial" pitchFamily="34" charset="-120"/>
+                <a:ea typeface="BIZ UDPGothic" pitchFamily="34" charset="-122"/>
+                <a:cs typeface="BIZ UDPGothic" pitchFamily="34" charset="-120"/>
               </a:rPr>
               <a:t>PILLAR 03</a:t>
             </a:r>
@@ -11457,11 +11457,11 @@
             <a:r>
               <a:rPr lang="en-US" sz="2600" b="1" dirty="0">
                 <a:solidFill>
-                  <a:srgbClr val="F5F5F0"/>
-                </a:solidFill>
-                <a:latin typeface="Cambria" pitchFamily="34" charset="0"/>
-                <a:ea typeface="Cambria" pitchFamily="34" charset="-122"/>
-                <a:cs typeface="Cambria" pitchFamily="34" charset="-120"/>
+                  <a:srgbClr val="16181D"/>
+                </a:solidFill>
+                <a:latin typeface="BIZ UDPGothic" pitchFamily="34" charset="0"/>
+                <a:ea typeface="BIZ UDPGothic" pitchFamily="34" charset="-122"/>
+                <a:cs typeface="BIZ UDPGothic" pitchFamily="34" charset="-120"/>
               </a:rPr>
               <a:t>技研（放送技術研究所）の廃止と国立大学への移管</a:t>
             </a:r>
@@ -11484,11 +11484,11 @@
             <a:avLst/>
           </a:prstGeom>
           <a:solidFill>
-            <a:srgbClr val="2E2E2E"/>
+            <a:srgbClr val="DDE0E6"/>
           </a:solidFill>
           <a:ln w="12700">
             <a:solidFill>
-              <a:srgbClr val="2E2E2E"/>
+              <a:srgbClr val="DDE0E6"/>
             </a:solidFill>
             <a:prstDash val="solid"/>
           </a:ln>
@@ -11521,11 +11521,11 @@
             <a:r>
               <a:rPr lang="en-US" sz="1100" dirty="0">
                 <a:solidFill>
-                  <a:srgbClr val="CCCCCC"/>
+                  <a:srgbClr val="2B2F36"/>
                 </a:solidFill>
                 <a:latin typeface="Arial" pitchFamily="34" charset="0"/>
-                <a:ea typeface="Arial" pitchFamily="34" charset="-122"/>
-                <a:cs typeface="Arial" pitchFamily="34" charset="-120"/>
+                <a:ea typeface="BIZ UDPGothic" pitchFamily="34" charset="-122"/>
+                <a:cs typeface="BIZ UDPGothic" pitchFamily="34" charset="-120"/>
               </a:rPr>
               <a:t>年間250〜280億円の受信料を投じながら、研究成果をNHK内部に囲い込む。</a:t>
             </a:r>
@@ -11538,11 +11538,11 @@
             <a:r>
               <a:rPr lang="en-US" sz="1100" dirty="0">
                 <a:solidFill>
-                  <a:srgbClr val="CCCCCC"/>
+                  <a:srgbClr val="2B2F36"/>
                 </a:solidFill>
                 <a:latin typeface="Arial" pitchFamily="34" charset="0"/>
-                <a:ea typeface="Arial" pitchFamily="34" charset="-122"/>
-                <a:cs typeface="Arial" pitchFamily="34" charset="-120"/>
+                <a:ea typeface="BIZ UDPGothic" pitchFamily="34" charset="-122"/>
+                <a:cs typeface="BIZ UDPGothic" pitchFamily="34" charset="-120"/>
               </a:rPr>
               <a:t>国民全員が負担する受信料で生まれた技術が、民間に非公開である。この構造は根本的に正当化できない。</a:t>
             </a:r>
@@ -11567,11 +11567,11 @@
             </a:avLst>
           </a:prstGeom>
           <a:solidFill>
-            <a:srgbClr val="1A0808"/>
+            <a:srgbClr val="FCEBEB"/>
           </a:solidFill>
           <a:ln w="12700">
             <a:solidFill>
-              <a:srgbClr val="2E2E2E"/>
+              <a:srgbClr val="DDE0E6"/>
             </a:solidFill>
             <a:prstDash val="solid"/>
           </a:ln>
@@ -11611,11 +11611,11 @@
             <a:r>
               <a:rPr lang="en-US" sz="1600" b="1" dirty="0">
                 <a:solidFill>
-                  <a:srgbClr val="D62828"/>
-                </a:solidFill>
-                <a:latin typeface="Cambria" pitchFamily="34" charset="0"/>
-                <a:ea typeface="Cambria" pitchFamily="34" charset="-122"/>
-                <a:cs typeface="Cambria" pitchFamily="34" charset="-120"/>
+                  <a:srgbClr val="C8161D"/>
+                </a:solidFill>
+                <a:latin typeface="BIZ UDPGothic" pitchFamily="34" charset="0"/>
+                <a:ea typeface="BIZ UDPGothic" pitchFamily="34" charset="-122"/>
+                <a:cs typeface="BIZ UDPGothic" pitchFamily="34" charset="-120"/>
               </a:rPr>
               <a:t>NHK技研</a:t>
             </a:r>
@@ -11628,11 +11628,11 @@
             <a:r>
               <a:rPr lang="en-US" sz="1600" b="1" dirty="0">
                 <a:solidFill>
-                  <a:srgbClr val="D62828"/>
-                </a:solidFill>
-                <a:latin typeface="Cambria" pitchFamily="34" charset="0"/>
-                <a:ea typeface="Cambria" pitchFamily="34" charset="-122"/>
-                <a:cs typeface="Cambria" pitchFamily="34" charset="-120"/>
+                  <a:srgbClr val="C8161D"/>
+                </a:solidFill>
+                <a:latin typeface="BIZ UDPGothic" pitchFamily="34" charset="0"/>
+                <a:ea typeface="BIZ UDPGothic" pitchFamily="34" charset="-122"/>
+                <a:cs typeface="BIZ UDPGothic" pitchFamily="34" charset="-120"/>
               </a:rPr>
               <a:t>（現行）</a:t>
             </a:r>
@@ -11655,11 +11655,11 @@
             <a:avLst/>
           </a:prstGeom>
           <a:solidFill>
-            <a:srgbClr val="2E2E2E"/>
+            <a:srgbClr val="DDE0E6"/>
           </a:solidFill>
           <a:ln w="12700">
             <a:solidFill>
-              <a:srgbClr val="2E2E2E"/>
+              <a:srgbClr val="DDE0E6"/>
             </a:solidFill>
             <a:prstDash val="solid"/>
           </a:ln>
@@ -11692,11 +11692,11 @@
             <a:r>
               <a:rPr lang="en-US" sz="1000" dirty="0">
                 <a:solidFill>
-                  <a:srgbClr val="CCCCCC"/>
+                  <a:srgbClr val="2B2F36"/>
                 </a:solidFill>
                 <a:latin typeface="Arial" pitchFamily="34" charset="0"/>
-                <a:ea typeface="Arial" pitchFamily="34" charset="-122"/>
-                <a:cs typeface="Arial" pitchFamily="34" charset="-120"/>
+                <a:ea typeface="BIZ UDPGothic" pitchFamily="34" charset="-122"/>
+                <a:cs typeface="BIZ UDPGothic" pitchFamily="34" charset="-120"/>
               </a:rPr>
               <a:t>年間250〜280億円</a:t>
             </a:r>
@@ -11709,11 +11709,11 @@
             <a:r>
               <a:rPr lang="en-US" sz="1000" dirty="0">
                 <a:solidFill>
-                  <a:srgbClr val="CCCCCC"/>
+                  <a:srgbClr val="2B2F36"/>
                 </a:solidFill>
                 <a:latin typeface="Arial" pitchFamily="34" charset="0"/>
-                <a:ea typeface="Arial" pitchFamily="34" charset="-122"/>
-                <a:cs typeface="Arial" pitchFamily="34" charset="-120"/>
+                <a:ea typeface="BIZ UDPGothic" pitchFamily="34" charset="-122"/>
+                <a:cs typeface="BIZ UDPGothic" pitchFamily="34" charset="-120"/>
               </a:rPr>
               <a:t>受信料から拠出</a:t>
             </a:r>
@@ -11726,11 +11726,11 @@
             <a:r>
               <a:rPr lang="en-US" sz="1000" dirty="0">
                 <a:solidFill>
-                  <a:srgbClr val="CCCCCC"/>
+                  <a:srgbClr val="2B2F36"/>
                 </a:solidFill>
                 <a:latin typeface="Arial" pitchFamily="34" charset="0"/>
-                <a:ea typeface="Arial" pitchFamily="34" charset="-122"/>
-                <a:cs typeface="Arial" pitchFamily="34" charset="-120"/>
+                <a:ea typeface="BIZ UDPGothic" pitchFamily="34" charset="-122"/>
+                <a:cs typeface="BIZ UDPGothic" pitchFamily="34" charset="-120"/>
               </a:rPr>
               <a:t>成果は非公開</a:t>
             </a:r>
@@ -11765,11 +11765,11 @@
             <a:r>
               <a:rPr lang="en-US" sz="2800" dirty="0">
                 <a:solidFill>
-                  <a:srgbClr val="D62828"/>
+                  <a:srgbClr val="C8161D"/>
                 </a:solidFill>
                 <a:latin typeface="Arial" pitchFamily="34" charset="0"/>
-                <a:ea typeface="Arial" pitchFamily="34" charset="-122"/>
-                <a:cs typeface="Arial" pitchFamily="34" charset="-120"/>
+                <a:ea typeface="BIZ UDPGothic" pitchFamily="34" charset="-122"/>
+                <a:cs typeface="BIZ UDPGothic" pitchFamily="34" charset="-120"/>
               </a:rPr>
               <a:t>→</a:t>
             </a:r>
@@ -11794,11 +11794,11 @@
             </a:avLst>
           </a:prstGeom>
           <a:solidFill>
-            <a:srgbClr val="2E2E2E"/>
+            <a:srgbClr val="DDE0E6"/>
           </a:solidFill>
           <a:ln w="12700">
             <a:solidFill>
-              <a:srgbClr val="2E2E2E"/>
+              <a:srgbClr val="DDE0E6"/>
             </a:solidFill>
             <a:prstDash val="solid"/>
           </a:ln>
@@ -11838,11 +11838,11 @@
             <a:r>
               <a:rPr lang="en-US" sz="1600" b="1" dirty="0">
                 <a:solidFill>
-                  <a:srgbClr val="F5F5F0"/>
-                </a:solidFill>
-                <a:latin typeface="Cambria" pitchFamily="34" charset="0"/>
-                <a:ea typeface="Cambria" pitchFamily="34" charset="-122"/>
-                <a:cs typeface="Cambria" pitchFamily="34" charset="-120"/>
+                  <a:srgbClr val="16181D"/>
+                </a:solidFill>
+                <a:latin typeface="BIZ UDPGothic" pitchFamily="34" charset="0"/>
+                <a:ea typeface="BIZ UDPGothic" pitchFamily="34" charset="-122"/>
+                <a:cs typeface="BIZ UDPGothic" pitchFamily="34" charset="-120"/>
               </a:rPr>
               <a:t>廃止</a:t>
             </a:r>
@@ -11865,11 +11865,11 @@
             <a:avLst/>
           </a:prstGeom>
           <a:solidFill>
-            <a:srgbClr val="2E2E2E"/>
+            <a:srgbClr val="DDE0E6"/>
           </a:solidFill>
           <a:ln w="12700">
             <a:solidFill>
-              <a:srgbClr val="2E2E2E"/>
+              <a:srgbClr val="DDE0E6"/>
             </a:solidFill>
             <a:prstDash val="solid"/>
           </a:ln>
@@ -11902,11 +11902,11 @@
             <a:r>
               <a:rPr lang="en-US" sz="1000" dirty="0">
                 <a:solidFill>
-                  <a:srgbClr val="CCCCCC"/>
+                  <a:srgbClr val="2B2F36"/>
                 </a:solidFill>
                 <a:latin typeface="Arial" pitchFamily="34" charset="0"/>
-                <a:ea typeface="Arial" pitchFamily="34" charset="-122"/>
-                <a:cs typeface="Arial" pitchFamily="34" charset="-120"/>
+                <a:ea typeface="BIZ UDPGothic" pitchFamily="34" charset="-122"/>
+                <a:cs typeface="BIZ UDPGothic" pitchFamily="34" charset="-120"/>
               </a:rPr>
               <a:t>受信料からの</a:t>
             </a:r>
@@ -11919,11 +11919,11 @@
             <a:r>
               <a:rPr lang="en-US" sz="1000" dirty="0">
                 <a:solidFill>
-                  <a:srgbClr val="CCCCCC"/>
+                  <a:srgbClr val="2B2F36"/>
                 </a:solidFill>
                 <a:latin typeface="Arial" pitchFamily="34" charset="0"/>
-                <a:ea typeface="Arial" pitchFamily="34" charset="-122"/>
-                <a:cs typeface="Arial" pitchFamily="34" charset="-120"/>
+                <a:ea typeface="BIZ UDPGothic" pitchFamily="34" charset="-122"/>
+                <a:cs typeface="BIZ UDPGothic" pitchFamily="34" charset="-120"/>
               </a:rPr>
               <a:t>支出をゼロに</a:t>
             </a:r>
@@ -11958,11 +11958,11 @@
             <a:r>
               <a:rPr lang="en-US" sz="2800" dirty="0">
                 <a:solidFill>
-                  <a:srgbClr val="D62828"/>
+                  <a:srgbClr val="C8161D"/>
                 </a:solidFill>
                 <a:latin typeface="Arial" pitchFamily="34" charset="0"/>
-                <a:ea typeface="Arial" pitchFamily="34" charset="-122"/>
-                <a:cs typeface="Arial" pitchFamily="34" charset="-120"/>
+                <a:ea typeface="BIZ UDPGothic" pitchFamily="34" charset="-122"/>
+                <a:cs typeface="BIZ UDPGothic" pitchFamily="34" charset="-120"/>
               </a:rPr>
               <a:t>→</a:t>
             </a:r>
@@ -11987,11 +11987,11 @@
             </a:avLst>
           </a:prstGeom>
           <a:solidFill>
-            <a:srgbClr val="081808"/>
+            <a:srgbClr val="E9EFF8"/>
           </a:solidFill>
           <a:ln w="12700">
             <a:solidFill>
-              <a:srgbClr val="2E2E2E"/>
+              <a:srgbClr val="DDE0E6"/>
             </a:solidFill>
             <a:prstDash val="solid"/>
           </a:ln>
@@ -12031,11 +12031,11 @@
             <a:r>
               <a:rPr lang="en-US" sz="1600" b="1" dirty="0">
                 <a:solidFill>
-                  <a:srgbClr val="4CAF50"/>
-                </a:solidFill>
-                <a:latin typeface="Cambria" pitchFamily="34" charset="0"/>
-                <a:ea typeface="Cambria" pitchFamily="34" charset="-122"/>
-                <a:cs typeface="Cambria" pitchFamily="34" charset="-120"/>
+                  <a:srgbClr val="1D4F91"/>
+                </a:solidFill>
+                <a:latin typeface="BIZ UDPGothic" pitchFamily="34" charset="0"/>
+                <a:ea typeface="BIZ UDPGothic" pitchFamily="34" charset="-122"/>
+                <a:cs typeface="BIZ UDPGothic" pitchFamily="34" charset="-120"/>
               </a:rPr>
               <a:t>国立大学</a:t>
             </a:r>
@@ -12048,11 +12048,11 @@
             <a:r>
               <a:rPr lang="en-US" sz="1600" b="1" dirty="0">
                 <a:solidFill>
-                  <a:srgbClr val="4CAF50"/>
-                </a:solidFill>
-                <a:latin typeface="Cambria" pitchFamily="34" charset="0"/>
-                <a:ea typeface="Cambria" pitchFamily="34" charset="-122"/>
-                <a:cs typeface="Cambria" pitchFamily="34" charset="-120"/>
+                  <a:srgbClr val="1D4F91"/>
+                </a:solidFill>
+                <a:latin typeface="BIZ UDPGothic" pitchFamily="34" charset="0"/>
+                <a:ea typeface="BIZ UDPGothic" pitchFamily="34" charset="-122"/>
+                <a:cs typeface="BIZ UDPGothic" pitchFamily="34" charset="-120"/>
               </a:rPr>
               <a:t>3〜4校</a:t>
             </a:r>
@@ -12075,11 +12075,11 @@
             <a:avLst/>
           </a:prstGeom>
           <a:solidFill>
-            <a:srgbClr val="2E2E2E"/>
+            <a:srgbClr val="DDE0E6"/>
           </a:solidFill>
           <a:ln w="12700">
             <a:solidFill>
-              <a:srgbClr val="2E2E2E"/>
+              <a:srgbClr val="DDE0E6"/>
             </a:solidFill>
             <a:prstDash val="solid"/>
           </a:ln>
@@ -12112,11 +12112,11 @@
             <a:r>
               <a:rPr lang="en-US" sz="1000" dirty="0">
                 <a:solidFill>
-                  <a:srgbClr val="CCCCCC"/>
+                  <a:srgbClr val="2B2F36"/>
                 </a:solidFill>
                 <a:latin typeface="Arial" pitchFamily="34" charset="0"/>
-                <a:ea typeface="Arial" pitchFamily="34" charset="-122"/>
-                <a:cs typeface="Arial" pitchFamily="34" charset="-120"/>
+                <a:ea typeface="BIZ UDPGothic" pitchFamily="34" charset="-122"/>
+                <a:cs typeface="BIZ UDPGothic" pitchFamily="34" charset="-120"/>
               </a:rPr>
               <a:t>東大・東工大等</a:t>
             </a:r>
@@ -12129,11 +12129,11 @@
             <a:r>
               <a:rPr lang="en-US" sz="1000" dirty="0">
                 <a:solidFill>
-                  <a:srgbClr val="CCCCCC"/>
+                  <a:srgbClr val="2B2F36"/>
                 </a:solidFill>
                 <a:latin typeface="Arial" pitchFamily="34" charset="0"/>
-                <a:ea typeface="Arial" pitchFamily="34" charset="-122"/>
-                <a:cs typeface="Arial" pitchFamily="34" charset="-120"/>
+                <a:ea typeface="BIZ UDPGothic" pitchFamily="34" charset="-122"/>
+                <a:cs typeface="BIZ UDPGothic" pitchFamily="34" charset="-120"/>
               </a:rPr>
               <a:t>科学技術振興費で継続</a:t>
             </a:r>
@@ -12146,11 +12146,11 @@
             <a:r>
               <a:rPr lang="en-US" sz="1000" dirty="0">
                 <a:solidFill>
-                  <a:srgbClr val="CCCCCC"/>
+                  <a:srgbClr val="2B2F36"/>
                 </a:solidFill>
                 <a:latin typeface="Arial" pitchFamily="34" charset="0"/>
-                <a:ea typeface="Arial" pitchFamily="34" charset="-122"/>
-                <a:cs typeface="Arial" pitchFamily="34" charset="-120"/>
+                <a:ea typeface="BIZ UDPGothic" pitchFamily="34" charset="-122"/>
+                <a:cs typeface="BIZ UDPGothic" pitchFamily="34" charset="-120"/>
               </a:rPr>
               <a:t>成果はオープン化</a:t>
             </a:r>
@@ -12172,7 +12172,7 @@
     <p:bg>
       <p:bgPr>
         <a:solidFill>
-          <a:srgbClr val="0A0A0A"/>
+          <a:srgbClr val="F5F6F8"/>
         </a:solidFill>
       </p:bgPr>
     </p:bg>
@@ -12217,11 +12217,11 @@
             <a:r>
               <a:rPr lang="en-US" sz="900" b="1" spc="400" kern="0" dirty="0">
                 <a:solidFill>
-                  <a:srgbClr val="D62828"/>
+                  <a:srgbClr val="C8161D"/>
                 </a:solidFill>
                 <a:latin typeface="Arial" pitchFamily="34" charset="0"/>
-                <a:ea typeface="Arial" pitchFamily="34" charset="-122"/>
-                <a:cs typeface="Arial" pitchFamily="34" charset="-120"/>
+                <a:ea typeface="BIZ UDPGothic" pitchFamily="34" charset="-122"/>
+                <a:cs typeface="BIZ UDPGothic" pitchFamily="34" charset="-120"/>
               </a:rPr>
               <a:t>PILLAR 03 — DETAIL</a:t>
             </a:r>
@@ -12256,11 +12256,11 @@
             <a:r>
               <a:rPr lang="en-US" sz="3600" b="1" dirty="0">
                 <a:solidFill>
-                  <a:srgbClr val="F5F5F0"/>
-                </a:solidFill>
-                <a:latin typeface="Cambria" pitchFamily="34" charset="0"/>
-                <a:ea typeface="Cambria" pitchFamily="34" charset="-122"/>
-                <a:cs typeface="Cambria" pitchFamily="34" charset="-120"/>
+                  <a:srgbClr val="16181D"/>
+                </a:solidFill>
+                <a:latin typeface="BIZ UDPGothic" pitchFamily="34" charset="0"/>
+                <a:ea typeface="BIZ UDPGothic" pitchFamily="34" charset="-122"/>
+                <a:cs typeface="BIZ UDPGothic" pitchFamily="34" charset="-120"/>
               </a:rPr>
               <a:t>オープン化が生む国家映像戦略</a:t>
             </a:r>
@@ -12283,11 +12283,11 @@
             <a:avLst/>
           </a:prstGeom>
           <a:solidFill>
-            <a:srgbClr val="2E2E2E"/>
+            <a:srgbClr val="DDE0E6"/>
           </a:solidFill>
           <a:ln w="12700">
             <a:solidFill>
-              <a:srgbClr val="2E2E2E"/>
+              <a:srgbClr val="DDE0E6"/>
             </a:solidFill>
             <a:prstDash val="solid"/>
           </a:ln>
@@ -12320,11 +12320,11 @@
             <a:r>
               <a:rPr lang="en-US" sz="1100" dirty="0">
                 <a:solidFill>
-                  <a:srgbClr val="CCCCCC"/>
+                  <a:srgbClr val="2B2F36"/>
                 </a:solidFill>
                 <a:latin typeface="Arial" pitchFamily="34" charset="0"/>
-                <a:ea typeface="Arial" pitchFamily="34" charset="-122"/>
-                <a:cs typeface="Arial" pitchFamily="34" charset="-120"/>
+                <a:ea typeface="BIZ UDPGothic" pitchFamily="34" charset="-122"/>
+                <a:cs typeface="BIZ UDPGothic" pitchFamily="34" charset="-120"/>
               </a:rPr>
               <a:t>移管後の研究成果は、日本のすべての民間放送局・配信事業者・クリエイターへオープンライセンスで提供する。</a:t>
             </a:r>
@@ -12349,11 +12349,11 @@
             </a:avLst>
           </a:prstGeom>
           <a:solidFill>
-            <a:srgbClr val="D62828"/>
+            <a:srgbClr val="C8161D"/>
           </a:solidFill>
           <a:ln w="12700">
             <a:solidFill>
-              <a:srgbClr val="D62828"/>
+              <a:srgbClr val="C8161D"/>
             </a:solidFill>
             <a:prstDash val="solid"/>
           </a:ln>
@@ -12386,11 +12386,11 @@
             <a:r>
               <a:rPr lang="en-US" sz="1600" b="1" dirty="0">
                 <a:solidFill>
-                  <a:srgbClr val="F5F5F0"/>
-                </a:solidFill>
-                <a:latin typeface="Cambria" pitchFamily="34" charset="0"/>
-                <a:ea typeface="Cambria" pitchFamily="34" charset="-122"/>
-                <a:cs typeface="Cambria" pitchFamily="34" charset="-120"/>
+                  <a:srgbClr val="FFFFFF"/>
+                </a:solidFill>
+                <a:latin typeface="BIZ UDPGothic" pitchFamily="34" charset="0"/>
+                <a:ea typeface="BIZ UDPGothic" pitchFamily="34" charset="-122"/>
+                <a:cs typeface="BIZ UDPGothic" pitchFamily="34" charset="-120"/>
               </a:rPr>
               <a:t>オープン</a:t>
             </a:r>
@@ -12403,11 +12403,11 @@
             <a:r>
               <a:rPr lang="en-US" sz="1600" b="1" dirty="0">
                 <a:solidFill>
-                  <a:srgbClr val="F5F5F0"/>
-                </a:solidFill>
-                <a:latin typeface="Cambria" pitchFamily="34" charset="0"/>
-                <a:ea typeface="Cambria" pitchFamily="34" charset="-122"/>
-                <a:cs typeface="Cambria" pitchFamily="34" charset="-120"/>
+                  <a:srgbClr val="FFFFFF"/>
+                </a:solidFill>
+                <a:latin typeface="BIZ UDPGothic" pitchFamily="34" charset="0"/>
+                <a:ea typeface="BIZ UDPGothic" pitchFamily="34" charset="-122"/>
+                <a:cs typeface="BIZ UDPGothic" pitchFamily="34" charset="-120"/>
               </a:rPr>
               <a:t>ライセンス</a:t>
             </a:r>
@@ -12432,11 +12432,11 @@
             </a:avLst>
           </a:prstGeom>
           <a:solidFill>
-            <a:srgbClr val="1A1A1A"/>
+            <a:srgbClr val="FFFFFF"/>
           </a:solidFill>
           <a:ln w="12700">
             <a:solidFill>
-              <a:srgbClr val="2E2E2E"/>
+              <a:srgbClr val="DDE0E6"/>
             </a:solidFill>
             <a:prstDash val="solid"/>
           </a:ln>
@@ -12476,11 +12476,11 @@
             <a:r>
               <a:rPr lang="en-US" sz="1200" b="1" dirty="0">
                 <a:solidFill>
-                  <a:srgbClr val="F5F5F0"/>
-                </a:solidFill>
-                <a:latin typeface="Cambria" pitchFamily="34" charset="0"/>
-                <a:ea typeface="Cambria" pitchFamily="34" charset="-122"/>
-                <a:cs typeface="Cambria" pitchFamily="34" charset="-120"/>
+                  <a:srgbClr val="16181D"/>
+                </a:solidFill>
+                <a:latin typeface="BIZ UDPGothic" pitchFamily="34" charset="0"/>
+                <a:ea typeface="BIZ UDPGothic" pitchFamily="34" charset="-122"/>
+                <a:cs typeface="BIZ UDPGothic" pitchFamily="34" charset="-120"/>
               </a:rPr>
               <a:t>民間放送局</a:t>
             </a:r>
@@ -12505,11 +12505,11 @@
             </a:avLst>
           </a:prstGeom>
           <a:solidFill>
-            <a:srgbClr val="1A1A1A"/>
+            <a:srgbClr val="FFFFFF"/>
           </a:solidFill>
           <a:ln w="12700">
             <a:solidFill>
-              <a:srgbClr val="2E2E2E"/>
+              <a:srgbClr val="DDE0E6"/>
             </a:solidFill>
             <a:prstDash val="solid"/>
           </a:ln>
@@ -12549,11 +12549,11 @@
             <a:r>
               <a:rPr lang="en-US" sz="1200" b="1" dirty="0">
                 <a:solidFill>
-                  <a:srgbClr val="F5F5F0"/>
-                </a:solidFill>
-                <a:latin typeface="Cambria" pitchFamily="34" charset="0"/>
-                <a:ea typeface="Cambria" pitchFamily="34" charset="-122"/>
-                <a:cs typeface="Cambria" pitchFamily="34" charset="-120"/>
+                  <a:srgbClr val="16181D"/>
+                </a:solidFill>
+                <a:latin typeface="BIZ UDPGothic" pitchFamily="34" charset="0"/>
+                <a:ea typeface="BIZ UDPGothic" pitchFamily="34" charset="-122"/>
+                <a:cs typeface="BIZ UDPGothic" pitchFamily="34" charset="-120"/>
               </a:rPr>
               <a:t>配信事業者</a:t>
             </a:r>
@@ -12578,11 +12578,11 @@
             </a:avLst>
           </a:prstGeom>
           <a:solidFill>
-            <a:srgbClr val="1A1A1A"/>
+            <a:srgbClr val="FFFFFF"/>
           </a:solidFill>
           <a:ln w="12700">
             <a:solidFill>
-              <a:srgbClr val="2E2E2E"/>
+              <a:srgbClr val="DDE0E6"/>
             </a:solidFill>
             <a:prstDash val="solid"/>
           </a:ln>
@@ -12622,11 +12622,11 @@
             <a:r>
               <a:rPr lang="en-US" sz="1200" b="1" dirty="0">
                 <a:solidFill>
-                  <a:srgbClr val="F5F5F0"/>
-                </a:solidFill>
-                <a:latin typeface="Cambria" pitchFamily="34" charset="0"/>
-                <a:ea typeface="Cambria" pitchFamily="34" charset="-122"/>
-                <a:cs typeface="Cambria" pitchFamily="34" charset="-120"/>
+                  <a:srgbClr val="16181D"/>
+                </a:solidFill>
+                <a:latin typeface="BIZ UDPGothic" pitchFamily="34" charset="0"/>
+                <a:ea typeface="BIZ UDPGothic" pitchFamily="34" charset="-122"/>
+                <a:cs typeface="BIZ UDPGothic" pitchFamily="34" charset="-120"/>
               </a:rPr>
               <a:t>映像クリエイター</a:t>
             </a:r>
@@ -12651,11 +12651,11 @@
             </a:avLst>
           </a:prstGeom>
           <a:solidFill>
-            <a:srgbClr val="1A1A1A"/>
+            <a:srgbClr val="FFFFFF"/>
           </a:solidFill>
           <a:ln w="12700">
             <a:solidFill>
-              <a:srgbClr val="2E2E2E"/>
+              <a:srgbClr val="DDE0E6"/>
             </a:solidFill>
             <a:prstDash val="solid"/>
           </a:ln>
@@ -12695,11 +12695,11 @@
             <a:r>
               <a:rPr lang="en-US" sz="1200" b="1" dirty="0">
                 <a:solidFill>
-                  <a:srgbClr val="F5F5F0"/>
-                </a:solidFill>
-                <a:latin typeface="Cambria" pitchFamily="34" charset="0"/>
-                <a:ea typeface="Cambria" pitchFamily="34" charset="-122"/>
-                <a:cs typeface="Cambria" pitchFamily="34" charset="-120"/>
+                  <a:srgbClr val="16181D"/>
+                </a:solidFill>
+                <a:latin typeface="BIZ UDPGothic" pitchFamily="34" charset="0"/>
+                <a:ea typeface="BIZ UDPGothic" pitchFamily="34" charset="-122"/>
+                <a:cs typeface="BIZ UDPGothic" pitchFamily="34" charset="-120"/>
               </a:rPr>
               <a:t>スタートアップ</a:t>
             </a:r>
@@ -12724,11 +12724,11 @@
             </a:avLst>
           </a:prstGeom>
           <a:solidFill>
-            <a:srgbClr val="1A1A1A"/>
+            <a:srgbClr val="FFFFFF"/>
           </a:solidFill>
           <a:ln w="12700">
             <a:solidFill>
-              <a:srgbClr val="2E2E2E"/>
+              <a:srgbClr val="DDE0E6"/>
             </a:solidFill>
             <a:prstDash val="solid"/>
           </a:ln>
@@ -12768,11 +12768,11 @@
             <a:r>
               <a:rPr lang="en-US" sz="1000" dirty="0">
                 <a:solidFill>
-                  <a:srgbClr val="CCCCCC"/>
+                  <a:srgbClr val="2B2F36"/>
                 </a:solidFill>
                 <a:latin typeface="Arial" pitchFamily="34" charset="0"/>
-                <a:ea typeface="Arial" pitchFamily="34" charset="-122"/>
-                <a:cs typeface="Arial" pitchFamily="34" charset="-120"/>
+                <a:ea typeface="BIZ UDPGothic" pitchFamily="34" charset="-122"/>
+                <a:cs typeface="BIZ UDPGothic" pitchFamily="34" charset="-120"/>
               </a:rPr>
               <a:t>目的：NHKが囲い込んでいた技術インフラを解放し、日本のコンテンツ産業全体がNetflix・海外メディアと対等に戦えるプラットフォームを国主導で整備する</a:t>
             </a:r>
